--- a/docs/content/power_and_error/power_and_error_lecture.pptx
+++ b/docs/content/power_and_error/power_and_error_lecture.pptx
@@ -28,6 +28,13 @@
     <p:sldId id="276" r:id="rId22"/>
     <p:sldId id="277" r:id="rId23"/>
     <p:sldId id="278" r:id="rId24"/>
+    <p:sldId id="279" r:id="rId25"/>
+    <p:sldId id="280" r:id="rId26"/>
+    <p:sldId id="281" r:id="rId27"/>
+    <p:sldId id="282" r:id="rId28"/>
+    <p:sldId id="283" r:id="rId29"/>
+    <p:sldId id="284" r:id="rId30"/>
+    <p:sldId id="285" r:id="rId31"/>
   </p:sldIdLst>
   <p:sldSz cx="9144000" cy="5143500" type="screen16x9"/>
   <p:notesSz cx="6858000" cy="9144000"/>
@@ -3391,8 +3398,11 @@
         <p:spPr>
           <a:xfrm>
             <a:off x="0" y="0"/>
-            <a:ext cx="9144000" cy="871538"/>
+            <a:ext cx="9144000" cy="602780"/>
           </a:xfrm>
+          <a:solidFill>
+            <a:srgbClr val="70121D"/>
+          </a:solidFill>
         </p:spPr>
         <p:txBody>
           <a:bodyPr/>
@@ -3402,24 +3412,20 @@
               <a:buNone/>
             </a:pPr>
             <a:r>
-              <a:rPr b="1"/>
-              <a:t>Lecture 6:</a:t>
-            </a:r>
-            <a:r>
-              <a:rPr/>
-              <a:t> Significance Levels and Interpretation</a:t>
-            </a:r>
-          </a:p>
-        </p:txBody>
-      </p:sp>
-      <p:sp>
-        <p:nvSpPr>
-          <p:cNvPr id="4" name="Text Placeholder 3"/>
-          <p:cNvSpPr>
-            <a:spLocks noGrp="1"/>
-          </p:cNvSpPr>
-          <p:nvPr>
-            <p:ph idx="2" sz="half" type="body"/>
+              <a:rPr/>
+              <a:t>Understanding P-Values</a:t>
+            </a:r>
+          </a:p>
+        </p:txBody>
+      </p:sp>
+      <p:sp>
+        <p:nvSpPr>
+          <p:cNvPr id="3" name="Content Placeholder 2"/>
+          <p:cNvSpPr>
+            <a:spLocks noGrp="1"/>
+          </p:cNvSpPr>
+          <p:nvPr>
+            <p:ph idx="1" sz="half"/>
           </p:nvPr>
         </p:nvSpPr>
         <p:spPr/>
@@ -3432,9 +3438,358 @@
             </a:pPr>
             <a:r>
               <a:rPr/>
+              <a:t>Hypothesis tests are expressed as a p-value (0 = never, 1 = always).</a:t>
+            </a:r>
+          </a:p>
+          <a:p>
+            <a:pPr lvl="0" indent="0" marL="0">
+              <a:buNone/>
+            </a:pPr>
+            <a:r>
+              <a:rPr/>
+              <a:t>Interpret a p-value as: the probability of obtaining a sample value of the statistic (or a more extreme one) if H₀ is true.</a:t>
+            </a:r>
+          </a:p>
+          <a:p>
+            <a:pPr lvl="0"/>
+            <a:r>
+              <a:rPr b="1"/>
+              <a:t>High p-value:</a:t>
+            </a:r>
+            <a:r>
+              <a:rPr/>
+              <a:t> high probability of obtaining our sample statistic under H₀</a:t>
+            </a:r>
+          </a:p>
+          <a:p>
+            <a:pPr lvl="1"/>
+            <a:r>
+              <a:rPr/>
+              <a:t>if H₀ were true, you would frequently observe data similar to your sample</a:t>
+            </a:r>
+          </a:p>
+          <a:p>
+            <a:pPr lvl="1"/>
+            <a:r>
+              <a:rPr/>
+              <a:t>your observed results are quite compatible with what H₀ predicts</a:t>
+            </a:r>
+          </a:p>
+          <a:p>
+            <a:pPr lvl="0"/>
+            <a:r>
+              <a:rPr b="1"/>
+              <a:t>Low p-value:</a:t>
+            </a:r>
+            <a:r>
+              <a:rPr/>
+              <a:t> low probability of obtaining our sample statistic under H₀</a:t>
+            </a:r>
+          </a:p>
+          <a:p>
+            <a:pPr lvl="1"/>
+            <a:r>
+              <a:rPr/>
+              <a:t>if H₀ were true, you would rarely observe data this extreme</a:t>
+            </a:r>
+          </a:p>
+          <a:p>
+            <a:pPr lvl="1"/>
+            <a:r>
+              <a:rPr/>
+              <a:t>your results are unusual under H₀ — either you witnessed a rare event, or H₀ may be incorrect</a:t>
+            </a:r>
+          </a:p>
+        </p:txBody>
+      </p:sp>
+      <p:pic>
+        <p:nvPicPr>
+          <p:cNvPr descr="images/two_branches.jpg" id="0" name="Picture 1"/>
+          <p:cNvPicPr>
+            <a:picLocks noGrp="1" noChangeAspect="1"/>
+          </p:cNvPicPr>
+          <p:nvPr/>
+        </p:nvPicPr>
+        <p:blipFill>
+          <a:blip r:embed="rId2"/>
+          <a:stretch>
+            <a:fillRect/>
+          </a:stretch>
+        </p:blipFill>
+        <p:spPr bwMode="auto">
+          <a:xfrm>
+            <a:off x="6121400" y="1498600"/>
+            <a:ext cx="2781300" cy="2781300"/>
+          </a:xfrm>
+          <a:prstGeom prst="rect">
+            <a:avLst/>
+          </a:prstGeom>
+          <a:noFill/>
+          <a:ln w="9525">
+            <a:noFill/>
+            <a:headEnd/>
+            <a:tailEnd/>
+          </a:ln>
+        </p:spPr>
+      </p:pic>
+    </p:spTree>
+  </p:cSld>
+</p:sld>
+</file>
+
+<file path=ppt/slides/slide11.xml><?xml version="1.0" encoding="utf-8"?>
+<p:sld xmlns:a="http://schemas.openxmlformats.org/drawingml/2006/main" xmlns:r="http://schemas.openxmlformats.org/officeDocument/2006/relationships" xmlns:p="http://schemas.openxmlformats.org/presentationml/2006/main">
+  <p:cSld>
+    <p:spTree>
+      <p:nvGrpSpPr>
+        <p:cNvPr id="1" name=""/>
+        <p:cNvGrpSpPr/>
+        <p:nvPr/>
+      </p:nvGrpSpPr>
+      <p:grpSpPr>
+        <a:xfrm>
+          <a:off x="0" y="0"/>
+          <a:ext cx="0" cy="0"/>
+          <a:chOff x="0" y="0"/>
+          <a:chExt cx="0" cy="0"/>
+        </a:xfrm>
+      </p:grpSpPr>
+      <p:sp>
+        <p:nvSpPr>
+          <p:cNvPr id="2" name="Title 1"/>
+          <p:cNvSpPr>
+            <a:spLocks noGrp="1"/>
+          </p:cNvSpPr>
+          <p:nvPr>
+            <p:ph type="title"/>
+          </p:nvPr>
+        </p:nvSpPr>
+        <p:spPr>
+          <a:xfrm>
+            <a:off x="0" y="0"/>
+            <a:ext cx="9144000" cy="602780"/>
+          </a:xfrm>
+          <a:solidFill>
+            <a:srgbClr val="70121D"/>
+          </a:solidFill>
+        </p:spPr>
+        <p:txBody>
+          <a:bodyPr/>
+          <a:lstStyle/>
+          <a:p>
+            <a:pPr lvl="0" indent="0" marL="0">
+              <a:buNone/>
+            </a:pPr>
+            <a:r>
+              <a:rPr/>
+              <a:t>P-Value Interpretation</a:t>
+            </a:r>
+          </a:p>
+        </p:txBody>
+      </p:sp>
+      <p:sp>
+        <p:nvSpPr>
+          <p:cNvPr id="3" name="Content Placeholder 2"/>
+          <p:cNvSpPr>
+            <a:spLocks noGrp="1"/>
+          </p:cNvSpPr>
+          <p:nvPr>
+            <p:ph idx="1" sz="half"/>
+          </p:nvPr>
+        </p:nvSpPr>
+        <p:spPr/>
+        <p:txBody>
+          <a:bodyPr/>
+          <a:lstStyle/>
+          <a:p>
+            <a:pPr lvl="0" indent="0" marL="0">
+              <a:buNone/>
+            </a:pPr>
+            <a:r>
+              <a:rPr/>
               <a:t>Statistical test results:</a:t>
             </a:r>
           </a:p>
+          <a:p>
+            <a:pPr lvl="0"/>
+            <a:r>
+              <a:rPr/>
+              <a:t>p = 0.3 means that if I repeated the study 100 times, I would get this (or a more extreme) result due to chance </a:t>
+            </a:r>
+            <a:r>
+              <a:rPr b="1"/>
+              <a:t>30 times</a:t>
+            </a:r>
+          </a:p>
+          <a:p>
+            <a:pPr lvl="0"/>
+            <a:r>
+              <a:rPr/>
+              <a:t>p = 0.03 means that if I repeated the study 100 times, I would get this (or a more extreme) result due to chance </a:t>
+            </a:r>
+            <a:r>
+              <a:rPr b="1"/>
+              <a:t>3 times</a:t>
+            </a:r>
+          </a:p>
+          <a:p>
+            <a:pPr lvl="0" indent="0" marL="0">
+              <a:buNone/>
+            </a:pPr>
+            <a:r>
+              <a:rPr i="1"/>
+              <a:t>Which p-value suggests H₀ is likely false?</a:t>
+            </a:r>
+          </a:p>
+          <a:p>
+            <a:pPr lvl="0" indent="0" marL="0">
+              <a:buNone/>
+            </a:pPr>
+            <a:r>
+              <a:rPr b="1"/>
+              <a:t>At what point do we reject H₀?</a:t>
+            </a:r>
+          </a:p>
+          <a:p>
+            <a:pPr lvl="0" indent="0" marL="0">
+              <a:buNone/>
+            </a:pPr>
+            <a:r>
+              <a:rPr/>
+              <a:t>p &lt; 0.05 is the conventional “significance threshold” (α = alpha).</a:t>
+            </a:r>
+          </a:p>
+          <a:p>
+            <a:pPr lvl="0" indent="0" marL="0">
+              <a:buNone/>
+            </a:pPr>
+            <a:r>
+              <a:rPr/>
+              <a:t>p &lt; 0.05 means: if H₀ is true and we repeated the study 100 times, we would get this (or a more extreme) result less than 5 times due to chance.</a:t>
+            </a:r>
+          </a:p>
+        </p:txBody>
+      </p:sp>
+      <p:sp>
+        <p:nvSpPr>
+          <p:cNvPr id="4" name="Content Placeholder 3"/>
+          <p:cNvSpPr>
+            <a:spLocks noGrp="1"/>
+          </p:cNvSpPr>
+          <p:nvPr>
+            <p:ph idx="2" sz="half"/>
+          </p:nvPr>
+        </p:nvSpPr>
+        <p:spPr/>
+        <p:txBody>
+          <a:bodyPr/>
+          <a:lstStyle/>
+          <a:p>
+            <a:pPr lvl="0" indent="0" marL="1270000">
+              <a:buNone/>
+            </a:pPr>
+            <a:r>
+              <a:rPr sz="2000" b="1"/>
+              <a:t>Note</a:t>
+            </a:r>
+          </a:p>
+          <a:p>
+            <a:pPr lvl="0" indent="0" marL="1270000">
+              <a:buNone/>
+            </a:pPr>
+            <a:r>
+              <a:rPr sz="2000" b="1"/>
+              <a:t>✅ Key idea</a:t>
+            </a:r>
+          </a:p>
+          <a:p>
+            <a:pPr lvl="0" indent="0" marL="1270000">
+              <a:buNone/>
+            </a:pPr>
+            <a:r>
+              <a:rPr sz="2000"/>
+              <a:t>α is chosen </a:t>
+            </a:r>
+            <a:r>
+              <a:rPr sz="2000" i="1"/>
+              <a:t>before</a:t>
+            </a:r>
+            <a:r>
+              <a:rPr sz="2000"/>
+              <a:t> data collection. It’s a policy about how much Type I error risk you’re willing to accept — not something you pick after seeing the p-value.</a:t>
+            </a:r>
+          </a:p>
+        </p:txBody>
+      </p:sp>
+    </p:spTree>
+  </p:cSld>
+</p:sld>
+</file>
+
+<file path=ppt/slides/slide12.xml><?xml version="1.0" encoding="utf-8"?>
+<p:sld xmlns:a="http://schemas.openxmlformats.org/drawingml/2006/main" xmlns:r="http://schemas.openxmlformats.org/officeDocument/2006/relationships" xmlns:p="http://schemas.openxmlformats.org/presentationml/2006/main">
+  <p:cSld>
+    <p:spTree>
+      <p:nvGrpSpPr>
+        <p:cNvPr id="1" name=""/>
+        <p:cNvGrpSpPr/>
+        <p:nvPr/>
+      </p:nvGrpSpPr>
+      <p:grpSpPr>
+        <a:xfrm>
+          <a:off x="0" y="0"/>
+          <a:ext cx="0" cy="0"/>
+          <a:chOff x="0" y="0"/>
+          <a:chExt cx="0" cy="0"/>
+        </a:xfrm>
+      </p:grpSpPr>
+      <p:sp>
+        <p:nvSpPr>
+          <p:cNvPr id="2" name="Title 1"/>
+          <p:cNvSpPr>
+            <a:spLocks noGrp="1"/>
+          </p:cNvSpPr>
+          <p:nvPr>
+            <p:ph type="title"/>
+          </p:nvPr>
+        </p:nvSpPr>
+        <p:spPr>
+          <a:xfrm>
+            <a:off x="0" y="0"/>
+            <a:ext cx="9144000" cy="602780"/>
+          </a:xfrm>
+          <a:solidFill>
+            <a:srgbClr val="70121D"/>
+          </a:solidFill>
+        </p:spPr>
+        <p:txBody>
+          <a:bodyPr/>
+          <a:lstStyle/>
+          <a:p>
+            <a:pPr lvl="0" indent="0" marL="0">
+              <a:buNone/>
+            </a:pPr>
+            <a:r>
+              <a:rPr/>
+              <a:t>Significance Levels and Interpretation</a:t>
+            </a:r>
+          </a:p>
+        </p:txBody>
+      </p:sp>
+      <p:sp>
+        <p:nvSpPr>
+          <p:cNvPr id="3" name="Content Placeholder 2"/>
+          <p:cNvSpPr>
+            <a:spLocks noGrp="1"/>
+          </p:cNvSpPr>
+          <p:nvPr>
+            <p:ph idx="1" sz="half"/>
+          </p:nvPr>
+        </p:nvSpPr>
+        <p:spPr/>
+        <p:txBody>
+          <a:bodyPr/>
+          <a:lstStyle/>
           <a:p>
             <a:pPr lvl="0"/>
             <a:r>
@@ -3446,22 +3801,14 @@
             <a:pPr lvl="0"/>
             <a:r>
               <a:rPr/>
-              <a:t>Lowering α will lower likelihood of incorrectly rejecting a true null hypothesis (e.g., 0.01, 0.001)</a:t>
+              <a:t>Lowering α lowers the likelihood of incorrectly rejecting a true H₀ (e.g., 0.01, 0.001)</a:t>
             </a:r>
           </a:p>
           <a:p>
             <a:pPr lvl="0"/>
             <a:r>
               <a:rPr i="1"/>
-              <a:t>Both Hs and α are specified</a:t>
-            </a:r>
-            <a:r>
-              <a:rPr/>
-              <a:t> </a:t>
-            </a:r>
-            <a:r>
-              <a:rPr i="1"/>
-              <a:t>BEFORE collection of data and analysis</a:t>
+              <a:t>Both hypotheses and α are specified BEFORE data collection and analysis</a:t>
             </a:r>
           </a:p>
           <a:p>
@@ -3470,16 +3817,7 @@
             </a:pPr>
             <a:r>
               <a:rPr/>
-              <a:t>Traditionally α=0.05 is used as a cut off for rejecting null hypothesis</a:t>
-            </a:r>
-          </a:p>
-          <a:p>
-            <a:pPr lvl="0" indent="0" marL="0">
-              <a:buNone/>
-            </a:pPr>
-            <a:r>
-              <a:rPr/>
-              <a:t>There is nothing magical about 0.05 - actual p-values need to be reported - also need to decide prior to study</a:t>
+              <a:t>Traditionally, α = 0.05 is used as the cutoff for rejecting H₀. There is nothing magical about 0.05 — actual p-values should be reported, and α still needs to be decided prior to the study.</a:t>
             </a:r>
           </a:p>
         </p:txBody>
@@ -3495,8 +3833,8 @@
           </p:nvPr>
         </p:nvGraphicFramePr>
         <p:xfrm>
-          <a:off x="3657600" y="952500"/>
-          <a:ext cx="5232400" cy="3797300"/>
+          <a:off x="6121400" y="660400"/>
+          <a:ext cx="2781300" cy="4470400"/>
         </p:xfrm>
         <a:graphic>
           <a:graphicData uri="http://schemas.openxmlformats.org/drawingml/2006/table">
@@ -3505,8 +3843,8 @@
                 <a:tableStyleId>{5C22544A-7EE6-4342-B048-85BDC9FD1C3A}</a:tableStyleId>
               </a:tblPr>
               <a:tblGrid>
-                <a:gridCol w="2616200"/>
-                <a:gridCol w="2616200"/>
+                <a:gridCol w="1384300"/>
+                <a:gridCol w="1384300"/>
               </a:tblGrid>
               <a:tr h="0">
                 <a:tc>
@@ -3568,7 +3906,7 @@
                       </a:pPr>
                       <a:r>
                         <a:rPr/>
-                        <a:t>No evidence against Ho - data appear consistent with Ho</a:t>
+                        <a:t>No evidence against H₀ — data appear consistent with H₀</a:t>
                       </a:r>
                     </a:p>
                   </a:txBody>
@@ -3600,7 +3938,7 @@
                       </a:pPr>
                       <a:r>
                         <a:rPr/>
-                        <a:t>Weak evidence against the Ho in favor of Ha</a:t>
+                        <a:t>Weak evidence against H₀ in favor of Hₐ</a:t>
                       </a:r>
                     </a:p>
                   </a:txBody>
@@ -3632,7 +3970,7 @@
                       </a:pPr>
                       <a:r>
                         <a:rPr/>
-                        <a:t>Moderate evidence against Ho in favor of Ha</a:t>
+                        <a:t>Moderate evidence against H₀ in favor of Hₐ</a:t>
                       </a:r>
                     </a:p>
                   </a:txBody>
@@ -3664,7 +4002,7 @@
                       </a:pPr>
                       <a:r>
                         <a:rPr/>
-                        <a:t>Strong evidence against Ho in favor of Ha</a:t>
+                        <a:t>Strong evidence against H₀ in favor of Hₐ</a:t>
                       </a:r>
                     </a:p>
                   </a:txBody>
@@ -3696,7 +4034,7 @@
                       </a:pPr>
                       <a:r>
                         <a:rPr/>
-                        <a:t>Very strong evidence against Ho in favor of Ha</a:t>
+                        <a:t>Very strong evidence against H₀ in favor of Hₐ</a:t>
                       </a:r>
                     </a:p>
                   </a:txBody>
@@ -3711,7 +4049,7 @@
 </p:sld>
 </file>
 
-<file path=ppt/slides/slide11.xml><?xml version="1.0" encoding="utf-8"?>
+<file path=ppt/slides/slide13.xml><?xml version="1.0" encoding="utf-8"?>
 <p:sld xmlns:a="http://schemas.openxmlformats.org/drawingml/2006/main" xmlns:r="http://schemas.openxmlformats.org/officeDocument/2006/relationships" xmlns:p="http://schemas.openxmlformats.org/presentationml/2006/main">
   <p:cSld>
     <p:spTree>
@@ -3755,12 +4093,8 @@
               <a:buNone/>
             </a:pPr>
             <a:r>
-              <a:rPr b="1"/>
-              <a:t>Lecture 6:</a:t>
-            </a:r>
-            <a:r>
-              <a:rPr/>
-              <a:t> Understanding P-values Visually</a:t>
+              <a:rPr/>
+              <a:t>Understanding P-Values Visually</a:t>
             </a:r>
           </a:p>
         </p:txBody>
@@ -3797,87 +4131,95 @@
             </a:r>
           </a:p>
           <a:p>
-            <a:pPr lvl="0"/>
+            <a:pPr lvl="0" indent="0" marL="0">
+              <a:buNone/>
+            </a:pPr>
             <a:r>
               <a:rPr b="1"/>
               <a:t>Common interpretations:</a:t>
             </a:r>
           </a:p>
           <a:p>
-            <a:pPr lvl="1"/>
-            <a:r>
-              <a:rPr/>
-              <a:t>p &lt; 0.05: Strong evidence against H₀</a:t>
-            </a:r>
-          </a:p>
-          <a:p>
-            <a:pPr lvl="1"/>
-            <a:r>
-              <a:rPr/>
-              <a:t>0.05 ≤ p &lt; 0.10: Moderate evidence against H₀</a:t>
-            </a:r>
-          </a:p>
-          <a:p>
-            <a:pPr lvl="1"/>
-            <a:r>
-              <a:rPr/>
-              <a:t>p ≥ 0.10: Insufficient evidence against H₀</a:t>
-            </a:r>
-          </a:p>
-          <a:p>
             <a:pPr lvl="0"/>
+            <a:r>
+              <a:rPr/>
+              <a:t>p &lt; 0.05: strong evidence against H₀</a:t>
+            </a:r>
+          </a:p>
+          <a:p>
+            <a:pPr lvl="0"/>
+            <a:r>
+              <a:rPr/>
+              <a:t>0.05 ≤ p &lt; 0.10: moderate evidence against H₀</a:t>
+            </a:r>
+          </a:p>
+          <a:p>
+            <a:pPr lvl="0"/>
+            <a:r>
+              <a:rPr/>
+              <a:t>p ≥ 0.10: insufficient evidence against H₀</a:t>
+            </a:r>
+          </a:p>
+          <a:p>
+            <a:pPr lvl="0" indent="0" marL="0">
+              <a:buNone/>
+            </a:pPr>
             <a:r>
               <a:rPr b="1"/>
               <a:t>Common misinterpretations:</a:t>
             </a:r>
           </a:p>
           <a:p>
-            <a:pPr lvl="1"/>
-            <a:r>
-              <a:rPr/>
-              <a:t>p-value is NOT the probability that H₀ is true</a:t>
-            </a:r>
-          </a:p>
-          <a:p>
-            <a:pPr lvl="1"/>
-            <a:r>
-              <a:rPr/>
-              <a:t>p-value is NOT the probability that results occurred by chance</a:t>
-            </a:r>
-          </a:p>
-          <a:p>
-            <a:pPr lvl="1"/>
+            <a:pPr lvl="0"/>
+            <a:r>
+              <a:rPr/>
+              <a:t>p-value is </a:t>
+            </a:r>
+            <a:r>
+              <a:rPr b="1"/>
+              <a:t>NOT</a:t>
+            </a:r>
+            <a:r>
+              <a:rPr/>
+              <a:t> the probability that H₀ is true</a:t>
+            </a:r>
+          </a:p>
+          <a:p>
+            <a:pPr lvl="0"/>
+            <a:r>
+              <a:rPr/>
+              <a:t>p-value is </a:t>
+            </a:r>
+            <a:r>
+              <a:rPr b="1"/>
+              <a:t>NOT</a:t>
+            </a:r>
+            <a:r>
+              <a:rPr/>
+              <a:t> the probability that results occurred by chance</a:t>
+            </a:r>
+          </a:p>
+          <a:p>
+            <a:pPr lvl="0"/>
             <a:r>
               <a:rPr/>
               <a:t>Statistical significance ≠ practical significance</a:t>
             </a:r>
           </a:p>
           <a:p>
-            <a:pPr lvl="0"/>
-            <a:r>
-              <a:rPr/>
-              <a:t>Note that there is a difference in how to state the hypotheses</a:t>
-            </a:r>
-          </a:p>
-          <a:p>
-            <a:pPr lvl="1"/>
-            <a:r>
-              <a:rPr/>
-              <a:t>one sample T-TEST</a:t>
-            </a:r>
-          </a:p>
-          <a:p>
-            <a:pPr lvl="1"/>
-            <a:r>
-              <a:rPr/>
-              <a:t>two sample T-TEST</a:t>
+            <a:pPr lvl="0" indent="0" marL="0">
+              <a:buNone/>
+            </a:pPr>
+            <a:r>
+              <a:rPr/>
+              <a:t>Note there’s a difference in how the hypotheses are stated for a one-sample vs. a two-sample t-test.</a:t>
             </a:r>
           </a:p>
         </p:txBody>
       </p:sp>
       <p:pic>
         <p:nvPicPr>
-          <p:cNvPr descr="power_and_error_lecture_files/figure-pptx/l06-01-1.png" id="0" name="Picture 1"/>
+          <p:cNvPr descr="power_and_error_lecture_files/figure-pptx/unnamed-chunk-1-1.png" id="0" name="Picture 1"/>
           <p:cNvPicPr>
             <a:picLocks noGrp="1" noChangeAspect="1"/>
           </p:cNvPicPr>
@@ -3891,8 +4233,8 @@
         </p:blipFill>
         <p:spPr bwMode="auto">
           <a:xfrm>
-            <a:off x="6121400" y="1498600"/>
-            <a:ext cx="2781300" cy="2781300"/>
+            <a:off x="6121400" y="1587500"/>
+            <a:ext cx="2781300" cy="2616200"/>
           </a:xfrm>
           <a:prstGeom prst="rect">
             <a:avLst/>
@@ -3910,7 +4252,7 @@
 </p:sld>
 </file>
 
-<file path=ppt/slides/slide12.xml><?xml version="1.0" encoding="utf-8"?>
+<file path=ppt/slides/slide14.xml><?xml version="1.0" encoding="utf-8"?>
 <p:sld xmlns:a="http://schemas.openxmlformats.org/drawingml/2006/main" xmlns:r="http://schemas.openxmlformats.org/officeDocument/2006/relationships" xmlns:p="http://schemas.openxmlformats.org/presentationml/2006/main">
   <p:cSld>
     <p:spTree>
@@ -3951,12 +4293,60 @@
               <a:buNone/>
             </a:pPr>
             <a:r>
-              <a:rPr b="1"/>
-              <a:t>Lecture 6:</a:t>
-            </a:r>
-            <a:r>
-              <a:rPr/>
-              <a:t> Historical Context</a:t>
+              <a:rPr/>
+              <a:t>Part 4 · Historical Context</a:t>
+            </a:r>
+          </a:p>
+        </p:txBody>
+      </p:sp>
+    </p:spTree>
+  </p:cSld>
+</p:sld>
+</file>
+
+<file path=ppt/slides/slide15.xml><?xml version="1.0" encoding="utf-8"?>
+<p:sld xmlns:a="http://schemas.openxmlformats.org/drawingml/2006/main" xmlns:r="http://schemas.openxmlformats.org/officeDocument/2006/relationships" xmlns:p="http://schemas.openxmlformats.org/presentationml/2006/main">
+  <p:cSld>
+    <p:spTree>
+      <p:nvGrpSpPr>
+        <p:cNvPr id="1" name=""/>
+        <p:cNvGrpSpPr/>
+        <p:nvPr/>
+      </p:nvGrpSpPr>
+      <p:grpSpPr>
+        <a:xfrm>
+          <a:off x="0" y="0"/>
+          <a:ext cx="0" cy="0"/>
+          <a:chOff x="0" y="0"/>
+          <a:chExt cx="0" cy="0"/>
+        </a:xfrm>
+      </p:grpSpPr>
+      <p:sp>
+        <p:nvSpPr>
+          <p:cNvPr id="2" name="Title 1"/>
+          <p:cNvSpPr>
+            <a:spLocks noGrp="1"/>
+          </p:cNvSpPr>
+          <p:nvPr>
+            <p:ph type="title"/>
+          </p:nvPr>
+        </p:nvSpPr>
+        <p:spPr>
+          <a:xfrm>
+            <a:off x="0" y="0"/>
+            <a:ext cx="9144000" cy="582780"/>
+          </a:xfrm>
+        </p:spPr>
+        <p:txBody>
+          <a:bodyPr/>
+          <a:lstStyle/>
+          <a:p>
+            <a:pPr lvl="0" indent="0" marL="0">
+              <a:buNone/>
+            </a:pPr>
+            <a:r>
+              <a:rPr/>
+              <a:t>Historical Context</a:t>
             </a:r>
           </a:p>
         </p:txBody>
@@ -3996,7 +4386,7 @@
 </p:sld>
 </file>
 
-<file path=ppt/slides/slide13.xml><?xml version="1.0" encoding="utf-8"?>
+<file path=ppt/slides/slide16.xml><?xml version="1.0" encoding="utf-8"?>
 <p:sld xmlns:a="http://schemas.openxmlformats.org/drawingml/2006/main" xmlns:r="http://schemas.openxmlformats.org/officeDocument/2006/relationships" xmlns:p="http://schemas.openxmlformats.org/presentationml/2006/main">
   <p:cSld>
     <p:spTree>
@@ -4026,8 +4416,11 @@
         <p:spPr>
           <a:xfrm>
             <a:off x="0" y="0"/>
-            <a:ext cx="9144000" cy="582780"/>
+            <a:ext cx="9144000" cy="602780"/>
           </a:xfrm>
+          <a:solidFill>
+            <a:srgbClr val="70121D"/>
+          </a:solidFill>
         </p:spPr>
         <p:txBody>
           <a:bodyPr/>
@@ -4037,12 +4430,8 @@
               <a:buNone/>
             </a:pPr>
             <a:r>
-              <a:rPr b="1"/>
-              <a:t>Lecture 6:</a:t>
-            </a:r>
-            <a:r>
-              <a:rPr/>
-              <a:t> Fisher’s Perspective</a:t>
+              <a:rPr/>
+              <a:t>Fisher’s Perspective</a:t>
             </a:r>
           </a:p>
         </p:txBody>
@@ -4054,7 +4443,7 @@
             <a:spLocks noGrp="1"/>
           </p:cNvSpPr>
           <p:nvPr>
-            <p:ph idx="1"/>
+            <p:ph idx="1" sz="half"/>
           </p:nvPr>
         </p:nvSpPr>
         <p:spPr/>
@@ -4062,40 +4451,61 @@
           <a:bodyPr/>
           <a:lstStyle/>
           <a:p>
+            <a:pPr lvl="0" indent="0" marL="1270000">
+              <a:buNone/>
+            </a:pPr>
+            <a:r>
+              <a:rPr sz="2000"/>
+              <a:t>“If p is between 0.1 and 0.9 there is certainly no reason to suspect the hypothesis tested. If it is below 0.02 it is strongly indicated that the hypothesis fails to account for the whole of the facts. We shall not often be astray if we draw a conventional line at .05 …”</a:t>
+            </a:r>
+          </a:p>
+          <a:p>
             <a:pPr lvl="0" indent="0" marL="0">
               <a:buNone/>
             </a:pPr>
             <a:r>
               <a:rPr/>
-              <a:t>Fisher:</a:t>
-            </a:r>
-          </a:p>
-          <a:p>
-            <a:pPr lvl="0" indent="0" marL="0">
-              <a:buNone/>
-            </a:pPr>
-            <a:r>
-              <a:rPr/>
-              <a:t>p-value as informal measure of discrepancy between data and Ho</a:t>
-            </a:r>
-          </a:p>
-          <a:p>
-            <a:pPr lvl="0" indent="0" marL="0">
-              <a:buNone/>
-            </a:pPr>
-            <a:r>
-              <a:rPr/>
-              <a:t>“If p is between 0.1 and 0.9 there is certainly no reason to suspect the hypothesis tested. If it is below 0.02 it is strongly indicated that the hypothesis fails to account for the whole of the facts. We shall not often be astray if we draw a conventional line at .05 …”</a:t>
-            </a:r>
-          </a:p>
-        </p:txBody>
-      </p:sp>
+              <a:t>— R.A. Fisher, on the p-value as an informal measure of discrepancy between data and H₀</a:t>
+            </a:r>
+          </a:p>
+        </p:txBody>
+      </p:sp>
+      <p:pic>
+        <p:nvPicPr>
+          <p:cNvPr descr="images/clipboard-694363384.png" id="0" name="Picture 1"/>
+          <p:cNvPicPr>
+            <a:picLocks noGrp="1" noChangeAspect="1"/>
+          </p:cNvPicPr>
+          <p:nvPr/>
+        </p:nvPicPr>
+        <p:blipFill>
+          <a:blip r:embed="rId2"/>
+          <a:stretch>
+            <a:fillRect/>
+          </a:stretch>
+        </p:blipFill>
+        <p:spPr bwMode="auto">
+          <a:xfrm>
+            <a:off x="6121400" y="1625600"/>
+            <a:ext cx="2781300" cy="2540000"/>
+          </a:xfrm>
+          <a:prstGeom prst="rect">
+            <a:avLst/>
+          </a:prstGeom>
+          <a:noFill/>
+          <a:ln w="9525">
+            <a:noFill/>
+            <a:headEnd/>
+            <a:tailEnd/>
+          </a:ln>
+        </p:spPr>
+      </p:pic>
     </p:spTree>
   </p:cSld>
 </p:sld>
 </file>
 
-<file path=ppt/slides/slide14.xml><?xml version="1.0" encoding="utf-8"?>
+<file path=ppt/slides/slide17.xml><?xml version="1.0" encoding="utf-8"?>
 <p:sld xmlns:a="http://schemas.openxmlformats.org/drawingml/2006/main" xmlns:r="http://schemas.openxmlformats.org/officeDocument/2006/relationships" xmlns:p="http://schemas.openxmlformats.org/presentationml/2006/main">
   <p:cSld>
     <p:spTree>
@@ -4125,6 +4535,58 @@
         <p:spPr>
           <a:xfrm>
             <a:off x="0" y="0"/>
+            <a:ext cx="9144000" cy="582780"/>
+          </a:xfrm>
+        </p:spPr>
+        <p:txBody>
+          <a:bodyPr/>
+          <a:lstStyle/>
+          <a:p>
+            <a:pPr lvl="0" indent="0" marL="0">
+              <a:buNone/>
+            </a:pPr>
+            <a:r>
+              <a:rPr/>
+              <a:t>Part 5 · Decision Errors</a:t>
+            </a:r>
+          </a:p>
+        </p:txBody>
+      </p:sp>
+    </p:spTree>
+  </p:cSld>
+</p:sld>
+</file>
+
+<file path=ppt/slides/slide18.xml><?xml version="1.0" encoding="utf-8"?>
+<p:sld xmlns:a="http://schemas.openxmlformats.org/drawingml/2006/main" xmlns:r="http://schemas.openxmlformats.org/officeDocument/2006/relationships" xmlns:p="http://schemas.openxmlformats.org/presentationml/2006/main">
+  <p:cSld>
+    <p:spTree>
+      <p:nvGrpSpPr>
+        <p:cNvPr id="1" name=""/>
+        <p:cNvGrpSpPr/>
+        <p:nvPr/>
+      </p:nvGrpSpPr>
+      <p:grpSpPr>
+        <a:xfrm>
+          <a:off x="0" y="0"/>
+          <a:ext cx="0" cy="0"/>
+          <a:chOff x="0" y="0"/>
+          <a:chExt cx="0" cy="0"/>
+        </a:xfrm>
+      </p:grpSpPr>
+      <p:sp>
+        <p:nvSpPr>
+          <p:cNvPr id="2" name="Title 1"/>
+          <p:cNvSpPr>
+            <a:spLocks noGrp="1"/>
+          </p:cNvSpPr>
+          <p:nvPr>
+            <p:ph type="title"/>
+          </p:nvPr>
+        </p:nvSpPr>
+        <p:spPr>
+          <a:xfrm>
+            <a:off x="0" y="0"/>
             <a:ext cx="9144000" cy="602780"/>
           </a:xfrm>
           <a:solidFill>
@@ -4139,8 +4601,8 @@
               <a:buNone/>
             </a:pPr>
             <a:r>
-              <a:rPr b="1"/>
-              <a:t>Decision errors</a:t>
+              <a:rPr/>
+              <a:t>Decision Errors</a:t>
             </a:r>
           </a:p>
         </p:txBody>
@@ -4170,21 +4632,48 @@
             <a:pPr lvl="0"/>
             <a:r>
               <a:rPr/>
-              <a:t>“Decision errors”</a:t>
+              <a:t>These are called “decision errors”</a:t>
             </a:r>
           </a:p>
           <a:p>
             <a:pPr lvl="0"/>
             <a:r>
               <a:rPr/>
-              <a:t>Two types of decision errors</a:t>
+              <a:t>There are two types of decision errors</a:t>
             </a:r>
           </a:p>
           <a:p>
             <a:pPr lvl="0"/>
             <a:r>
               <a:rPr/>
-              <a:t>Want to know probability of making these errors</a:t>
+              <a:t>We want to know the probability of making each of them</a:t>
+            </a:r>
+          </a:p>
+          <a:p>
+            <a:pPr lvl="0" indent="0" marL="1270000">
+              <a:buNone/>
+            </a:pPr>
+            <a:r>
+              <a:rPr sz="2000" b="1"/>
+              <a:t>Note</a:t>
+            </a:r>
+          </a:p>
+          <a:p>
+            <a:pPr lvl="0" indent="0" marL="1270000">
+              <a:buNone/>
+            </a:pPr>
+            <a:r>
+              <a:rPr sz="2000" b="1"/>
+              <a:t>📖 Reference</a:t>
+            </a:r>
+          </a:p>
+          <a:p>
+            <a:pPr lvl="0" indent="0" marL="1270000">
+              <a:buNone/>
+            </a:pPr>
+            <a:r>
+              <a:rPr sz="2000"/>
+              <a:t>Gotelli &amp; Ellison, Ch. 4 — the “Errors in Hypothesis Testing” section covers exactly this material.</a:t>
             </a:r>
           </a:p>
         </p:txBody>
@@ -4224,7 +4713,7 @@
 </p:sld>
 </file>
 
-<file path=ppt/slides/slide15.xml><?xml version="1.0" encoding="utf-8"?>
+<file path=ppt/slides/slide19.xml><?xml version="1.0" encoding="utf-8"?>
 <p:sld xmlns:a="http://schemas.openxmlformats.org/drawingml/2006/main" xmlns:r="http://schemas.openxmlformats.org/officeDocument/2006/relationships" xmlns:p="http://schemas.openxmlformats.org/presentationml/2006/main">
   <p:cSld>
     <p:spTree>
@@ -4268,8 +4757,8 @@
               <a:buNone/>
             </a:pPr>
             <a:r>
-              <a:rPr b="1"/>
-              <a:t>Type I and Type II Errors - Concept</a:t>
+              <a:rPr/>
+              <a:t>Type I and Type II Errors — Concept</a:t>
             </a:r>
           </a:p>
         </p:txBody>
@@ -4292,25 +4781,18 @@
             <a:pPr lvl="0"/>
             <a:r>
               <a:rPr b="1"/>
-              <a:t>Type I error rate</a:t>
+              <a:t>Type I error rate, α</a:t>
+            </a:r>
+            <a:r>
+              <a:rPr/>
+              <a:t>: wrongly reject H₀ when it’s true</a:t>
             </a:r>
           </a:p>
           <a:p>
             <a:pPr lvl="1"/>
             <a:r>
-              <a:rPr b="1"/>
-              <a:t>α</a:t>
-            </a:r>
-            <a:r>
-              <a:rPr/>
-              <a:t>: wrongly reject H₀ when it’s true</a:t>
-            </a:r>
-          </a:p>
-          <a:p>
-            <a:pPr lvl="1"/>
-            <a:r>
-              <a:rPr/>
-              <a:t>α = 0.05 means a type I error rate of 5%</a:t>
+              <a:rPr/>
+              <a:t>α = 0.05 means a Type I error rate of 5%</a:t>
             </a:r>
           </a:p>
           <a:p>
@@ -4319,41 +4801,34 @@
               <a:rPr b="1"/>
               <a:t>Type II error rate, β</a:t>
             </a:r>
-          </a:p>
-          <a:p>
-            <a:pPr lvl="1"/>
-            <a:r>
-              <a:rPr/>
-              <a:t>wrongly fail to reject H₀ when it’s false</a:t>
+            <a:r>
+              <a:rPr/>
+              <a:t>: wrongly fail to reject H₀ when it’s false</a:t>
             </a:r>
           </a:p>
           <a:p>
             <a:pPr lvl="0"/>
             <a:r>
               <a:rPr b="1"/>
-              <a:t>Power = 1-β</a:t>
-            </a:r>
-            <a:r>
-              <a:rPr/>
-              <a:t>: </a:t>
-            </a:r>
-            <a:r>
-              <a:rPr b="1"/>
-              <a:t>probability of correctly rejecting H₀ when H₁ is true</a:t>
+              <a:t>Power = 1 − β</a:t>
+            </a:r>
+            <a:r>
+              <a:rPr/>
+              <a:t>: the probability of correctly rejecting H₀ when Hₐ is true</a:t>
             </a:r>
           </a:p>
           <a:p>
             <a:pPr lvl="0"/>
             <a:r>
               <a:rPr/>
-              <a:t>Inverse relationship between type I and type II error - but not straightforward</a:t>
+              <a:t>Inverse relationship between Type I and Type II error — but not a straightforward one</a:t>
             </a:r>
           </a:p>
           <a:p>
             <a:pPr lvl="0"/>
             <a:r>
               <a:rPr/>
-              <a:t>Result of chance - sample not representative of population</a:t>
+              <a:t>Can result from chance — a sample not representative of the population</a:t>
             </a:r>
           </a:p>
           <a:p>
@@ -4400,734 +4875,6 @@
 </p:sld>
 </file>
 
-<file path=ppt/slides/slide16.xml><?xml version="1.0" encoding="utf-8"?>
-<p:sld xmlns:a="http://schemas.openxmlformats.org/drawingml/2006/main" xmlns:r="http://schemas.openxmlformats.org/officeDocument/2006/relationships" xmlns:p="http://schemas.openxmlformats.org/presentationml/2006/main">
-  <p:cSld>
-    <p:spTree>
-      <p:nvGrpSpPr>
-        <p:cNvPr id="1" name=""/>
-        <p:cNvGrpSpPr/>
-        <p:nvPr/>
-      </p:nvGrpSpPr>
-      <p:grpSpPr>
-        <a:xfrm>
-          <a:off x="0" y="0"/>
-          <a:ext cx="0" cy="0"/>
-          <a:chOff x="0" y="0"/>
-          <a:chExt cx="0" cy="0"/>
-        </a:xfrm>
-      </p:grpSpPr>
-      <p:sp>
-        <p:nvSpPr>
-          <p:cNvPr id="2" name="Title 1"/>
-          <p:cNvSpPr>
-            <a:spLocks noGrp="1"/>
-          </p:cNvSpPr>
-          <p:nvPr>
-            <p:ph type="title"/>
-          </p:nvPr>
-        </p:nvSpPr>
-        <p:spPr>
-          <a:xfrm>
-            <a:off x="0" y="0"/>
-            <a:ext cx="9144000" cy="602780"/>
-          </a:xfrm>
-          <a:solidFill>
-            <a:srgbClr val="70121D"/>
-          </a:solidFill>
-        </p:spPr>
-        <p:txBody>
-          <a:bodyPr/>
-          <a:lstStyle/>
-          <a:p>
-            <a:pPr lvl="0" indent="0" marL="0">
-              <a:buNone/>
-            </a:pPr>
-            <a:r>
-              <a:rPr b="1"/>
-              <a:t>Lecture 6:</a:t>
-            </a:r>
-            <a:r>
-              <a:rPr/>
-              <a:t> Type I and Type II Errors - Details</a:t>
-            </a:r>
-          </a:p>
-        </p:txBody>
-      </p:sp>
-      <p:sp>
-        <p:nvSpPr>
-          <p:cNvPr id="3" name="Content Placeholder 2"/>
-          <p:cNvSpPr>
-            <a:spLocks noGrp="1"/>
-          </p:cNvSpPr>
-          <p:nvPr>
-            <p:ph idx="1" sz="half"/>
-          </p:nvPr>
-        </p:nvSpPr>
-        <p:spPr/>
-        <p:txBody>
-          <a:bodyPr/>
-          <a:lstStyle/>
-          <a:p>
-            <a:pPr lvl="0" indent="0" marL="0">
-              <a:buNone/>
-            </a:pPr>
-            <a:r>
-              <a:rPr/>
-              <a:t>When making decisions based on hypothesis tests, two types of errors can occur:</a:t>
-            </a:r>
-          </a:p>
-          <a:p>
-            <a:pPr lvl="0" indent="0" marL="0">
-              <a:buNone/>
-            </a:pPr>
-            <a:r>
-              <a:rPr b="1"/>
-              <a:t>Type I Error (False Positive)</a:t>
-            </a:r>
-          </a:p>
-          <a:p>
-            <a:pPr lvl="0"/>
-            <a:r>
-              <a:rPr/>
-              <a:t>Rejecting H₀ when it’s actually true</a:t>
-            </a:r>
-          </a:p>
-          <a:p>
-            <a:pPr lvl="0"/>
-            <a:r>
-              <a:rPr/>
-              <a:t>Probability = α (significance level)</a:t>
-            </a:r>
-          </a:p>
-          <a:p>
-            <a:pPr lvl="0"/>
-            <a:r>
-              <a:rPr/>
-              <a:t>“Finding an effect that isn’t real”</a:t>
-            </a:r>
-          </a:p>
-          <a:p>
-            <a:pPr lvl="0" indent="0" marL="0">
-              <a:buNone/>
-            </a:pPr>
-            <a:r>
-              <a:rPr b="1"/>
-              <a:t>Type II Error (False Negative)</a:t>
-            </a:r>
-          </a:p>
-          <a:p>
-            <a:pPr lvl="0"/>
-            <a:r>
-              <a:rPr/>
-              <a:t>Failing to reject H₀ when it’s actually false</a:t>
-            </a:r>
-          </a:p>
-          <a:p>
-            <a:pPr lvl="0"/>
-            <a:r>
-              <a:rPr/>
-              <a:t>Probability = β - “Missing an effect that is real”</a:t>
-            </a:r>
-          </a:p>
-          <a:p>
-            <a:pPr lvl="0" indent="0" marL="0">
-              <a:buNone/>
-            </a:pPr>
-            <a:r>
-              <a:rPr b="1"/>
-              <a:t>Statistical Power = 1 - β</a:t>
-            </a:r>
-          </a:p>
-          <a:p>
-            <a:pPr lvl="0"/>
-            <a:r>
-              <a:rPr/>
-              <a:t>Probability of correctly rejecting a false H₀</a:t>
-            </a:r>
-          </a:p>
-          <a:p>
-            <a:pPr lvl="0"/>
-            <a:r>
-              <a:rPr/>
-              <a:t>Increases with:</a:t>
-            </a:r>
-          </a:p>
-          <a:p>
-            <a:pPr lvl="1"/>
-            <a:r>
-              <a:rPr/>
-              <a:t>Larger sample size</a:t>
-            </a:r>
-          </a:p>
-          <a:p>
-            <a:pPr lvl="1"/>
-            <a:r>
-              <a:rPr/>
-              <a:t>Larger effect size</a:t>
-            </a:r>
-          </a:p>
-          <a:p>
-            <a:pPr lvl="1"/>
-            <a:r>
-              <a:rPr/>
-              <a:t>Lower variability</a:t>
-            </a:r>
-          </a:p>
-          <a:p>
-            <a:pPr lvl="1"/>
-            <a:r>
-              <a:rPr/>
-              <a:t>Higher α level</a:t>
-            </a:r>
-          </a:p>
-          <a:p>
-            <a:pPr lvl="0" indent="0" marL="0">
-              <a:buNone/>
-            </a:pPr>
-            <a:r>
-              <a:rPr/>
-              <a:t>The farther apart the means or lower variance the lower the beta error is ~ have higher power. - CLICK TO NEXT AS SAME TEXT</a:t>
-            </a:r>
-          </a:p>
-        </p:txBody>
-      </p:sp>
-      <p:pic>
-        <p:nvPicPr>
-          <p:cNvPr descr="images/clipboard-3204206464.png" id="0" name="Picture 1"/>
-          <p:cNvPicPr>
-            <a:picLocks noGrp="1" noChangeAspect="1"/>
-          </p:cNvPicPr>
-          <p:nvPr/>
-        </p:nvPicPr>
-        <p:blipFill>
-          <a:blip r:embed="rId2"/>
-          <a:stretch>
-            <a:fillRect/>
-          </a:stretch>
-        </p:blipFill>
-        <p:spPr bwMode="auto">
-          <a:xfrm>
-            <a:off x="6121400" y="1854200"/>
-            <a:ext cx="2781300" cy="2082800"/>
-          </a:xfrm>
-          <a:prstGeom prst="rect">
-            <a:avLst/>
-          </a:prstGeom>
-          <a:noFill/>
-          <a:ln w="9525">
-            <a:noFill/>
-            <a:headEnd/>
-            <a:tailEnd/>
-          </a:ln>
-        </p:spPr>
-      </p:pic>
-    </p:spTree>
-  </p:cSld>
-</p:sld>
-</file>
-
-<file path=ppt/slides/slide17.xml><?xml version="1.0" encoding="utf-8"?>
-<p:sld xmlns:a="http://schemas.openxmlformats.org/drawingml/2006/main" xmlns:r="http://schemas.openxmlformats.org/officeDocument/2006/relationships" xmlns:p="http://schemas.openxmlformats.org/presentationml/2006/main">
-  <p:cSld>
-    <p:spTree>
-      <p:nvGrpSpPr>
-        <p:cNvPr id="1" name=""/>
-        <p:cNvGrpSpPr/>
-        <p:nvPr/>
-      </p:nvGrpSpPr>
-      <p:grpSpPr>
-        <a:xfrm>
-          <a:off x="0" y="0"/>
-          <a:ext cx="0" cy="0"/>
-          <a:chOff x="0" y="0"/>
-          <a:chExt cx="0" cy="0"/>
-        </a:xfrm>
-      </p:grpSpPr>
-      <p:sp>
-        <p:nvSpPr>
-          <p:cNvPr id="2" name="Title 1"/>
-          <p:cNvSpPr>
-            <a:spLocks noGrp="1"/>
-          </p:cNvSpPr>
-          <p:nvPr>
-            <p:ph type="title"/>
-          </p:nvPr>
-        </p:nvSpPr>
-        <p:spPr>
-          <a:xfrm>
-            <a:off x="0" y="0"/>
-            <a:ext cx="9144000" cy="602780"/>
-          </a:xfrm>
-          <a:solidFill>
-            <a:srgbClr val="70121D"/>
-          </a:solidFill>
-        </p:spPr>
-        <p:txBody>
-          <a:bodyPr/>
-          <a:lstStyle/>
-          <a:p>
-            <a:pPr lvl="0" indent="0" marL="0">
-              <a:buNone/>
-            </a:pPr>
-            <a:r>
-              <a:rPr b="1"/>
-              <a:t>Lecture 6:</a:t>
-            </a:r>
-            <a:r>
-              <a:rPr/>
-              <a:t> Type I and Type II Errors - Visualization</a:t>
-            </a:r>
-          </a:p>
-        </p:txBody>
-      </p:sp>
-      <p:sp>
-        <p:nvSpPr>
-          <p:cNvPr id="3" name="Content Placeholder 2"/>
-          <p:cNvSpPr>
-            <a:spLocks noGrp="1"/>
-          </p:cNvSpPr>
-          <p:nvPr>
-            <p:ph idx="1" sz="half"/>
-          </p:nvPr>
-        </p:nvSpPr>
-        <p:spPr/>
-        <p:txBody>
-          <a:bodyPr/>
-          <a:lstStyle/>
-          <a:p>
-            <a:pPr lvl="0" indent="0" marL="0">
-              <a:buNone/>
-            </a:pPr>
-            <a:r>
-              <a:rPr/>
-              <a:t>When making decisions based on hypothesis tests, two types of errors can occur:</a:t>
-            </a:r>
-          </a:p>
-          <a:p>
-            <a:pPr lvl="0" indent="0" marL="0">
-              <a:buNone/>
-            </a:pPr>
-            <a:r>
-              <a:rPr b="1"/>
-              <a:t>Type I Error (False Positive)</a:t>
-            </a:r>
-          </a:p>
-          <a:p>
-            <a:pPr lvl="0"/>
-            <a:r>
-              <a:rPr/>
-              <a:t>Rejecting H₀ when it’s actually true</a:t>
-            </a:r>
-          </a:p>
-          <a:p>
-            <a:pPr lvl="0"/>
-            <a:r>
-              <a:rPr/>
-              <a:t>Probability = α (significance level)</a:t>
-            </a:r>
-          </a:p>
-          <a:p>
-            <a:pPr lvl="0"/>
-            <a:r>
-              <a:rPr/>
-              <a:t>“Finding an effect that isn’t real”</a:t>
-            </a:r>
-          </a:p>
-          <a:p>
-            <a:pPr lvl="0" indent="0" marL="0">
-              <a:buNone/>
-            </a:pPr>
-            <a:r>
-              <a:rPr b="1"/>
-              <a:t>Type II Error (False Negative)</a:t>
-            </a:r>
-          </a:p>
-          <a:p>
-            <a:pPr lvl="0"/>
-            <a:r>
-              <a:rPr/>
-              <a:t>Failing to reject H₀ when it’s actually false</a:t>
-            </a:r>
-          </a:p>
-          <a:p>
-            <a:pPr lvl="0"/>
-            <a:r>
-              <a:rPr/>
-              <a:t>Probability = β - “Missing an effect that is real”</a:t>
-            </a:r>
-          </a:p>
-          <a:p>
-            <a:pPr lvl="0" indent="0" marL="0">
-              <a:buNone/>
-            </a:pPr>
-            <a:r>
-              <a:rPr b="1"/>
-              <a:t>Statistical Power = 1 - β</a:t>
-            </a:r>
-          </a:p>
-          <a:p>
-            <a:pPr lvl="0"/>
-            <a:r>
-              <a:rPr/>
-              <a:t>Probability of correctly rejecting a false H₀</a:t>
-            </a:r>
-          </a:p>
-          <a:p>
-            <a:pPr lvl="0"/>
-            <a:r>
-              <a:rPr/>
-              <a:t>Increases with:</a:t>
-            </a:r>
-          </a:p>
-          <a:p>
-            <a:pPr lvl="1"/>
-            <a:r>
-              <a:rPr/>
-              <a:t>Larger sample size</a:t>
-            </a:r>
-          </a:p>
-          <a:p>
-            <a:pPr lvl="1"/>
-            <a:r>
-              <a:rPr/>
-              <a:t>Larger effect size</a:t>
-            </a:r>
-          </a:p>
-          <a:p>
-            <a:pPr lvl="1"/>
-            <a:r>
-              <a:rPr/>
-              <a:t>Lower variability</a:t>
-            </a:r>
-          </a:p>
-          <a:p>
-            <a:pPr lvl="1"/>
-            <a:r>
-              <a:rPr/>
-              <a:t>Higher α level</a:t>
-            </a:r>
-          </a:p>
-          <a:p>
-            <a:pPr lvl="0" indent="0" marL="0">
-              <a:buNone/>
-            </a:pPr>
-            <a:r>
-              <a:rPr/>
-              <a:t>The farther apart the means or lower variance the lower the beta error is ~ have higher power.</a:t>
-            </a:r>
-          </a:p>
-        </p:txBody>
-      </p:sp>
-      <p:pic>
-        <p:nvPicPr>
-          <p:cNvPr descr="power_and_error_lecture_files/figure-pptx/l06-02-1.png" id="0" name="Picture 1"/>
-          <p:cNvPicPr>
-            <a:picLocks noGrp="1" noChangeAspect="1"/>
-          </p:cNvPicPr>
-          <p:nvPr/>
-        </p:nvPicPr>
-        <p:blipFill>
-          <a:blip r:embed="rId2"/>
-          <a:stretch>
-            <a:fillRect/>
-          </a:stretch>
-        </p:blipFill>
-        <p:spPr bwMode="auto">
-          <a:xfrm>
-            <a:off x="6121400" y="1498600"/>
-            <a:ext cx="2781300" cy="2781300"/>
-          </a:xfrm>
-          <a:prstGeom prst="rect">
-            <a:avLst/>
-          </a:prstGeom>
-          <a:noFill/>
-          <a:ln w="9525">
-            <a:noFill/>
-            <a:headEnd/>
-            <a:tailEnd/>
-          </a:ln>
-        </p:spPr>
-      </p:pic>
-    </p:spTree>
-  </p:cSld>
-</p:sld>
-</file>
-
-<file path=ppt/slides/slide18.xml><?xml version="1.0" encoding="utf-8"?>
-<p:sld xmlns:a="http://schemas.openxmlformats.org/drawingml/2006/main" xmlns:r="http://schemas.openxmlformats.org/officeDocument/2006/relationships" xmlns:p="http://schemas.openxmlformats.org/presentationml/2006/main">
-  <p:cSld>
-    <p:spTree>
-      <p:nvGrpSpPr>
-        <p:cNvPr id="1" name=""/>
-        <p:cNvGrpSpPr/>
-        <p:nvPr/>
-      </p:nvGrpSpPr>
-      <p:grpSpPr>
-        <a:xfrm>
-          <a:off x="0" y="0"/>
-          <a:ext cx="0" cy="0"/>
-          <a:chOff x="0" y="0"/>
-          <a:chExt cx="0" cy="0"/>
-        </a:xfrm>
-      </p:grpSpPr>
-      <p:sp>
-        <p:nvSpPr>
-          <p:cNvPr id="2" name="Title 1"/>
-          <p:cNvSpPr>
-            <a:spLocks noGrp="1"/>
-          </p:cNvSpPr>
-          <p:nvPr>
-            <p:ph type="title"/>
-          </p:nvPr>
-        </p:nvSpPr>
-        <p:spPr>
-          <a:xfrm>
-            <a:off x="0" y="0"/>
-            <a:ext cx="9144000" cy="582780"/>
-          </a:xfrm>
-        </p:spPr>
-        <p:txBody>
-          <a:bodyPr/>
-          <a:lstStyle/>
-          <a:p>
-            <a:pPr lvl="0" indent="0" marL="0">
-              <a:buNone/>
-            </a:pPr>
-            <a:r>
-              <a:rPr/>
-              <a:t>Practice Exercise: Interpreting Errors and Power</a:t>
-            </a:r>
-          </a:p>
-        </p:txBody>
-      </p:sp>
-      <p:sp>
-        <p:nvSpPr>
-          <p:cNvPr id="3" name="Content Placeholder 2"/>
-          <p:cNvSpPr>
-            <a:spLocks noGrp="1"/>
-          </p:cNvSpPr>
-          <p:nvPr>
-            <p:ph idx="1"/>
-          </p:nvPr>
-        </p:nvSpPr>
-        <p:spPr/>
-        <p:txBody>
-          <a:bodyPr/>
-          <a:lstStyle/>
-          <a:p>
-            <a:pPr lvl="0" indent="0" marL="1270000">
-              <a:buNone/>
-            </a:pPr>
-            <a:r>
-              <a:rPr sz="2000" b="1"/>
-              <a:t>Practice Exercise 6: Interpreting P-values and Errors</a:t>
-            </a:r>
-          </a:p>
-          <a:p>
-            <a:pPr lvl="0" indent="0" marL="1270000">
-              <a:buNone/>
-            </a:pPr>
-            <a:r>
-              <a:rPr sz="2000"/>
-              <a:t>Given the following scenarios, identify whether a Type I or Type II error might have occurred:</a:t>
-            </a:r>
-          </a:p>
-          <a:p>
-            <a:pPr lvl="0" indent="-342900" marL="342900">
-              <a:buAutoNum type="arabicPeriod"/>
-            </a:pPr>
-            <a:r>
-              <a:rPr sz="2000"/>
-              <a:t>A researcher concludes that island mice size is larger, when in fact it is not.</a:t>
-            </a:r>
-          </a:p>
-          <a:p>
-            <a:pPr lvl="0" indent="-342900" marL="342900">
-              <a:buAutoNum type="arabicPeriod"/>
-            </a:pPr>
-            <a:r>
-              <a:rPr sz="2000"/>
-              <a:t>A study fails to detect a real difference in mouse size on islands when there is and concludes there is no effect.</a:t>
-            </a:r>
-          </a:p>
-          <a:p>
-            <a:pPr lvl="0" indent="-342900" marL="342900">
-              <a:buAutoNum type="arabicPeriod"/>
-            </a:pPr>
-            <a:r>
-              <a:rPr sz="2000"/>
-              <a:t>Let’s calculate the power of our t-test to detect a 5 mm difference in mass sampling_sites:</a:t>
-            </a:r>
-          </a:p>
-          <a:p>
-            <a:pPr lvl="0"/>
-            <a:r>
-              <a:rPr sz="2000"/>
-              <a:t>pooled standard deviation</a:t>
-            </a:r>
-          </a:p>
-          <a:p>
-            <a:pPr lvl="1"/>
-            <a:r>
-              <a:rPr sz="2000"/>
-              <a:t>This is the combined standard deviation of both groups weighted by respective degrees of freedom.</a:t>
-            </a:r>
-          </a:p>
-          <a:p>
-            <a:pPr lvl="0"/>
-            <a:r>
-              <a:rPr sz="2000"/>
-              <a:t>Cohen’s d</a:t>
-            </a:r>
-          </a:p>
-          <a:p>
-            <a:pPr lvl="1"/>
-            <a:r>
-              <a:rPr sz="2000"/>
-              <a:t>standardized difference between means - here assuming a difference of 1 units (g)</a:t>
-            </a:r>
-          </a:p>
-          <a:p>
-            <a:pPr lvl="1"/>
-            <a:r>
-              <a:rPr sz="2000">
-                <a:latin typeface="Courier"/>
-              </a:rPr>
-              <a:t>delta = 0.423</a:t>
-            </a:r>
-            <a:r>
-              <a:rPr sz="2000"/>
-              <a:t>: The standardized effect size (Cohen’s d)</a:t>
-            </a:r>
-          </a:p>
-          <a:p>
-            <a:pPr lvl="0" indent="0">
-              <a:buNone/>
-            </a:pPr>
-            <a:r>
-              <a:rPr sz="2000">
-                <a:latin typeface="Courier"/>
-              </a:rPr>
-              <a:t>
-     Two-sample t test power calculation 
-              n = 28
-          delta = 0.4231154
-             sd = 1
-      sig.level = 0.05
-          power = 0.3427604
-    alternative = two.sided
-NOTE: n is number in *each* group</a:t>
-            </a:r>
-          </a:p>
-        </p:txBody>
-      </p:sp>
-    </p:spTree>
-  </p:cSld>
-</p:sld>
-</file>
-
-<file path=ppt/slides/slide19.xml><?xml version="1.0" encoding="utf-8"?>
-<p:sld xmlns:a="http://schemas.openxmlformats.org/drawingml/2006/main" xmlns:r="http://schemas.openxmlformats.org/officeDocument/2006/relationships" xmlns:p="http://schemas.openxmlformats.org/presentationml/2006/main">
-  <p:cSld>
-    <p:spTree>
-      <p:nvGrpSpPr>
-        <p:cNvPr id="1" name=""/>
-        <p:cNvGrpSpPr/>
-        <p:nvPr/>
-      </p:nvGrpSpPr>
-      <p:grpSpPr>
-        <a:xfrm>
-          <a:off x="0" y="0"/>
-          <a:ext cx="0" cy="0"/>
-          <a:chOff x="0" y="0"/>
-          <a:chExt cx="0" cy="0"/>
-        </a:xfrm>
-      </p:grpSpPr>
-      <p:sp>
-        <p:nvSpPr>
-          <p:cNvPr id="2" name="Title 1"/>
-          <p:cNvSpPr>
-            <a:spLocks noGrp="1"/>
-          </p:cNvSpPr>
-          <p:nvPr>
-            <p:ph type="title"/>
-          </p:nvPr>
-        </p:nvSpPr>
-        <p:spPr>
-          <a:xfrm>
-            <a:off x="0" y="0"/>
-            <a:ext cx="9144000" cy="582780"/>
-          </a:xfrm>
-        </p:spPr>
-        <p:txBody>
-          <a:bodyPr/>
-          <a:lstStyle/>
-          <a:p>
-            <a:pPr lvl="0" indent="0" marL="0">
-              <a:buNone/>
-            </a:pPr>
-            <a:r>
-              <a:rPr/>
-              <a:t>What if we calculated power for the pine needles you measured?</a:t>
-            </a:r>
-          </a:p>
-        </p:txBody>
-      </p:sp>
-      <p:sp>
-        <p:nvSpPr>
-          <p:cNvPr id="3" name="Content Placeholder 2"/>
-          <p:cNvSpPr>
-            <a:spLocks noGrp="1"/>
-          </p:cNvSpPr>
-          <p:nvPr>
-            <p:ph idx="1"/>
-          </p:nvPr>
-        </p:nvSpPr>
-        <p:spPr/>
-        <p:txBody>
-          <a:bodyPr/>
-          <a:lstStyle/>
-          <a:p>
-            <a:pPr lvl="0" indent="0">
-              <a:buNone/>
-            </a:pPr>
-            <a:r>
-              <a:rPr>
-                <a:latin typeface="Courier"/>
-              </a:rPr>
-              <a:t>Pooled SD: 2.58 mm</a:t>
-            </a:r>
-          </a:p>
-          <a:p>
-            <a:pPr lvl="0" indent="0">
-              <a:buNone/>
-            </a:pPr>
-            <a:r>
-              <a:rPr>
-                <a:latin typeface="Courier"/>
-              </a:rPr>
-              <a:t>Effect size for observed 1.45 mm difference: Cohen's d = 0.56 </a:t>
-            </a:r>
-          </a:p>
-          <a:p>
-            <a:pPr lvl="0" indent="0">
-              <a:buNone/>
-            </a:pPr>
-            <a:r>
-              <a:rPr>
-                <a:latin typeface="Courier"/>
-              </a:rPr>
-              <a:t>Power for observed 1.45 mm difference: 0.182 </a:t>
-            </a:r>
-          </a:p>
-        </p:txBody>
-      </p:sp>
-    </p:spTree>
-  </p:cSld>
-</p:sld>
-</file>
-
 <file path=ppt/slides/slide2.xml><?xml version="1.0" encoding="utf-8"?>
 <p:sld xmlns:a="http://schemas.openxmlformats.org/drawingml/2006/main" xmlns:r="http://schemas.openxmlformats.org/officeDocument/2006/relationships" xmlns:p="http://schemas.openxmlformats.org/presentationml/2006/main">
   <p:cSld>
@@ -5173,7 +4920,7 @@
             </a:pPr>
             <a:r>
               <a:rPr/>
-              <a:t>Lecture 5: Review</a:t>
+              <a:t>Where We Left Off</a:t>
             </a:r>
           </a:p>
         </p:txBody>
@@ -5198,7 +4945,7 @@
             </a:pPr>
             <a:r>
               <a:rPr/>
-              <a:t>Covered</a:t>
+              <a:t>Covered last time:</a:t>
             </a:r>
           </a:p>
           <a:p>
@@ -5219,28 +4966,41 @@
             <a:pPr lvl="0"/>
             <a:r>
               <a:rPr/>
-              <a:t>T Distributions</a:t>
+              <a:t>T-distributions</a:t>
             </a:r>
           </a:p>
           <a:p>
             <a:pPr lvl="0"/>
             <a:r>
               <a:rPr/>
-              <a:t>One sample T Tests</a:t>
-            </a:r>
-          </a:p>
-          <a:p>
-            <a:pPr lvl="0"/>
-            <a:r>
-              <a:rPr/>
-              <a:t>Two sample T Tests</a:t>
-            </a:r>
-          </a:p>
-          <a:p>
-            <a:pPr lvl="0"/>
-            <a:r>
-              <a:rPr/>
-              <a:t>Paired T Tests</a:t>
+              <a:t>One-sample, two-sample, and paired t-tests</a:t>
+            </a:r>
+          </a:p>
+          <a:p>
+            <a:pPr lvl="0" indent="0" marL="1270000">
+              <a:buNone/>
+            </a:pPr>
+            <a:r>
+              <a:rPr sz="2000" b="1"/>
+              <a:t>Note</a:t>
+            </a:r>
+          </a:p>
+          <a:p>
+            <a:pPr lvl="0" indent="0" marL="1270000">
+              <a:buNone/>
+            </a:pPr>
+            <a:r>
+              <a:rPr sz="2000" b="1"/>
+              <a:t>✅ Key idea from last lecture</a:t>
+            </a:r>
+          </a:p>
+          <a:p>
+            <a:pPr lvl="0" indent="0" marL="1270000">
+              <a:buNone/>
+            </a:pPr>
+            <a:r>
+              <a:rPr sz="2000"/>
+              <a:t>A t-test gives you a p-value and a decision — reject or fail to reject H₀. Today asks the next question: how good is that decision, and how often could it be wrong?</a:t>
             </a:r>
           </a:p>
         </p:txBody>
@@ -5310,8 +5070,11 @@
         <p:spPr>
           <a:xfrm>
             <a:off x="0" y="0"/>
-            <a:ext cx="9144000" cy="582780"/>
+            <a:ext cx="9144000" cy="602780"/>
           </a:xfrm>
+          <a:solidFill>
+            <a:srgbClr val="70121D"/>
+          </a:solidFill>
         </p:spPr>
         <p:txBody>
           <a:bodyPr/>
@@ -5322,7 +5085,7 @@
             </a:pPr>
             <a:r>
               <a:rPr/>
-              <a:t>What is Power</a:t>
+              <a:t>Type I and Type II Errors — Illustrated</a:t>
             </a:r>
           </a:p>
         </p:txBody>
@@ -5334,7 +5097,7 @@
             <a:spLocks noGrp="1"/>
           </p:cNvSpPr>
           <p:nvPr>
-            <p:ph idx="1"/>
+            <p:ph idx="1" sz="half"/>
           </p:nvPr>
         </p:nvSpPr>
         <p:spPr/>
@@ -5347,7 +5110,7 @@
             </a:pPr>
             <a:r>
               <a:rPr/>
-              <a:t>Statistical power represents the probability of detecting a true effect (rejecting the null hypothesis when it is false). In this case, with a power of 97%, there’s a 97% chance of detecting a true difference of X units between the means of the two groups if such a difference actually exists.</a:t>
+              <a:t>When making decisions based on hypothesis tests, two types of errors can occur:</a:t>
             </a:r>
           </a:p>
           <a:p>
@@ -5355,35 +5118,29 @@
               <a:buNone/>
             </a:pPr>
             <a:r>
-              <a:rPr/>
-              <a:t>A power analysis like this is typically done for one of these purposes:</a:t>
-            </a:r>
-          </a:p>
-          <a:p>
-            <a:pPr lvl="0" indent="-342900" marL="342900">
-              <a:buAutoNum type="arabicPeriod"/>
-            </a:pPr>
-            <a:r>
-              <a:rPr/>
-              <a:t>Before data collection to determine required sample size</a:t>
-            </a:r>
-          </a:p>
-          <a:p>
-            <a:pPr lvl="0" indent="-342900" marL="342900">
-              <a:buAutoNum type="arabicPeriod"/>
-            </a:pPr>
-            <a:r>
-              <a:rPr/>
-              <a:t>After a study to evaluate if the sample size was adequate</a:t>
-            </a:r>
-          </a:p>
-          <a:p>
-            <a:pPr lvl="0" indent="-342900" marL="342900">
-              <a:buAutoNum type="arabicPeriod"/>
-            </a:pPr>
-            <a:r>
-              <a:rPr/>
-              <a:t>To determine the minimum detectable effect size with the given sample</a:t>
+              <a:rPr b="1"/>
+              <a:t>Type I Error (False Positive)</a:t>
+            </a:r>
+          </a:p>
+          <a:p>
+            <a:pPr lvl="0"/>
+            <a:r>
+              <a:rPr/>
+              <a:t>Rejecting H₀ when it’s actually true</a:t>
+            </a:r>
+          </a:p>
+          <a:p>
+            <a:pPr lvl="0"/>
+            <a:r>
+              <a:rPr/>
+              <a:t>Probability = α (significance level)</a:t>
+            </a:r>
+          </a:p>
+          <a:p>
+            <a:pPr lvl="0"/>
+            <a:r>
+              <a:rPr/>
+              <a:t>“Finding an effect that isn’t real”</a:t>
             </a:r>
           </a:p>
           <a:p>
@@ -5391,20 +5148,88 @@
               <a:buNone/>
             </a:pPr>
             <a:r>
-              <a:rPr/>
-              <a:t>With 97% power, this test has excellent ability to detect the specified effect size. Generally, </a:t>
-            </a:r>
-            <a:r>
               <a:rPr b="1"/>
-              <a:t>80% power is considered acceptable</a:t>
-            </a:r>
-            <a:r>
-              <a:rPr/>
-              <a:t>, so 97% indicates a very well-powered study for detecting a difference of XXg between the groups.</a:t>
-            </a:r>
-          </a:p>
-        </p:txBody>
-      </p:sp>
+              <a:t>Type II Error (False Negative)</a:t>
+            </a:r>
+          </a:p>
+          <a:p>
+            <a:pPr lvl="0"/>
+            <a:r>
+              <a:rPr/>
+              <a:t>Failing to reject H₀ when it’s actually false</a:t>
+            </a:r>
+          </a:p>
+          <a:p>
+            <a:pPr lvl="0"/>
+            <a:r>
+              <a:rPr/>
+              <a:t>Probability = β — “missing an effect that is real”</a:t>
+            </a:r>
+          </a:p>
+          <a:p>
+            <a:pPr lvl="0" indent="0" marL="0">
+              <a:buNone/>
+            </a:pPr>
+            <a:r>
+              <a:rPr b="1"/>
+              <a:t>Statistical Power = 1 − β</a:t>
+            </a:r>
+          </a:p>
+          <a:p>
+            <a:pPr lvl="0"/>
+            <a:r>
+              <a:rPr/>
+              <a:t>Probability of correctly rejecting a false H₀</a:t>
+            </a:r>
+          </a:p>
+          <a:p>
+            <a:pPr lvl="0"/>
+            <a:r>
+              <a:rPr/>
+              <a:t>Increases with: larger sample size, larger effect size, lower variability, higher α level</a:t>
+            </a:r>
+          </a:p>
+          <a:p>
+            <a:pPr lvl="0" indent="0" marL="0">
+              <a:buNone/>
+            </a:pPr>
+            <a:r>
+              <a:rPr/>
+              <a:t>The farther apart the means, or the lower the variance, the lower the β error — i.e., the higher the power.</a:t>
+            </a:r>
+          </a:p>
+        </p:txBody>
+      </p:sp>
+      <p:pic>
+        <p:nvPicPr>
+          <p:cNvPr descr="images/clipboard-3204206464.png" id="0" name="Picture 1"/>
+          <p:cNvPicPr>
+            <a:picLocks noGrp="1" noChangeAspect="1"/>
+          </p:cNvPicPr>
+          <p:nvPr/>
+        </p:nvPicPr>
+        <p:blipFill>
+          <a:blip r:embed="rId2"/>
+          <a:stretch>
+            <a:fillRect/>
+          </a:stretch>
+        </p:blipFill>
+        <p:spPr bwMode="auto">
+          <a:xfrm>
+            <a:off x="6121400" y="1854200"/>
+            <a:ext cx="2781300" cy="2082800"/>
+          </a:xfrm>
+          <a:prstGeom prst="rect">
+            <a:avLst/>
+          </a:prstGeom>
+          <a:noFill/>
+          <a:ln w="9525">
+            <a:noFill/>
+            <a:headEnd/>
+            <a:tailEnd/>
+          </a:ln>
+        </p:spPr>
+      </p:pic>
     </p:spTree>
   </p:cSld>
 </p:sld>
@@ -5454,12 +5279,8 @@
               <a:buNone/>
             </a:pPr>
             <a:r>
-              <a:rPr b="1"/>
-              <a:t>Lecture 6:</a:t>
-            </a:r>
-            <a:r>
-              <a:rPr/>
-              <a:t> Error Bars and Their Interpretation</a:t>
+              <a:rPr/>
+              <a:t>Type I and Type II Errors — From Real Distributions</a:t>
             </a:r>
           </a:p>
         </p:txBody>
@@ -5484,52 +5305,46 @@
             </a:pPr>
             <a:r>
               <a:rPr/>
-              <a:t>Error bars are graphical representations of the variability of data that show:</a:t>
-            </a:r>
-          </a:p>
-          <a:p>
-            <a:pPr lvl="0"/>
-            <a:r>
-              <a:rPr/>
-              <a:t>The </a:t>
-            </a:r>
+              <a:t>When making decisions based on hypothesis tests, two types of errors can occur:</a:t>
+            </a:r>
+          </a:p>
+          <a:p>
+            <a:pPr lvl="0" indent="0" marL="0">
+              <a:buNone/>
+            </a:pPr>
             <a:r>
               <a:rPr b="1"/>
-              <a:t>precision</a:t>
-            </a:r>
-            <a:r>
-              <a:rPr/>
-              <a:t> of a measurement</a:t>
-            </a:r>
-          </a:p>
-          <a:p>
-            <a:pPr lvl="0"/>
-            <a:r>
-              <a:rPr/>
-              <a:t>The </a:t>
-            </a:r>
+              <a:t>Type I Error (False Positive)</a:t>
+            </a:r>
+            <a:r>
+              <a:rPr/>
+              <a:t> — rejecting H₀ when it’s actually true. Probability = α.</a:t>
+            </a:r>
+          </a:p>
+          <a:p>
+            <a:pPr lvl="0" indent="0" marL="0">
+              <a:buNone/>
+            </a:pPr>
             <a:r>
               <a:rPr b="1"/>
-              <a:t>uncertainty</a:t>
-            </a:r>
-            <a:r>
-              <a:rPr/>
-              <a:t> around an estimate</a:t>
-            </a:r>
-          </a:p>
-          <a:p>
-            <a:pPr lvl="0"/>
-            <a:r>
-              <a:rPr/>
-              <a:t>A </a:t>
-            </a:r>
+              <a:t>Type II Error (False Negative)</a:t>
+            </a:r>
+            <a:r>
+              <a:rPr/>
+              <a:t> — failing to reject H₀ when it’s actually false. Probability = β.</a:t>
+            </a:r>
+          </a:p>
+          <a:p>
+            <a:pPr lvl="0" indent="0" marL="0">
+              <a:buNone/>
+            </a:pPr>
             <a:r>
               <a:rPr b="1"/>
-              <a:t>confidence interval</a:t>
-            </a:r>
-            <a:r>
-              <a:rPr/>
-              <a:t> for a parameter</a:t>
+              <a:t>Statistical Power = 1 − β</a:t>
+            </a:r>
+            <a:r>
+              <a:rPr/>
+              <a:t> — increases with larger sample size, larger effect size, lower variability, higher α level.</a:t>
             </a:r>
           </a:p>
           <a:p>
@@ -5538,83 +5353,14 @@
             </a:pPr>
             <a:r>
               <a:rPr/>
-              <a:t>Common types of error bars:</a:t>
-            </a:r>
-          </a:p>
-          <a:p>
-            <a:pPr lvl="0" indent="-342900" marL="342900">
-              <a:buAutoNum type="arabicPeriod"/>
-            </a:pPr>
-            <a:r>
-              <a:rPr b="1"/>
-              <a:t>Standard Error (SE)</a:t>
-            </a:r>
-            <a:r>
-              <a:rPr/>
-              <a:t>: Shows precision of the mean</a:t>
-            </a:r>
-          </a:p>
-          <a:p>
-            <a:pPr lvl="0" indent="-342900" marL="342900">
-              <a:buAutoNum type="arabicPeriod"/>
-            </a:pPr>
-            <a:r>
-              <a:rPr b="1"/>
-              <a:t>Standard Deviation (SD)</a:t>
-            </a:r>
-            <a:r>
-              <a:rPr/>
-              <a:t>: Shows variability in the data</a:t>
-            </a:r>
-          </a:p>
-          <a:p>
-            <a:pPr lvl="0" indent="-342900" marL="342900">
-              <a:buAutoNum type="arabicPeriod"/>
-            </a:pPr>
-            <a:r>
-              <a:rPr b="1"/>
-              <a:t>Confidence Interval (CI)</a:t>
-            </a:r>
-            <a:r>
-              <a:rPr/>
-              <a:t>: Shows plausible range for parameter</a:t>
-            </a:r>
-          </a:p>
-          <a:p>
-            <a:pPr lvl="0" indent="0" marL="0">
-              <a:buNone/>
-            </a:pPr>
-            <a:r>
-              <a:rPr/>
-              <a:t>When interpreting graphs:</a:t>
-            </a:r>
-          </a:p>
-          <a:p>
-            <a:pPr lvl="0"/>
-            <a:r>
-              <a:rPr/>
-              <a:t>Always check what the error bars represent</a:t>
-            </a:r>
-          </a:p>
-          <a:p>
-            <a:pPr lvl="0"/>
-            <a:r>
-              <a:rPr/>
-              <a:t>Non-overlapping 95% CI bars suggest statistically significant differences</a:t>
-            </a:r>
-          </a:p>
-          <a:p>
-            <a:pPr lvl="0"/>
-            <a:r>
-              <a:rPr/>
-              <a:t>Error bars help assess both statistical and practical significance</a:t>
+              <a:t>The farther apart the means, or the lower the variance, the lower the β error — i.e., the higher the power.</a:t>
             </a:r>
           </a:p>
         </p:txBody>
       </p:sp>
       <p:pic>
         <p:nvPicPr>
-          <p:cNvPr descr="power_and_error_lecture_files/figure-pptx/l06-05-1.png" id="0" name="Picture 1"/>
+          <p:cNvPr descr="power_and_error_lecture_files/figure-pptx/unnamed-chunk-2-1.png" id="0" name="Picture 1"/>
           <p:cNvPicPr>
             <a:picLocks noGrp="1" noChangeAspect="1"/>
           </p:cNvPicPr>
@@ -5628,8 +5374,8 @@
         </p:blipFill>
         <p:spPr bwMode="auto">
           <a:xfrm>
-            <a:off x="6121400" y="1498600"/>
-            <a:ext cx="2781300" cy="2781300"/>
+            <a:off x="6121400" y="1587500"/>
+            <a:ext cx="2781300" cy="2616200"/>
           </a:xfrm>
           <a:prstGeom prst="rect">
             <a:avLst/>
@@ -5677,11 +5423,8 @@
         <p:spPr>
           <a:xfrm>
             <a:off x="0" y="0"/>
-            <a:ext cx="9144000" cy="602780"/>
+            <a:ext cx="9144000" cy="582780"/>
           </a:xfrm>
-          <a:solidFill>
-            <a:srgbClr val="70121D"/>
-          </a:solidFill>
         </p:spPr>
         <p:txBody>
           <a:bodyPr/>
@@ -5691,12 +5434,8 @@
               <a:buNone/>
             </a:pPr>
             <a:r>
-              <a:rPr b="1"/>
-              <a:t>Lecture 6:</a:t>
-            </a:r>
-            <a:r>
-              <a:rPr/>
-              <a:t> Sampling and Pseudoreplication</a:t>
+              <a:rPr/>
+              <a:t>Practice Exercise: Interpreting Errors and Power</a:t>
             </a:r>
           </a:p>
         </p:txBody>
@@ -5708,7 +5447,7 @@
             <a:spLocks noGrp="1"/>
           </p:cNvSpPr>
           <p:nvPr>
-            <p:ph idx="1" sz="half"/>
+            <p:ph idx="1"/>
           </p:nvPr>
         </p:nvSpPr>
         <p:spPr/>
@@ -5716,131 +5455,1196 @@
           <a:bodyPr/>
           <a:lstStyle/>
           <a:p>
-            <a:pPr lvl="0" indent="0" marL="0">
-              <a:buNone/>
-            </a:pPr>
-            <a:r>
-              <a:rPr b="1"/>
-              <a:t>Pseudoreplication</a:t>
-            </a:r>
-            <a:r>
-              <a:rPr/>
-              <a:t> occurs when measurements that are not independent are analyzed as if they were independent.</a:t>
+            <a:pPr lvl="0" indent="0" marL="1270000">
+              <a:buNone/>
+            </a:pPr>
+            <a:r>
+              <a:rPr sz="2000" b="1"/>
+              <a:t>Tip</a:t>
+            </a:r>
+          </a:p>
+          <a:p>
+            <a:pPr lvl="0" indent="0" marL="1270000">
+              <a:buNone/>
+            </a:pPr>
+            <a:r>
+              <a:rPr sz="2000" b="1"/>
+              <a:t>Practice Exercise: interpreting p-values and errors</a:t>
+            </a:r>
+          </a:p>
+          <a:p>
+            <a:pPr lvl="0" indent="0" marL="1270000">
+              <a:buNone/>
+            </a:pPr>
+            <a:r>
+              <a:rPr sz="2000"/>
+              <a:t>Given the following scenarios, identify whether a Type I or Type II error might have occurred:</a:t>
+            </a:r>
+          </a:p>
+          <a:p>
+            <a:pPr lvl="0" indent="-342900" marL="342900">
+              <a:buAutoNum type="arabicPeriod"/>
+            </a:pPr>
+            <a:r>
+              <a:rPr sz="2000"/>
+              <a:t>A researcher concludes that island mice size is larger, when in fact it is not.</a:t>
+            </a:r>
+          </a:p>
+          <a:p>
+            <a:pPr lvl="0" indent="-342900" marL="342900">
+              <a:buAutoNum type="arabicPeriod"/>
+            </a:pPr>
+            <a:r>
+              <a:rPr sz="2000"/>
+              <a:t>A study fails to detect a real difference in mouse size on islands when there is one, and concludes there is no effect.</a:t>
+            </a:r>
+          </a:p>
+          <a:p>
+            <a:pPr lvl="0" indent="-342900" marL="342900">
+              <a:buAutoNum type="arabicPeriod"/>
+            </a:pPr>
+            <a:r>
+              <a:rPr sz="2000"/>
+              <a:t>Let’s calculate the power of our t-test to detect a 1g difference in mass between sampling sites:</a:t>
             </a:r>
           </a:p>
           <a:p>
             <a:pPr lvl="0"/>
             <a:r>
-              <a:rPr/>
-              <a:t>A critical consideration in experimental design</a:t>
+              <a:rPr sz="2000" b="1"/>
+              <a:t>Pooled standard deviation</a:t>
+            </a:r>
+            <a:r>
+              <a:rPr sz="2000"/>
+              <a:t> — the combined standard deviation of both groups, weighted by their respective degrees of freedom</a:t>
             </a:r>
           </a:p>
           <a:p>
             <a:pPr lvl="0"/>
             <a:r>
-              <a:rPr/>
-              <a:t>Results in underestimated standard errors and confidence intervals</a:t>
-            </a:r>
-          </a:p>
-          <a:p>
-            <a:pPr lvl="0"/>
-            <a:r>
-              <a:rPr/>
-              <a:t>Leads to inflated Type I error rates (false positives)</a:t>
-            </a:r>
-          </a:p>
-          <a:p>
-            <a:pPr lvl="0" indent="0" marL="0">
-              <a:buNone/>
-            </a:pPr>
-            <a:r>
-              <a:rPr b="1"/>
-              <a:t>Examples of pseudoreplication:</a:t>
-            </a:r>
-          </a:p>
-          <a:p>
-            <a:pPr lvl="0"/>
-            <a:r>
-              <a:rPr/>
-              <a:t>Measuring the same individual multiple times</a:t>
-            </a:r>
-          </a:p>
-          <a:p>
-            <a:pPr lvl="0"/>
-            <a:r>
-              <a:rPr/>
-              <a:t>Treating multiple fish from the same tank as independent</a:t>
-            </a:r>
-          </a:p>
-          <a:p>
-            <a:pPr lvl="0"/>
-            <a:r>
-              <a:rPr/>
-              <a:t>Using multiple data points from a single site</a:t>
-            </a:r>
-          </a:p>
-          <a:p>
-            <a:pPr lvl="0" indent="0" marL="0">
-              <a:buNone/>
-            </a:pPr>
-            <a:r>
-              <a:rPr b="1"/>
-              <a:t>How to avoid pseudoreplication:</a:t>
-            </a:r>
-          </a:p>
-          <a:p>
-            <a:pPr lvl="0"/>
-            <a:r>
-              <a:rPr/>
-              <a:t>Identify the true experimental unit</a:t>
-            </a:r>
-          </a:p>
-          <a:p>
-            <a:pPr lvl="0"/>
-            <a:r>
-              <a:rPr/>
-              <a:t>Use appropriate statistical techniques (e.g., mixed models)</a:t>
-            </a:r>
-          </a:p>
-          <a:p>
-            <a:pPr lvl="0"/>
-            <a:r>
-              <a:rPr/>
-              <a:t>Be clear about the level of replication</a:t>
-            </a:r>
-          </a:p>
-        </p:txBody>
-      </p:sp>
-      <p:pic>
-        <p:nvPicPr>
-          <p:cNvPr descr="power_and_error_lecture_files/figure-pptx/l06-06-1.png" id="0" name="Picture 1"/>
-          <p:cNvPicPr>
-            <a:picLocks noGrp="1" noChangeAspect="1"/>
-          </p:cNvPicPr>
-          <p:nvPr/>
-        </p:nvPicPr>
-        <p:blipFill>
-          <a:blip r:embed="rId2"/>
-          <a:stretch>
-            <a:fillRect/>
-          </a:stretch>
-        </p:blipFill>
-        <p:spPr bwMode="auto">
-          <a:xfrm>
-            <a:off x="6121400" y="1498600"/>
-            <a:ext cx="2781300" cy="2781300"/>
-          </a:xfrm>
-          <a:prstGeom prst="rect">
-            <a:avLst/>
-          </a:prstGeom>
-          <a:noFill/>
-          <a:ln w="9525">
-            <a:noFill/>
-            <a:headEnd/>
-            <a:tailEnd/>
-          </a:ln>
-        </p:spPr>
-      </p:pic>
+              <a:rPr sz="2000" b="1"/>
+              <a:t>Cohen’s d</a:t>
+            </a:r>
+            <a:r>
+              <a:rPr sz="2000"/>
+              <a:t> — the standardized difference between means; here assuming a difference of 1 unit (g)</a:t>
+            </a:r>
+          </a:p>
+          <a:p>
+            <a:pPr lvl="0" indent="0">
+              <a:buNone/>
+            </a:pPr>
+            <a:r>
+              <a:rPr>
+                <a:solidFill>
+                  <a:srgbClr val="4758AB"/>
+                </a:solidFill>
+                <a:latin typeface="Courier"/>
+              </a:rPr>
+              <a:t>library</a:t>
+            </a:r>
+            <a:r>
+              <a:rPr>
+                <a:solidFill>
+                  <a:srgbClr val="003B4F"/>
+                </a:solidFill>
+                <a:latin typeface="Courier"/>
+              </a:rPr>
+              <a:t>(car)</a:t>
+            </a:r>
+            <a:br/>
+            <a:r>
+              <a:rPr>
+                <a:solidFill>
+                  <a:srgbClr val="4758AB"/>
+                </a:solidFill>
+                <a:latin typeface="Courier"/>
+              </a:rPr>
+              <a:t>library</a:t>
+            </a:r>
+            <a:r>
+              <a:rPr>
+                <a:solidFill>
+                  <a:srgbClr val="003B4F"/>
+                </a:solidFill>
+                <a:latin typeface="Courier"/>
+              </a:rPr>
+              <a:t>(patchwork)</a:t>
+            </a:r>
+            <a:br/>
+            <a:r>
+              <a:rPr>
+                <a:solidFill>
+                  <a:srgbClr val="4758AB"/>
+                </a:solidFill>
+                <a:latin typeface="Courier"/>
+              </a:rPr>
+              <a:t>library</a:t>
+            </a:r>
+            <a:r>
+              <a:rPr>
+                <a:solidFill>
+                  <a:srgbClr val="003B4F"/>
+                </a:solidFill>
+                <a:latin typeface="Courier"/>
+              </a:rPr>
+              <a:t>(tidyverse)</a:t>
+            </a:r>
+            <a:br/>
+            <a:r>
+              <a:rPr>
+                <a:solidFill>
+                  <a:srgbClr val="4758AB"/>
+                </a:solidFill>
+                <a:latin typeface="Courier"/>
+              </a:rPr>
+              <a:t>library</a:t>
+            </a:r>
+            <a:r>
+              <a:rPr>
+                <a:solidFill>
+                  <a:srgbClr val="003B4F"/>
+                </a:solidFill>
+                <a:latin typeface="Courier"/>
+              </a:rPr>
+              <a:t>(readxl)</a:t>
+            </a:r>
+            <a:br/>
+            <a:br/>
+            <a:r>
+              <a:rPr>
+                <a:solidFill>
+                  <a:srgbClr val="003B4F"/>
+                </a:solidFill>
+                <a:latin typeface="Courier"/>
+              </a:rPr>
+              <a:t>m_df &lt;- </a:t>
+            </a:r>
+            <a:r>
+              <a:rPr>
+                <a:solidFill>
+                  <a:srgbClr val="4758AB"/>
+                </a:solidFill>
+                <a:latin typeface="Courier"/>
+              </a:rPr>
+              <a:t>read_csv</a:t>
+            </a:r>
+            <a:r>
+              <a:rPr>
+                <a:solidFill>
+                  <a:srgbClr val="003B4F"/>
+                </a:solidFill>
+                <a:latin typeface="Courier"/>
+              </a:rPr>
+              <a:t>(</a:t>
+            </a:r>
+            <a:r>
+              <a:rPr>
+                <a:solidFill>
+                  <a:srgbClr val="20794D"/>
+                </a:solidFill>
+                <a:latin typeface="Courier"/>
+              </a:rPr>
+              <a:t>"data/mice_weights.csv"</a:t>
+            </a:r>
+            <a:r>
+              <a:rPr>
+                <a:solidFill>
+                  <a:srgbClr val="003B4F"/>
+                </a:solidFill>
+                <a:latin typeface="Courier"/>
+              </a:rPr>
+              <a:t>) </a:t>
+            </a:r>
+            <a:r>
+              <a:rPr>
+                <a:solidFill>
+                  <a:srgbClr val="5E5E5E"/>
+                </a:solidFill>
+                <a:latin typeface="Courier"/>
+              </a:rPr>
+              <a:t>%&gt;%</a:t>
+            </a:r>
+            <a:br/>
+            <a:r>
+              <a:rPr>
+                <a:solidFill>
+                  <a:srgbClr val="003B4F"/>
+                </a:solidFill>
+                <a:latin typeface="Courier"/>
+              </a:rPr>
+              <a:t>  </a:t>
+            </a:r>
+            <a:r>
+              <a:rPr>
+                <a:solidFill>
+                  <a:srgbClr val="4758AB"/>
+                </a:solidFill>
+                <a:latin typeface="Courier"/>
+              </a:rPr>
+              <a:t>filter</a:t>
+            </a:r>
+            <a:r>
+              <a:rPr>
+                <a:solidFill>
+                  <a:srgbClr val="003B4F"/>
+                </a:solidFill>
+                <a:latin typeface="Courier"/>
+              </a:rPr>
+              <a:t>(</a:t>
+            </a:r>
+            <a:r>
+              <a:rPr>
+                <a:solidFill>
+                  <a:srgbClr val="5E5E5E"/>
+                </a:solidFill>
+                <a:latin typeface="Courier"/>
+              </a:rPr>
+              <a:t>!</a:t>
+            </a:r>
+            <a:r>
+              <a:rPr>
+                <a:solidFill>
+                  <a:srgbClr val="4758AB"/>
+                </a:solidFill>
+                <a:latin typeface="Courier"/>
+              </a:rPr>
+              <a:t>is.na</a:t>
+            </a:r>
+            <a:r>
+              <a:rPr>
+                <a:solidFill>
+                  <a:srgbClr val="003B4F"/>
+                </a:solidFill>
+                <a:latin typeface="Courier"/>
+              </a:rPr>
+              <a:t>(mass_g))</a:t>
+            </a:r>
+            <a:br/>
+            <a:br/>
+            <a:r>
+              <a:rPr>
+                <a:solidFill>
+                  <a:srgbClr val="003B4F"/>
+                </a:solidFill>
+                <a:latin typeface="Courier"/>
+              </a:rPr>
+              <a:t>sidney_df    &lt;- m_df </a:t>
+            </a:r>
+            <a:r>
+              <a:rPr>
+                <a:solidFill>
+                  <a:srgbClr val="5E5E5E"/>
+                </a:solidFill>
+                <a:latin typeface="Courier"/>
+              </a:rPr>
+              <a:t>%&gt;%</a:t>
+            </a:r>
+            <a:r>
+              <a:rPr>
+                <a:solidFill>
+                  <a:srgbClr val="003B4F"/>
+                </a:solidFill>
+                <a:latin typeface="Courier"/>
+              </a:rPr>
+              <a:t> </a:t>
+            </a:r>
+            <a:r>
+              <a:rPr>
+                <a:solidFill>
+                  <a:srgbClr val="4758AB"/>
+                </a:solidFill>
+                <a:latin typeface="Courier"/>
+              </a:rPr>
+              <a:t>filter</a:t>
+            </a:r>
+            <a:r>
+              <a:rPr>
+                <a:solidFill>
+                  <a:srgbClr val="003B4F"/>
+                </a:solidFill>
+                <a:latin typeface="Courier"/>
+              </a:rPr>
+              <a:t>(sampling_site </a:t>
+            </a:r>
+            <a:r>
+              <a:rPr>
+                <a:solidFill>
+                  <a:srgbClr val="5E5E5E"/>
+                </a:solidFill>
+                <a:latin typeface="Courier"/>
+              </a:rPr>
+              <a:t>==</a:t>
+            </a:r>
+            <a:r>
+              <a:rPr>
+                <a:solidFill>
+                  <a:srgbClr val="003B4F"/>
+                </a:solidFill>
+                <a:latin typeface="Courier"/>
+              </a:rPr>
+              <a:t> </a:t>
+            </a:r>
+            <a:r>
+              <a:rPr>
+                <a:solidFill>
+                  <a:srgbClr val="20794D"/>
+                </a:solidFill>
+                <a:latin typeface="Courier"/>
+              </a:rPr>
+              <a:t>"Sidney Island"</a:t>
+            </a:r>
+            <a:r>
+              <a:rPr>
+                <a:solidFill>
+                  <a:srgbClr val="003B4F"/>
+                </a:solidFill>
+                <a:latin typeface="Courier"/>
+              </a:rPr>
+              <a:t>)</a:t>
+            </a:r>
+            <a:br/>
+            <a:r>
+              <a:rPr>
+                <a:solidFill>
+                  <a:srgbClr val="003B4F"/>
+                </a:solidFill>
+                <a:latin typeface="Courier"/>
+              </a:rPr>
+              <a:t>vancouver_df &lt;- m_df </a:t>
+            </a:r>
+            <a:r>
+              <a:rPr>
+                <a:solidFill>
+                  <a:srgbClr val="5E5E5E"/>
+                </a:solidFill>
+                <a:latin typeface="Courier"/>
+              </a:rPr>
+              <a:t>%&gt;%</a:t>
+            </a:r>
+            <a:r>
+              <a:rPr>
+                <a:solidFill>
+                  <a:srgbClr val="003B4F"/>
+                </a:solidFill>
+                <a:latin typeface="Courier"/>
+              </a:rPr>
+              <a:t> </a:t>
+            </a:r>
+            <a:r>
+              <a:rPr>
+                <a:solidFill>
+                  <a:srgbClr val="4758AB"/>
+                </a:solidFill>
+                <a:latin typeface="Courier"/>
+              </a:rPr>
+              <a:t>filter</a:t>
+            </a:r>
+            <a:r>
+              <a:rPr>
+                <a:solidFill>
+                  <a:srgbClr val="003B4F"/>
+                </a:solidFill>
+                <a:latin typeface="Courier"/>
+              </a:rPr>
+              <a:t>(sampling_site </a:t>
+            </a:r>
+            <a:r>
+              <a:rPr>
+                <a:solidFill>
+                  <a:srgbClr val="5E5E5E"/>
+                </a:solidFill>
+                <a:latin typeface="Courier"/>
+              </a:rPr>
+              <a:t>==</a:t>
+            </a:r>
+            <a:r>
+              <a:rPr>
+                <a:solidFill>
+                  <a:srgbClr val="003B4F"/>
+                </a:solidFill>
+                <a:latin typeface="Courier"/>
+              </a:rPr>
+              <a:t> </a:t>
+            </a:r>
+            <a:r>
+              <a:rPr>
+                <a:solidFill>
+                  <a:srgbClr val="20794D"/>
+                </a:solidFill>
+                <a:latin typeface="Courier"/>
+              </a:rPr>
+              <a:t>"Vancouver"</a:t>
+            </a:r>
+            <a:r>
+              <a:rPr>
+                <a:solidFill>
+                  <a:srgbClr val="003B4F"/>
+                </a:solidFill>
+                <a:latin typeface="Courier"/>
+              </a:rPr>
+              <a:t>)</a:t>
+            </a:r>
+            <a:br/>
+            <a:br/>
+            <a:r>
+              <a:rPr>
+                <a:solidFill>
+                  <a:srgbClr val="003B4F"/>
+                </a:solidFill>
+                <a:latin typeface="Courier"/>
+              </a:rPr>
+              <a:t>n1 &lt;- </a:t>
+            </a:r>
+            <a:r>
+              <a:rPr>
+                <a:solidFill>
+                  <a:srgbClr val="4758AB"/>
+                </a:solidFill>
+                <a:latin typeface="Courier"/>
+              </a:rPr>
+              <a:t>nrow</a:t>
+            </a:r>
+            <a:r>
+              <a:rPr>
+                <a:solidFill>
+                  <a:srgbClr val="003B4F"/>
+                </a:solidFill>
+                <a:latin typeface="Courier"/>
+              </a:rPr>
+              <a:t>(sidney_df)</a:t>
+            </a:r>
+            <a:br/>
+            <a:r>
+              <a:rPr>
+                <a:solidFill>
+                  <a:srgbClr val="003B4F"/>
+                </a:solidFill>
+                <a:latin typeface="Courier"/>
+              </a:rPr>
+              <a:t>n2 &lt;- </a:t>
+            </a:r>
+            <a:r>
+              <a:rPr>
+                <a:solidFill>
+                  <a:srgbClr val="4758AB"/>
+                </a:solidFill>
+                <a:latin typeface="Courier"/>
+              </a:rPr>
+              <a:t>nrow</a:t>
+            </a:r>
+            <a:r>
+              <a:rPr>
+                <a:solidFill>
+                  <a:srgbClr val="003B4F"/>
+                </a:solidFill>
+                <a:latin typeface="Courier"/>
+              </a:rPr>
+              <a:t>(vancouver_df)</a:t>
+            </a:r>
+            <a:br/>
+            <a:r>
+              <a:rPr>
+                <a:solidFill>
+                  <a:srgbClr val="003B4F"/>
+                </a:solidFill>
+                <a:latin typeface="Courier"/>
+              </a:rPr>
+              <a:t>sd_pooled &lt;- </a:t>
+            </a:r>
+            <a:r>
+              <a:rPr>
+                <a:solidFill>
+                  <a:srgbClr val="4758AB"/>
+                </a:solidFill>
+                <a:latin typeface="Courier"/>
+              </a:rPr>
+              <a:t>sqrt</a:t>
+            </a:r>
+            <a:r>
+              <a:rPr>
+                <a:solidFill>
+                  <a:srgbClr val="003B4F"/>
+                </a:solidFill>
+                <a:latin typeface="Courier"/>
+              </a:rPr>
+              <a:t>((</a:t>
+            </a:r>
+            <a:r>
+              <a:rPr>
+                <a:solidFill>
+                  <a:srgbClr val="4758AB"/>
+                </a:solidFill>
+                <a:latin typeface="Courier"/>
+              </a:rPr>
+              <a:t>var</a:t>
+            </a:r>
+            <a:r>
+              <a:rPr>
+                <a:solidFill>
+                  <a:srgbClr val="003B4F"/>
+                </a:solidFill>
+                <a:latin typeface="Courier"/>
+              </a:rPr>
+              <a:t>(sidney_df</a:t>
+            </a:r>
+            <a:r>
+              <a:rPr>
+                <a:solidFill>
+                  <a:srgbClr val="5E5E5E"/>
+                </a:solidFill>
+                <a:latin typeface="Courier"/>
+              </a:rPr>
+              <a:t>$</a:t>
+            </a:r>
+            <a:r>
+              <a:rPr>
+                <a:solidFill>
+                  <a:srgbClr val="003B4F"/>
+                </a:solidFill>
+                <a:latin typeface="Courier"/>
+              </a:rPr>
+              <a:t>mass_g) </a:t>
+            </a:r>
+            <a:r>
+              <a:rPr>
+                <a:solidFill>
+                  <a:srgbClr val="5E5E5E"/>
+                </a:solidFill>
+                <a:latin typeface="Courier"/>
+              </a:rPr>
+              <a:t>*</a:t>
+            </a:r>
+            <a:r>
+              <a:rPr>
+                <a:solidFill>
+                  <a:srgbClr val="003B4F"/>
+                </a:solidFill>
+                <a:latin typeface="Courier"/>
+              </a:rPr>
+              <a:t> (n1</a:t>
+            </a:r>
+            <a:r>
+              <a:rPr>
+                <a:solidFill>
+                  <a:srgbClr val="AD0000"/>
+                </a:solidFill>
+                <a:latin typeface="Courier"/>
+              </a:rPr>
+              <a:t>-1</a:t>
+            </a:r>
+            <a:r>
+              <a:rPr>
+                <a:solidFill>
+                  <a:srgbClr val="003B4F"/>
+                </a:solidFill>
+                <a:latin typeface="Courier"/>
+              </a:rPr>
+              <a:t>) </a:t>
+            </a:r>
+            <a:r>
+              <a:rPr>
+                <a:solidFill>
+                  <a:srgbClr val="5E5E5E"/>
+                </a:solidFill>
+                <a:latin typeface="Courier"/>
+              </a:rPr>
+              <a:t>+</a:t>
+            </a:r>
+            <a:br/>
+            <a:r>
+              <a:rPr>
+                <a:solidFill>
+                  <a:srgbClr val="003B4F"/>
+                </a:solidFill>
+                <a:latin typeface="Courier"/>
+              </a:rPr>
+              <a:t>                  </a:t>
+            </a:r>
+            <a:r>
+              <a:rPr>
+                <a:solidFill>
+                  <a:srgbClr val="4758AB"/>
+                </a:solidFill>
+                <a:latin typeface="Courier"/>
+              </a:rPr>
+              <a:t>var</a:t>
+            </a:r>
+            <a:r>
+              <a:rPr>
+                <a:solidFill>
+                  <a:srgbClr val="003B4F"/>
+                </a:solidFill>
+                <a:latin typeface="Courier"/>
+              </a:rPr>
+              <a:t>(vancouver_df</a:t>
+            </a:r>
+            <a:r>
+              <a:rPr>
+                <a:solidFill>
+                  <a:srgbClr val="5E5E5E"/>
+                </a:solidFill>
+                <a:latin typeface="Courier"/>
+              </a:rPr>
+              <a:t>$</a:t>
+            </a:r>
+            <a:r>
+              <a:rPr>
+                <a:solidFill>
+                  <a:srgbClr val="003B4F"/>
+                </a:solidFill>
+                <a:latin typeface="Courier"/>
+              </a:rPr>
+              <a:t>mass_g) </a:t>
+            </a:r>
+            <a:r>
+              <a:rPr>
+                <a:solidFill>
+                  <a:srgbClr val="5E5E5E"/>
+                </a:solidFill>
+                <a:latin typeface="Courier"/>
+              </a:rPr>
+              <a:t>*</a:t>
+            </a:r>
+            <a:r>
+              <a:rPr>
+                <a:solidFill>
+                  <a:srgbClr val="003B4F"/>
+                </a:solidFill>
+                <a:latin typeface="Courier"/>
+              </a:rPr>
+              <a:t> (n2</a:t>
+            </a:r>
+            <a:r>
+              <a:rPr>
+                <a:solidFill>
+                  <a:srgbClr val="AD0000"/>
+                </a:solidFill>
+                <a:latin typeface="Courier"/>
+              </a:rPr>
+              <a:t>-1</a:t>
+            </a:r>
+            <a:r>
+              <a:rPr>
+                <a:solidFill>
+                  <a:srgbClr val="003B4F"/>
+                </a:solidFill>
+                <a:latin typeface="Courier"/>
+              </a:rPr>
+              <a:t>)) </a:t>
+            </a:r>
+            <a:r>
+              <a:rPr>
+                <a:solidFill>
+                  <a:srgbClr val="5E5E5E"/>
+                </a:solidFill>
+                <a:latin typeface="Courier"/>
+              </a:rPr>
+              <a:t>/</a:t>
+            </a:r>
+            <a:br/>
+            <a:r>
+              <a:rPr>
+                <a:solidFill>
+                  <a:srgbClr val="003B4F"/>
+                </a:solidFill>
+                <a:latin typeface="Courier"/>
+              </a:rPr>
+              <a:t>                  (n1 </a:t>
+            </a:r>
+            <a:r>
+              <a:rPr>
+                <a:solidFill>
+                  <a:srgbClr val="5E5E5E"/>
+                </a:solidFill>
+                <a:latin typeface="Courier"/>
+              </a:rPr>
+              <a:t>+</a:t>
+            </a:r>
+            <a:r>
+              <a:rPr>
+                <a:solidFill>
+                  <a:srgbClr val="003B4F"/>
+                </a:solidFill>
+                <a:latin typeface="Courier"/>
+              </a:rPr>
+              <a:t> n2 </a:t>
+            </a:r>
+            <a:r>
+              <a:rPr>
+                <a:solidFill>
+                  <a:srgbClr val="5E5E5E"/>
+                </a:solidFill>
+                <a:latin typeface="Courier"/>
+              </a:rPr>
+              <a:t>-</a:t>
+            </a:r>
+            <a:r>
+              <a:rPr>
+                <a:solidFill>
+                  <a:srgbClr val="003B4F"/>
+                </a:solidFill>
+                <a:latin typeface="Courier"/>
+              </a:rPr>
+              <a:t> </a:t>
+            </a:r>
+            <a:r>
+              <a:rPr>
+                <a:solidFill>
+                  <a:srgbClr val="AD0000"/>
+                </a:solidFill>
+                <a:latin typeface="Courier"/>
+              </a:rPr>
+              <a:t>2</a:t>
+            </a:r>
+            <a:r>
+              <a:rPr>
+                <a:solidFill>
+                  <a:srgbClr val="003B4F"/>
+                </a:solidFill>
+                <a:latin typeface="Courier"/>
+              </a:rPr>
+              <a:t>))</a:t>
+            </a:r>
+            <a:br/>
+            <a:br/>
+            <a:r>
+              <a:rPr>
+                <a:solidFill>
+                  <a:srgbClr val="5E5E5E"/>
+                </a:solidFill>
+                <a:latin typeface="Courier"/>
+              </a:rPr>
+              <a:t># delta = 0.423: the standardized effect size (Cohen's d)</a:t>
+            </a:r>
+            <a:br/>
+            <a:r>
+              <a:rPr>
+                <a:solidFill>
+                  <a:srgbClr val="003B4F"/>
+                </a:solidFill>
+                <a:latin typeface="Courier"/>
+              </a:rPr>
+              <a:t>effect_size &lt;- </a:t>
+            </a:r>
+            <a:r>
+              <a:rPr>
+                <a:solidFill>
+                  <a:srgbClr val="AD0000"/>
+                </a:solidFill>
+                <a:latin typeface="Courier"/>
+              </a:rPr>
+              <a:t>1</a:t>
+            </a:r>
+            <a:r>
+              <a:rPr>
+                <a:solidFill>
+                  <a:srgbClr val="003B4F"/>
+                </a:solidFill>
+                <a:latin typeface="Courier"/>
+              </a:rPr>
+              <a:t> </a:t>
+            </a:r>
+            <a:r>
+              <a:rPr>
+                <a:solidFill>
+                  <a:srgbClr val="5E5E5E"/>
+                </a:solidFill>
+                <a:latin typeface="Courier"/>
+              </a:rPr>
+              <a:t>/</a:t>
+            </a:r>
+            <a:r>
+              <a:rPr>
+                <a:solidFill>
+                  <a:srgbClr val="003B4F"/>
+                </a:solidFill>
+                <a:latin typeface="Courier"/>
+              </a:rPr>
+              <a:t> sd_pooled  </a:t>
+            </a:r>
+            <a:r>
+              <a:rPr>
+                <a:solidFill>
+                  <a:srgbClr val="5E5E5E"/>
+                </a:solidFill>
+                <a:latin typeface="Courier"/>
+              </a:rPr>
+              <a:t># Cohen's d</a:t>
+            </a:r>
+            <a:br/>
+            <a:r>
+              <a:rPr>
+                <a:solidFill>
+                  <a:srgbClr val="003B4F"/>
+                </a:solidFill>
+                <a:latin typeface="Courier"/>
+              </a:rPr>
+              <a:t>df &lt;- n1 </a:t>
+            </a:r>
+            <a:r>
+              <a:rPr>
+                <a:solidFill>
+                  <a:srgbClr val="5E5E5E"/>
+                </a:solidFill>
+                <a:latin typeface="Courier"/>
+              </a:rPr>
+              <a:t>+</a:t>
+            </a:r>
+            <a:r>
+              <a:rPr>
+                <a:solidFill>
+                  <a:srgbClr val="003B4F"/>
+                </a:solidFill>
+                <a:latin typeface="Courier"/>
+              </a:rPr>
+              <a:t> n2 </a:t>
+            </a:r>
+            <a:r>
+              <a:rPr>
+                <a:solidFill>
+                  <a:srgbClr val="5E5E5E"/>
+                </a:solidFill>
+                <a:latin typeface="Courier"/>
+              </a:rPr>
+              <a:t>-</a:t>
+            </a:r>
+            <a:r>
+              <a:rPr>
+                <a:solidFill>
+                  <a:srgbClr val="003B4F"/>
+                </a:solidFill>
+                <a:latin typeface="Courier"/>
+              </a:rPr>
+              <a:t> </a:t>
+            </a:r>
+            <a:r>
+              <a:rPr>
+                <a:solidFill>
+                  <a:srgbClr val="AD0000"/>
+                </a:solidFill>
+                <a:latin typeface="Courier"/>
+              </a:rPr>
+              <a:t>2</a:t>
+            </a:r>
+            <a:br/>
+            <a:r>
+              <a:rPr>
+                <a:solidFill>
+                  <a:srgbClr val="003B4F"/>
+                </a:solidFill>
+                <a:latin typeface="Courier"/>
+              </a:rPr>
+              <a:t>alpha &lt;- </a:t>
+            </a:r>
+            <a:r>
+              <a:rPr>
+                <a:solidFill>
+                  <a:srgbClr val="AD0000"/>
+                </a:solidFill>
+                <a:latin typeface="Courier"/>
+              </a:rPr>
+              <a:t>0.05</a:t>
+            </a:r>
+            <a:br/>
+            <a:r>
+              <a:rPr>
+                <a:solidFill>
+                  <a:srgbClr val="003B4F"/>
+                </a:solidFill>
+                <a:latin typeface="Courier"/>
+              </a:rPr>
+              <a:t>power &lt;- </a:t>
+            </a:r>
+            <a:r>
+              <a:rPr>
+                <a:solidFill>
+                  <a:srgbClr val="4758AB"/>
+                </a:solidFill>
+                <a:latin typeface="Courier"/>
+              </a:rPr>
+              <a:t>power.t.test</a:t>
+            </a:r>
+            <a:r>
+              <a:rPr>
+                <a:solidFill>
+                  <a:srgbClr val="003B4F"/>
+                </a:solidFill>
+                <a:latin typeface="Courier"/>
+              </a:rPr>
+              <a:t>(</a:t>
+            </a:r>
+            <a:r>
+              <a:rPr>
+                <a:solidFill>
+                  <a:srgbClr val="657422"/>
+                </a:solidFill>
+                <a:latin typeface="Courier"/>
+              </a:rPr>
+              <a:t>n =</a:t>
+            </a:r>
+            <a:r>
+              <a:rPr>
+                <a:solidFill>
+                  <a:srgbClr val="003B4F"/>
+                </a:solidFill>
+                <a:latin typeface="Courier"/>
+              </a:rPr>
+              <a:t> </a:t>
+            </a:r>
+            <a:r>
+              <a:rPr>
+                <a:solidFill>
+                  <a:srgbClr val="4758AB"/>
+                </a:solidFill>
+                <a:latin typeface="Courier"/>
+              </a:rPr>
+              <a:t>min</a:t>
+            </a:r>
+            <a:r>
+              <a:rPr>
+                <a:solidFill>
+                  <a:srgbClr val="003B4F"/>
+                </a:solidFill>
+                <a:latin typeface="Courier"/>
+              </a:rPr>
+              <a:t>(n1, n2),</a:t>
+            </a:r>
+            <a:br/>
+            <a:r>
+              <a:rPr>
+                <a:solidFill>
+                  <a:srgbClr val="003B4F"/>
+                </a:solidFill>
+                <a:latin typeface="Courier"/>
+              </a:rPr>
+              <a:t>                     </a:t>
+            </a:r>
+            <a:r>
+              <a:rPr>
+                <a:solidFill>
+                  <a:srgbClr val="657422"/>
+                </a:solidFill>
+                <a:latin typeface="Courier"/>
+              </a:rPr>
+              <a:t>delta =</a:t>
+            </a:r>
+            <a:r>
+              <a:rPr>
+                <a:solidFill>
+                  <a:srgbClr val="003B4F"/>
+                </a:solidFill>
+                <a:latin typeface="Courier"/>
+              </a:rPr>
+              <a:t> effect_size,</a:t>
+            </a:r>
+            <a:br/>
+            <a:r>
+              <a:rPr>
+                <a:solidFill>
+                  <a:srgbClr val="003B4F"/>
+                </a:solidFill>
+                <a:latin typeface="Courier"/>
+              </a:rPr>
+              <a:t>                     </a:t>
+            </a:r>
+            <a:r>
+              <a:rPr>
+                <a:solidFill>
+                  <a:srgbClr val="657422"/>
+                </a:solidFill>
+                <a:latin typeface="Courier"/>
+              </a:rPr>
+              <a:t>sd =</a:t>
+            </a:r>
+            <a:r>
+              <a:rPr>
+                <a:solidFill>
+                  <a:srgbClr val="003B4F"/>
+                </a:solidFill>
+                <a:latin typeface="Courier"/>
+              </a:rPr>
+              <a:t> </a:t>
+            </a:r>
+            <a:r>
+              <a:rPr>
+                <a:solidFill>
+                  <a:srgbClr val="AD0000"/>
+                </a:solidFill>
+                <a:latin typeface="Courier"/>
+              </a:rPr>
+              <a:t>1</a:t>
+            </a:r>
+            <a:r>
+              <a:rPr>
+                <a:solidFill>
+                  <a:srgbClr val="003B4F"/>
+                </a:solidFill>
+                <a:latin typeface="Courier"/>
+              </a:rPr>
+              <a:t>,  </a:t>
+            </a:r>
+            <a:r>
+              <a:rPr>
+                <a:solidFill>
+                  <a:srgbClr val="5E5E5E"/>
+                </a:solidFill>
+                <a:latin typeface="Courier"/>
+              </a:rPr>
+              <a:t># Using standardized effect size</a:t>
+            </a:r>
+            <a:br/>
+            <a:r>
+              <a:rPr>
+                <a:solidFill>
+                  <a:srgbClr val="003B4F"/>
+                </a:solidFill>
+                <a:latin typeface="Courier"/>
+              </a:rPr>
+              <a:t>                     </a:t>
+            </a:r>
+            <a:r>
+              <a:rPr>
+                <a:solidFill>
+                  <a:srgbClr val="657422"/>
+                </a:solidFill>
+                <a:latin typeface="Courier"/>
+              </a:rPr>
+              <a:t>sig.level =</a:t>
+            </a:r>
+            <a:r>
+              <a:rPr>
+                <a:solidFill>
+                  <a:srgbClr val="003B4F"/>
+                </a:solidFill>
+                <a:latin typeface="Courier"/>
+              </a:rPr>
+              <a:t> alpha,</a:t>
+            </a:r>
+            <a:br/>
+            <a:r>
+              <a:rPr>
+                <a:solidFill>
+                  <a:srgbClr val="003B4F"/>
+                </a:solidFill>
+                <a:latin typeface="Courier"/>
+              </a:rPr>
+              <a:t>                     </a:t>
+            </a:r>
+            <a:r>
+              <a:rPr>
+                <a:solidFill>
+                  <a:srgbClr val="657422"/>
+                </a:solidFill>
+                <a:latin typeface="Courier"/>
+              </a:rPr>
+              <a:t>type =</a:t>
+            </a:r>
+            <a:r>
+              <a:rPr>
+                <a:solidFill>
+                  <a:srgbClr val="003B4F"/>
+                </a:solidFill>
+                <a:latin typeface="Courier"/>
+              </a:rPr>
+              <a:t> </a:t>
+            </a:r>
+            <a:r>
+              <a:rPr>
+                <a:solidFill>
+                  <a:srgbClr val="20794D"/>
+                </a:solidFill>
+                <a:latin typeface="Courier"/>
+              </a:rPr>
+              <a:t>"two.sample"</a:t>
+            </a:r>
+            <a:r>
+              <a:rPr>
+                <a:solidFill>
+                  <a:srgbClr val="003B4F"/>
+                </a:solidFill>
+                <a:latin typeface="Courier"/>
+              </a:rPr>
+              <a:t>,</a:t>
+            </a:r>
+            <a:br/>
+            <a:r>
+              <a:rPr>
+                <a:solidFill>
+                  <a:srgbClr val="003B4F"/>
+                </a:solidFill>
+                <a:latin typeface="Courier"/>
+              </a:rPr>
+              <a:t>                     </a:t>
+            </a:r>
+            <a:r>
+              <a:rPr>
+                <a:solidFill>
+                  <a:srgbClr val="657422"/>
+                </a:solidFill>
+                <a:latin typeface="Courier"/>
+              </a:rPr>
+              <a:t>alternative =</a:t>
+            </a:r>
+            <a:r>
+              <a:rPr>
+                <a:solidFill>
+                  <a:srgbClr val="003B4F"/>
+                </a:solidFill>
+                <a:latin typeface="Courier"/>
+              </a:rPr>
+              <a:t> </a:t>
+            </a:r>
+            <a:r>
+              <a:rPr>
+                <a:solidFill>
+                  <a:srgbClr val="20794D"/>
+                </a:solidFill>
+                <a:latin typeface="Courier"/>
+              </a:rPr>
+              <a:t>"two.sided"</a:t>
+            </a:r>
+            <a:r>
+              <a:rPr>
+                <a:solidFill>
+                  <a:srgbClr val="003B4F"/>
+                </a:solidFill>
+                <a:latin typeface="Courier"/>
+              </a:rPr>
+              <a:t>)</a:t>
+            </a:r>
+            <a:br/>
+            <a:r>
+              <a:rPr>
+                <a:solidFill>
+                  <a:srgbClr val="003B4F"/>
+                </a:solidFill>
+                <a:latin typeface="Courier"/>
+              </a:rPr>
+              <a:t>power</a:t>
+            </a:r>
+          </a:p>
+          <a:p>
+            <a:pPr lvl="0" indent="0">
+              <a:buNone/>
+            </a:pPr>
+            <a:r>
+              <a:rPr sz="2000">
+                <a:latin typeface="Courier"/>
+              </a:rPr>
+              <a:t>
+     Two-sample t test power calculation 
+              n = 28
+          delta = 0.4231154
+             sd = 1
+      sig.level = 0.05
+          power = 0.3427604
+    alternative = two.sided
+NOTE: n is number in *each* group</a:t>
+            </a:r>
+          </a:p>
+        </p:txBody>
+      </p:sp>
     </p:spTree>
   </p:cSld>
 </p:sld>
@@ -5887,27 +6691,53 @@
               <a:buNone/>
             </a:pPr>
             <a:r>
-              <a:rPr b="1"/>
-              <a:t>Lecture 6:</a:t>
-            </a:r>
-            <a:r>
-              <a:rPr/>
-              <a:t> Summary and Key Takeaways</a:t>
-            </a:r>
-          </a:p>
-        </p:txBody>
-      </p:sp>
-      <p:sp>
-        <p:nvSpPr>
-          <p:cNvPr id="3" name="Content Placeholder 2"/>
-          <p:cNvSpPr>
-            <a:spLocks noGrp="1"/>
-          </p:cNvSpPr>
-          <p:nvPr>
-            <p:ph idx="1"/>
-          </p:nvPr>
-        </p:nvSpPr>
-        <p:spPr/>
+              <a:rPr/>
+              <a:t>Part 6 · Statistical Power</a:t>
+            </a:r>
+          </a:p>
+        </p:txBody>
+      </p:sp>
+    </p:spTree>
+  </p:cSld>
+</p:sld>
+</file>
+
+<file path=ppt/slides/slide24.xml><?xml version="1.0" encoding="utf-8"?>
+<p:sld xmlns:a="http://schemas.openxmlformats.org/drawingml/2006/main" xmlns:r="http://schemas.openxmlformats.org/officeDocument/2006/relationships" xmlns:p="http://schemas.openxmlformats.org/presentationml/2006/main">
+  <p:cSld>
+    <p:spTree>
+      <p:nvGrpSpPr>
+        <p:cNvPr id="1" name=""/>
+        <p:cNvGrpSpPr/>
+        <p:nvPr/>
+      </p:nvGrpSpPr>
+      <p:grpSpPr>
+        <a:xfrm>
+          <a:off x="0" y="0"/>
+          <a:ext cx="0" cy="0"/>
+          <a:chOff x="0" y="0"/>
+          <a:chExt cx="0" cy="0"/>
+        </a:xfrm>
+      </p:grpSpPr>
+      <p:sp>
+        <p:nvSpPr>
+          <p:cNvPr id="2" name="Title 1"/>
+          <p:cNvSpPr>
+            <a:spLocks noGrp="1"/>
+          </p:cNvSpPr>
+          <p:nvPr>
+            <p:ph type="title"/>
+          </p:nvPr>
+        </p:nvSpPr>
+        <p:spPr>
+          <a:xfrm>
+            <a:off x="0" y="0"/>
+            <a:ext cx="9144000" cy="602780"/>
+          </a:xfrm>
+          <a:solidFill>
+            <a:srgbClr val="70121D"/>
+          </a:solidFill>
+        </p:spPr>
         <p:txBody>
           <a:bodyPr/>
           <a:lstStyle/>
@@ -5916,8 +6746,1770 @@
               <a:buNone/>
             </a:pPr>
             <a:r>
-              <a:rPr b="1"/>
-              <a:t>Key concepts covered:</a:t>
+              <a:rPr/>
+              <a:t>What if We Calculated Power for the Pine Needles You Measured?</a:t>
+            </a:r>
+          </a:p>
+        </p:txBody>
+      </p:sp>
+      <p:sp>
+        <p:nvSpPr>
+          <p:cNvPr id="3" name="Content Placeholder 2"/>
+          <p:cNvSpPr>
+            <a:spLocks noGrp="1"/>
+          </p:cNvSpPr>
+          <p:nvPr>
+            <p:ph idx="1" sz="half"/>
+          </p:nvPr>
+        </p:nvSpPr>
+        <p:spPr/>
+        <p:txBody>
+          <a:bodyPr/>
+          <a:lstStyle/>
+          <a:p>
+            <a:pPr lvl="0" indent="0">
+              <a:buNone/>
+            </a:pPr>
+            <a:r>
+              <a:rPr>
+                <a:solidFill>
+                  <a:srgbClr val="003B4F"/>
+                </a:solidFill>
+                <a:latin typeface="Courier"/>
+              </a:rPr>
+              <a:t>pine_switch_df &lt;- </a:t>
+            </a:r>
+            <a:r>
+              <a:rPr>
+                <a:solidFill>
+                  <a:srgbClr val="4758AB"/>
+                </a:solidFill>
+                <a:latin typeface="Courier"/>
+              </a:rPr>
+              <a:t>read_excel</a:t>
+            </a:r>
+            <a:r>
+              <a:rPr>
+                <a:solidFill>
+                  <a:srgbClr val="003B4F"/>
+                </a:solidFill>
+                <a:latin typeface="Courier"/>
+              </a:rPr>
+              <a:t>(</a:t>
+            </a:r>
+            <a:r>
+              <a:rPr>
+                <a:solidFill>
+                  <a:srgbClr val="20794D"/>
+                </a:solidFill>
+                <a:latin typeface="Courier"/>
+              </a:rPr>
+              <a:t>"data/class_pine needle length switched.xlsx"</a:t>
+            </a:r>
+            <a:r>
+              <a:rPr>
+                <a:solidFill>
+                  <a:srgbClr val="003B4F"/>
+                </a:solidFill>
+                <a:latin typeface="Courier"/>
+              </a:rPr>
+              <a:t>)</a:t>
+            </a:r>
+            <a:br/>
+            <a:r>
+              <a:rPr>
+                <a:solidFill>
+                  <a:srgbClr val="003B4F"/>
+                </a:solidFill>
+                <a:latin typeface="Courier"/>
+              </a:rPr>
+              <a:t>ps_df &lt;- pine_switch_df </a:t>
+            </a:r>
+            <a:r>
+              <a:rPr>
+                <a:solidFill>
+                  <a:srgbClr val="5E5E5E"/>
+                </a:solidFill>
+                <a:latin typeface="Courier"/>
+              </a:rPr>
+              <a:t>%&gt;%</a:t>
+            </a:r>
+            <a:br/>
+            <a:r>
+              <a:rPr>
+                <a:solidFill>
+                  <a:srgbClr val="003B4F"/>
+                </a:solidFill>
+                <a:latin typeface="Courier"/>
+              </a:rPr>
+              <a:t>  </a:t>
+            </a:r>
+            <a:r>
+              <a:rPr>
+                <a:solidFill>
+                  <a:srgbClr val="4758AB"/>
+                </a:solidFill>
+                <a:latin typeface="Courier"/>
+              </a:rPr>
+              <a:t>group_by</a:t>
+            </a:r>
+            <a:r>
+              <a:rPr>
+                <a:solidFill>
+                  <a:srgbClr val="003B4F"/>
+                </a:solidFill>
+                <a:latin typeface="Courier"/>
+              </a:rPr>
+              <a:t>(group, tree_no, tree_char, side) </a:t>
+            </a:r>
+            <a:r>
+              <a:rPr>
+                <a:solidFill>
+                  <a:srgbClr val="5E5E5E"/>
+                </a:solidFill>
+                <a:latin typeface="Courier"/>
+              </a:rPr>
+              <a:t>%&gt;%</a:t>
+            </a:r>
+            <a:br/>
+            <a:r>
+              <a:rPr>
+                <a:solidFill>
+                  <a:srgbClr val="003B4F"/>
+                </a:solidFill>
+                <a:latin typeface="Courier"/>
+              </a:rPr>
+              <a:t>  </a:t>
+            </a:r>
+            <a:r>
+              <a:rPr>
+                <a:solidFill>
+                  <a:srgbClr val="4758AB"/>
+                </a:solidFill>
+                <a:latin typeface="Courier"/>
+              </a:rPr>
+              <a:t>summarise</a:t>
+            </a:r>
+            <a:r>
+              <a:rPr>
+                <a:solidFill>
+                  <a:srgbClr val="003B4F"/>
+                </a:solidFill>
+                <a:latin typeface="Courier"/>
+              </a:rPr>
+              <a:t>(</a:t>
+            </a:r>
+            <a:r>
+              <a:rPr>
+                <a:solidFill>
+                  <a:srgbClr val="657422"/>
+                </a:solidFill>
+                <a:latin typeface="Courier"/>
+              </a:rPr>
+              <a:t>length_mm =</a:t>
+            </a:r>
+            <a:r>
+              <a:rPr>
+                <a:solidFill>
+                  <a:srgbClr val="003B4F"/>
+                </a:solidFill>
+                <a:latin typeface="Courier"/>
+              </a:rPr>
+              <a:t> </a:t>
+            </a:r>
+            <a:r>
+              <a:rPr>
+                <a:solidFill>
+                  <a:srgbClr val="4758AB"/>
+                </a:solidFill>
+                <a:latin typeface="Courier"/>
+              </a:rPr>
+              <a:t>mean</a:t>
+            </a:r>
+            <a:r>
+              <a:rPr>
+                <a:solidFill>
+                  <a:srgbClr val="003B4F"/>
+                </a:solidFill>
+                <a:latin typeface="Courier"/>
+              </a:rPr>
+              <a:t>(length_mm, </a:t>
+            </a:r>
+            <a:r>
+              <a:rPr>
+                <a:solidFill>
+                  <a:srgbClr val="657422"/>
+                </a:solidFill>
+                <a:latin typeface="Courier"/>
+              </a:rPr>
+              <a:t>na.rm=</a:t>
+            </a:r>
+            <a:r>
+              <a:rPr>
+                <a:solidFill>
+                  <a:srgbClr val="8F5902"/>
+                </a:solidFill>
+                <a:latin typeface="Courier"/>
+              </a:rPr>
+              <a:t>TRUE</a:t>
+            </a:r>
+            <a:r>
+              <a:rPr>
+                <a:solidFill>
+                  <a:srgbClr val="003B4F"/>
+                </a:solidFill>
+                <a:latin typeface="Courier"/>
+              </a:rPr>
+              <a:t>))</a:t>
+            </a:r>
+            <a:br/>
+            <a:br/>
+            <a:r>
+              <a:rPr>
+                <a:solidFill>
+                  <a:srgbClr val="003B4F"/>
+                </a:solidFill>
+                <a:latin typeface="Courier"/>
+              </a:rPr>
+              <a:t>ps_shady_df &lt;- ps_df </a:t>
+            </a:r>
+            <a:r>
+              <a:rPr>
+                <a:solidFill>
+                  <a:srgbClr val="5E5E5E"/>
+                </a:solidFill>
+                <a:latin typeface="Courier"/>
+              </a:rPr>
+              <a:t>%&gt;%</a:t>
+            </a:r>
+            <a:r>
+              <a:rPr>
+                <a:solidFill>
+                  <a:srgbClr val="003B4F"/>
+                </a:solidFill>
+                <a:latin typeface="Courier"/>
+              </a:rPr>
+              <a:t> </a:t>
+            </a:r>
+            <a:r>
+              <a:rPr>
+                <a:solidFill>
+                  <a:srgbClr val="4758AB"/>
+                </a:solidFill>
+                <a:latin typeface="Courier"/>
+              </a:rPr>
+              <a:t>filter</a:t>
+            </a:r>
+            <a:r>
+              <a:rPr>
+                <a:solidFill>
+                  <a:srgbClr val="003B4F"/>
+                </a:solidFill>
+                <a:latin typeface="Courier"/>
+              </a:rPr>
+              <a:t>(side </a:t>
+            </a:r>
+            <a:r>
+              <a:rPr>
+                <a:solidFill>
+                  <a:srgbClr val="5E5E5E"/>
+                </a:solidFill>
+                <a:latin typeface="Courier"/>
+              </a:rPr>
+              <a:t>==</a:t>
+            </a:r>
+            <a:r>
+              <a:rPr>
+                <a:solidFill>
+                  <a:srgbClr val="003B4F"/>
+                </a:solidFill>
+                <a:latin typeface="Courier"/>
+              </a:rPr>
+              <a:t> </a:t>
+            </a:r>
+            <a:r>
+              <a:rPr>
+                <a:solidFill>
+                  <a:srgbClr val="20794D"/>
+                </a:solidFill>
+                <a:latin typeface="Courier"/>
+              </a:rPr>
+              <a:t>"shady"</a:t>
+            </a:r>
+            <a:r>
+              <a:rPr>
+                <a:solidFill>
+                  <a:srgbClr val="003B4F"/>
+                </a:solidFill>
+                <a:latin typeface="Courier"/>
+              </a:rPr>
+              <a:t>)</a:t>
+            </a:r>
+            <a:br/>
+            <a:r>
+              <a:rPr>
+                <a:solidFill>
+                  <a:srgbClr val="003B4F"/>
+                </a:solidFill>
+                <a:latin typeface="Courier"/>
+              </a:rPr>
+              <a:t>ps_sunny_df &lt;- ps_df </a:t>
+            </a:r>
+            <a:r>
+              <a:rPr>
+                <a:solidFill>
+                  <a:srgbClr val="5E5E5E"/>
+                </a:solidFill>
+                <a:latin typeface="Courier"/>
+              </a:rPr>
+              <a:t>%&gt;%</a:t>
+            </a:r>
+            <a:r>
+              <a:rPr>
+                <a:solidFill>
+                  <a:srgbClr val="003B4F"/>
+                </a:solidFill>
+                <a:latin typeface="Courier"/>
+              </a:rPr>
+              <a:t> </a:t>
+            </a:r>
+            <a:r>
+              <a:rPr>
+                <a:solidFill>
+                  <a:srgbClr val="4758AB"/>
+                </a:solidFill>
+                <a:latin typeface="Courier"/>
+              </a:rPr>
+              <a:t>filter</a:t>
+            </a:r>
+            <a:r>
+              <a:rPr>
+                <a:solidFill>
+                  <a:srgbClr val="003B4F"/>
+                </a:solidFill>
+                <a:latin typeface="Courier"/>
+              </a:rPr>
+              <a:t>(side </a:t>
+            </a:r>
+            <a:r>
+              <a:rPr>
+                <a:solidFill>
+                  <a:srgbClr val="5E5E5E"/>
+                </a:solidFill>
+                <a:latin typeface="Courier"/>
+              </a:rPr>
+              <a:t>==</a:t>
+            </a:r>
+            <a:r>
+              <a:rPr>
+                <a:solidFill>
+                  <a:srgbClr val="003B4F"/>
+                </a:solidFill>
+                <a:latin typeface="Courier"/>
+              </a:rPr>
+              <a:t> </a:t>
+            </a:r>
+            <a:r>
+              <a:rPr>
+                <a:solidFill>
+                  <a:srgbClr val="20794D"/>
+                </a:solidFill>
+                <a:latin typeface="Courier"/>
+              </a:rPr>
+              <a:t>"sunny"</a:t>
+            </a:r>
+            <a:r>
+              <a:rPr>
+                <a:solidFill>
+                  <a:srgbClr val="003B4F"/>
+                </a:solidFill>
+                <a:latin typeface="Courier"/>
+              </a:rPr>
+              <a:t>)</a:t>
+            </a:r>
+            <a:br/>
+            <a:br/>
+            <a:r>
+              <a:rPr>
+                <a:solidFill>
+                  <a:srgbClr val="003B4F"/>
+                </a:solidFill>
+                <a:latin typeface="Courier"/>
+              </a:rPr>
+              <a:t>pine_alpha &lt;- </a:t>
+            </a:r>
+            <a:r>
+              <a:rPr>
+                <a:solidFill>
+                  <a:srgbClr val="AD0000"/>
+                </a:solidFill>
+                <a:latin typeface="Courier"/>
+              </a:rPr>
+              <a:t>0.05</a:t>
+            </a:r>
+            <a:br/>
+            <a:br/>
+            <a:r>
+              <a:rPr>
+                <a:solidFill>
+                  <a:srgbClr val="003B4F"/>
+                </a:solidFill>
+                <a:latin typeface="Courier"/>
+              </a:rPr>
+              <a:t>pine_n1 &lt;- </a:t>
+            </a:r>
+            <a:r>
+              <a:rPr>
+                <a:solidFill>
+                  <a:srgbClr val="4758AB"/>
+                </a:solidFill>
+                <a:latin typeface="Courier"/>
+              </a:rPr>
+              <a:t>nrow</a:t>
+            </a:r>
+            <a:r>
+              <a:rPr>
+                <a:solidFill>
+                  <a:srgbClr val="003B4F"/>
+                </a:solidFill>
+                <a:latin typeface="Courier"/>
+              </a:rPr>
+              <a:t>(ps_shady_df)</a:t>
+            </a:r>
+            <a:br/>
+            <a:r>
+              <a:rPr>
+                <a:solidFill>
+                  <a:srgbClr val="003B4F"/>
+                </a:solidFill>
+                <a:latin typeface="Courier"/>
+              </a:rPr>
+              <a:t>pine_n2 &lt;- </a:t>
+            </a:r>
+            <a:r>
+              <a:rPr>
+                <a:solidFill>
+                  <a:srgbClr val="4758AB"/>
+                </a:solidFill>
+                <a:latin typeface="Courier"/>
+              </a:rPr>
+              <a:t>nrow</a:t>
+            </a:r>
+            <a:r>
+              <a:rPr>
+                <a:solidFill>
+                  <a:srgbClr val="003B4F"/>
+                </a:solidFill>
+                <a:latin typeface="Courier"/>
+              </a:rPr>
+              <a:t>(ps_sunny_df)</a:t>
+            </a:r>
+            <a:br/>
+            <a:br/>
+            <a:r>
+              <a:rPr>
+                <a:solidFill>
+                  <a:srgbClr val="003B4F"/>
+                </a:solidFill>
+                <a:latin typeface="Courier"/>
+              </a:rPr>
+              <a:t>pine_sd_pooled &lt;- </a:t>
+            </a:r>
+            <a:r>
+              <a:rPr>
+                <a:solidFill>
+                  <a:srgbClr val="4758AB"/>
+                </a:solidFill>
+                <a:latin typeface="Courier"/>
+              </a:rPr>
+              <a:t>sqrt</a:t>
+            </a:r>
+            <a:r>
+              <a:rPr>
+                <a:solidFill>
+                  <a:srgbClr val="003B4F"/>
+                </a:solidFill>
+                <a:latin typeface="Courier"/>
+              </a:rPr>
+              <a:t>((</a:t>
+            </a:r>
+            <a:r>
+              <a:rPr>
+                <a:solidFill>
+                  <a:srgbClr val="4758AB"/>
+                </a:solidFill>
+                <a:latin typeface="Courier"/>
+              </a:rPr>
+              <a:t>var</a:t>
+            </a:r>
+            <a:r>
+              <a:rPr>
+                <a:solidFill>
+                  <a:srgbClr val="003B4F"/>
+                </a:solidFill>
+                <a:latin typeface="Courier"/>
+              </a:rPr>
+              <a:t>(ps_shady_df</a:t>
+            </a:r>
+            <a:r>
+              <a:rPr>
+                <a:solidFill>
+                  <a:srgbClr val="5E5E5E"/>
+                </a:solidFill>
+                <a:latin typeface="Courier"/>
+              </a:rPr>
+              <a:t>$</a:t>
+            </a:r>
+            <a:r>
+              <a:rPr>
+                <a:solidFill>
+                  <a:srgbClr val="003B4F"/>
+                </a:solidFill>
+                <a:latin typeface="Courier"/>
+              </a:rPr>
+              <a:t>length_mm) </a:t>
+            </a:r>
+            <a:r>
+              <a:rPr>
+                <a:solidFill>
+                  <a:srgbClr val="5E5E5E"/>
+                </a:solidFill>
+                <a:latin typeface="Courier"/>
+              </a:rPr>
+              <a:t>*</a:t>
+            </a:r>
+            <a:r>
+              <a:rPr>
+                <a:solidFill>
+                  <a:srgbClr val="003B4F"/>
+                </a:solidFill>
+                <a:latin typeface="Courier"/>
+              </a:rPr>
+              <a:t> (pine_n1</a:t>
+            </a:r>
+            <a:r>
+              <a:rPr>
+                <a:solidFill>
+                  <a:srgbClr val="AD0000"/>
+                </a:solidFill>
+                <a:latin typeface="Courier"/>
+              </a:rPr>
+              <a:t>-1</a:t>
+            </a:r>
+            <a:r>
+              <a:rPr>
+                <a:solidFill>
+                  <a:srgbClr val="003B4F"/>
+                </a:solidFill>
+                <a:latin typeface="Courier"/>
+              </a:rPr>
+              <a:t>) </a:t>
+            </a:r>
+            <a:r>
+              <a:rPr>
+                <a:solidFill>
+                  <a:srgbClr val="5E5E5E"/>
+                </a:solidFill>
+                <a:latin typeface="Courier"/>
+              </a:rPr>
+              <a:t>+</a:t>
+            </a:r>
+            <a:br/>
+            <a:r>
+              <a:rPr>
+                <a:solidFill>
+                  <a:srgbClr val="003B4F"/>
+                </a:solidFill>
+                <a:latin typeface="Courier"/>
+              </a:rPr>
+              <a:t>                       </a:t>
+            </a:r>
+            <a:r>
+              <a:rPr>
+                <a:solidFill>
+                  <a:srgbClr val="4758AB"/>
+                </a:solidFill>
+                <a:latin typeface="Courier"/>
+              </a:rPr>
+              <a:t>var</a:t>
+            </a:r>
+            <a:r>
+              <a:rPr>
+                <a:solidFill>
+                  <a:srgbClr val="003B4F"/>
+                </a:solidFill>
+                <a:latin typeface="Courier"/>
+              </a:rPr>
+              <a:t>(ps_sunny_df</a:t>
+            </a:r>
+            <a:r>
+              <a:rPr>
+                <a:solidFill>
+                  <a:srgbClr val="5E5E5E"/>
+                </a:solidFill>
+                <a:latin typeface="Courier"/>
+              </a:rPr>
+              <a:t>$</a:t>
+            </a:r>
+            <a:r>
+              <a:rPr>
+                <a:solidFill>
+                  <a:srgbClr val="003B4F"/>
+                </a:solidFill>
+                <a:latin typeface="Courier"/>
+              </a:rPr>
+              <a:t>length_mm) </a:t>
+            </a:r>
+            <a:r>
+              <a:rPr>
+                <a:solidFill>
+                  <a:srgbClr val="5E5E5E"/>
+                </a:solidFill>
+                <a:latin typeface="Courier"/>
+              </a:rPr>
+              <a:t>*</a:t>
+            </a:r>
+            <a:r>
+              <a:rPr>
+                <a:solidFill>
+                  <a:srgbClr val="003B4F"/>
+                </a:solidFill>
+                <a:latin typeface="Courier"/>
+              </a:rPr>
+              <a:t> (pine_n2</a:t>
+            </a:r>
+            <a:r>
+              <a:rPr>
+                <a:solidFill>
+                  <a:srgbClr val="AD0000"/>
+                </a:solidFill>
+                <a:latin typeface="Courier"/>
+              </a:rPr>
+              <a:t>-1</a:t>
+            </a:r>
+            <a:r>
+              <a:rPr>
+                <a:solidFill>
+                  <a:srgbClr val="003B4F"/>
+                </a:solidFill>
+                <a:latin typeface="Courier"/>
+              </a:rPr>
+              <a:t>)) </a:t>
+            </a:r>
+            <a:r>
+              <a:rPr>
+                <a:solidFill>
+                  <a:srgbClr val="5E5E5E"/>
+                </a:solidFill>
+                <a:latin typeface="Courier"/>
+              </a:rPr>
+              <a:t>/</a:t>
+            </a:r>
+            <a:br/>
+            <a:r>
+              <a:rPr>
+                <a:solidFill>
+                  <a:srgbClr val="003B4F"/>
+                </a:solidFill>
+                <a:latin typeface="Courier"/>
+              </a:rPr>
+              <a:t>                       (pine_n1 </a:t>
+            </a:r>
+            <a:r>
+              <a:rPr>
+                <a:solidFill>
+                  <a:srgbClr val="5E5E5E"/>
+                </a:solidFill>
+                <a:latin typeface="Courier"/>
+              </a:rPr>
+              <a:t>+</a:t>
+            </a:r>
+            <a:r>
+              <a:rPr>
+                <a:solidFill>
+                  <a:srgbClr val="003B4F"/>
+                </a:solidFill>
+                <a:latin typeface="Courier"/>
+              </a:rPr>
+              <a:t> pine_n2 </a:t>
+            </a:r>
+            <a:r>
+              <a:rPr>
+                <a:solidFill>
+                  <a:srgbClr val="5E5E5E"/>
+                </a:solidFill>
+                <a:latin typeface="Courier"/>
+              </a:rPr>
+              <a:t>-</a:t>
+            </a:r>
+            <a:r>
+              <a:rPr>
+                <a:solidFill>
+                  <a:srgbClr val="003B4F"/>
+                </a:solidFill>
+                <a:latin typeface="Courier"/>
+              </a:rPr>
+              <a:t> </a:t>
+            </a:r>
+            <a:r>
+              <a:rPr>
+                <a:solidFill>
+                  <a:srgbClr val="AD0000"/>
+                </a:solidFill>
+                <a:latin typeface="Courier"/>
+              </a:rPr>
+              <a:t>2</a:t>
+            </a:r>
+            <a:r>
+              <a:rPr>
+                <a:solidFill>
+                  <a:srgbClr val="003B4F"/>
+                </a:solidFill>
+                <a:latin typeface="Courier"/>
+              </a:rPr>
+              <a:t>))</a:t>
+            </a:r>
+            <a:br/>
+            <a:br/>
+            <a:r>
+              <a:rPr>
+                <a:solidFill>
+                  <a:srgbClr val="4758AB"/>
+                </a:solidFill>
+                <a:latin typeface="Courier"/>
+              </a:rPr>
+              <a:t>cat</a:t>
+            </a:r>
+            <a:r>
+              <a:rPr>
+                <a:solidFill>
+                  <a:srgbClr val="003B4F"/>
+                </a:solidFill>
+                <a:latin typeface="Courier"/>
+              </a:rPr>
+              <a:t>(</a:t>
+            </a:r>
+            <a:r>
+              <a:rPr>
+                <a:solidFill>
+                  <a:srgbClr val="20794D"/>
+                </a:solidFill>
+                <a:latin typeface="Courier"/>
+              </a:rPr>
+              <a:t>"Pooled SD:"</a:t>
+            </a:r>
+            <a:r>
+              <a:rPr>
+                <a:solidFill>
+                  <a:srgbClr val="003B4F"/>
+                </a:solidFill>
+                <a:latin typeface="Courier"/>
+              </a:rPr>
+              <a:t>, </a:t>
+            </a:r>
+            <a:r>
+              <a:rPr>
+                <a:solidFill>
+                  <a:srgbClr val="4758AB"/>
+                </a:solidFill>
+                <a:latin typeface="Courier"/>
+              </a:rPr>
+              <a:t>round</a:t>
+            </a:r>
+            <a:r>
+              <a:rPr>
+                <a:solidFill>
+                  <a:srgbClr val="003B4F"/>
+                </a:solidFill>
+                <a:latin typeface="Courier"/>
+              </a:rPr>
+              <a:t>(pine_sd_pooled, </a:t>
+            </a:r>
+            <a:r>
+              <a:rPr>
+                <a:solidFill>
+                  <a:srgbClr val="AD0000"/>
+                </a:solidFill>
+                <a:latin typeface="Courier"/>
+              </a:rPr>
+              <a:t>2</a:t>
+            </a:r>
+            <a:r>
+              <a:rPr>
+                <a:solidFill>
+                  <a:srgbClr val="003B4F"/>
+                </a:solidFill>
+                <a:latin typeface="Courier"/>
+              </a:rPr>
+              <a:t>), </a:t>
+            </a:r>
+            <a:r>
+              <a:rPr>
+                <a:solidFill>
+                  <a:srgbClr val="20794D"/>
+                </a:solidFill>
+                <a:latin typeface="Courier"/>
+              </a:rPr>
+              <a:t>"mm</a:t>
+            </a:r>
+            <a:r>
+              <a:rPr>
+                <a:solidFill>
+                  <a:srgbClr val="5E5E5E"/>
+                </a:solidFill>
+                <a:latin typeface="Courier"/>
+              </a:rPr>
+              <a:t>\n\n</a:t>
+            </a:r>
+            <a:r>
+              <a:rPr>
+                <a:solidFill>
+                  <a:srgbClr val="20794D"/>
+                </a:solidFill>
+                <a:latin typeface="Courier"/>
+              </a:rPr>
+              <a:t>"</a:t>
+            </a:r>
+            <a:r>
+              <a:rPr>
+                <a:solidFill>
+                  <a:srgbClr val="003B4F"/>
+                </a:solidFill>
+                <a:latin typeface="Courier"/>
+              </a:rPr>
+              <a:t>)</a:t>
+            </a:r>
+          </a:p>
+          <a:p>
+            <a:pPr lvl="0" indent="0">
+              <a:buNone/>
+            </a:pPr>
+            <a:r>
+              <a:rPr>
+                <a:latin typeface="Courier"/>
+              </a:rPr>
+              <a:t>Pooled SD: 2.58 mm</a:t>
+            </a:r>
+          </a:p>
+          <a:p>
+            <a:pPr lvl="0" indent="0" marL="1270000">
+              <a:buNone/>
+            </a:pPr>
+            <a:r>
+              <a:rPr sz="2000" b="1"/>
+              <a:t>Note</a:t>
+            </a:r>
+          </a:p>
+          <a:p>
+            <a:pPr lvl="0" indent="0" marL="1270000">
+              <a:buNone/>
+            </a:pPr>
+            <a:r>
+              <a:rPr sz="2000" b="1"/>
+              <a:t>📖 Reference</a:t>
+            </a:r>
+          </a:p>
+          <a:p>
+            <a:pPr lvl="0" indent="0" marL="1270000">
+              <a:buNone/>
+            </a:pPr>
+            <a:r>
+              <a:rPr sz="2000"/>
+              <a:t>Whitlock &amp; Schluter, Ch. 14 — Designing Experiments, includes planning the sample size needed for a study.</a:t>
+            </a:r>
+          </a:p>
+        </p:txBody>
+      </p:sp>
+      <p:sp>
+        <p:nvSpPr>
+          <p:cNvPr id="4" name="Content Placeholder 3"/>
+          <p:cNvSpPr>
+            <a:spLocks noGrp="1"/>
+          </p:cNvSpPr>
+          <p:nvPr>
+            <p:ph idx="2" sz="half"/>
+          </p:nvPr>
+        </p:nvSpPr>
+        <p:spPr/>
+        <p:txBody>
+          <a:bodyPr/>
+          <a:lstStyle/>
+          <a:p>
+            <a:pPr lvl="0" indent="0">
+              <a:buNone/>
+            </a:pPr>
+            <a:r>
+              <a:rPr>
+                <a:solidFill>
+                  <a:srgbClr val="5E5E5E"/>
+                </a:solidFill>
+                <a:latin typeface="Courier"/>
+              </a:rPr>
+              <a:t># More realistic effect sizes to test:</a:t>
+            </a:r>
+            <a:br/>
+            <a:r>
+              <a:rPr>
+                <a:solidFill>
+                  <a:srgbClr val="003B4F"/>
+                </a:solidFill>
+                <a:latin typeface="Courier"/>
+              </a:rPr>
+              <a:t>observed_diff &lt;- </a:t>
+            </a:r>
+            <a:r>
+              <a:rPr>
+                <a:solidFill>
+                  <a:srgbClr val="4758AB"/>
+                </a:solidFill>
+                <a:latin typeface="Courier"/>
+              </a:rPr>
+              <a:t>abs</a:t>
+            </a:r>
+            <a:r>
+              <a:rPr>
+                <a:solidFill>
+                  <a:srgbClr val="003B4F"/>
+                </a:solidFill>
+                <a:latin typeface="Courier"/>
+              </a:rPr>
+              <a:t>(</a:t>
+            </a:r>
+            <a:r>
+              <a:rPr>
+                <a:solidFill>
+                  <a:srgbClr val="4758AB"/>
+                </a:solidFill>
+                <a:latin typeface="Courier"/>
+              </a:rPr>
+              <a:t>mean</a:t>
+            </a:r>
+            <a:r>
+              <a:rPr>
+                <a:solidFill>
+                  <a:srgbClr val="003B4F"/>
+                </a:solidFill>
+                <a:latin typeface="Courier"/>
+              </a:rPr>
+              <a:t>(ps_shady_df</a:t>
+            </a:r>
+            <a:r>
+              <a:rPr>
+                <a:solidFill>
+                  <a:srgbClr val="5E5E5E"/>
+                </a:solidFill>
+                <a:latin typeface="Courier"/>
+              </a:rPr>
+              <a:t>$</a:t>
+            </a:r>
+            <a:r>
+              <a:rPr>
+                <a:solidFill>
+                  <a:srgbClr val="003B4F"/>
+                </a:solidFill>
+                <a:latin typeface="Courier"/>
+              </a:rPr>
+              <a:t>length_mm) </a:t>
+            </a:r>
+            <a:r>
+              <a:rPr>
+                <a:solidFill>
+                  <a:srgbClr val="5E5E5E"/>
+                </a:solidFill>
+                <a:latin typeface="Courier"/>
+              </a:rPr>
+              <a:t>-</a:t>
+            </a:r>
+            <a:r>
+              <a:rPr>
+                <a:solidFill>
+                  <a:srgbClr val="003B4F"/>
+                </a:solidFill>
+                <a:latin typeface="Courier"/>
+              </a:rPr>
+              <a:t> </a:t>
+            </a:r>
+            <a:r>
+              <a:rPr>
+                <a:solidFill>
+                  <a:srgbClr val="4758AB"/>
+                </a:solidFill>
+                <a:latin typeface="Courier"/>
+              </a:rPr>
+              <a:t>mean</a:t>
+            </a:r>
+            <a:r>
+              <a:rPr>
+                <a:solidFill>
+                  <a:srgbClr val="003B4F"/>
+                </a:solidFill>
+                <a:latin typeface="Courier"/>
+              </a:rPr>
+              <a:t>(ps_sunny_df</a:t>
+            </a:r>
+            <a:r>
+              <a:rPr>
+                <a:solidFill>
+                  <a:srgbClr val="5E5E5E"/>
+                </a:solidFill>
+                <a:latin typeface="Courier"/>
+              </a:rPr>
+              <a:t>$</a:t>
+            </a:r>
+            <a:r>
+              <a:rPr>
+                <a:solidFill>
+                  <a:srgbClr val="003B4F"/>
+                </a:solidFill>
+                <a:latin typeface="Courier"/>
+              </a:rPr>
+              <a:t>length_mm))</a:t>
+            </a:r>
+            <a:br/>
+            <a:r>
+              <a:rPr>
+                <a:solidFill>
+                  <a:srgbClr val="003B4F"/>
+                </a:solidFill>
+                <a:latin typeface="Courier"/>
+              </a:rPr>
+              <a:t>pine_effect_size_observed &lt;- observed_diff </a:t>
+            </a:r>
+            <a:r>
+              <a:rPr>
+                <a:solidFill>
+                  <a:srgbClr val="5E5E5E"/>
+                </a:solidFill>
+                <a:latin typeface="Courier"/>
+              </a:rPr>
+              <a:t>/</a:t>
+            </a:r>
+            <a:r>
+              <a:rPr>
+                <a:solidFill>
+                  <a:srgbClr val="003B4F"/>
+                </a:solidFill>
+                <a:latin typeface="Courier"/>
+              </a:rPr>
+              <a:t> pine_sd_pooled</a:t>
+            </a:r>
+            <a:br/>
+            <a:r>
+              <a:rPr>
+                <a:solidFill>
+                  <a:srgbClr val="4758AB"/>
+                </a:solidFill>
+                <a:latin typeface="Courier"/>
+              </a:rPr>
+              <a:t>cat</a:t>
+            </a:r>
+            <a:r>
+              <a:rPr>
+                <a:solidFill>
+                  <a:srgbClr val="003B4F"/>
+                </a:solidFill>
+                <a:latin typeface="Courier"/>
+              </a:rPr>
+              <a:t>(</a:t>
+            </a:r>
+            <a:r>
+              <a:rPr>
+                <a:solidFill>
+                  <a:srgbClr val="20794D"/>
+                </a:solidFill>
+                <a:latin typeface="Courier"/>
+              </a:rPr>
+              <a:t>"Effect size for observed"</a:t>
+            </a:r>
+            <a:r>
+              <a:rPr>
+                <a:solidFill>
+                  <a:srgbClr val="003B4F"/>
+                </a:solidFill>
+                <a:latin typeface="Courier"/>
+              </a:rPr>
+              <a:t>, </a:t>
+            </a:r>
+            <a:r>
+              <a:rPr>
+                <a:solidFill>
+                  <a:srgbClr val="4758AB"/>
+                </a:solidFill>
+                <a:latin typeface="Courier"/>
+              </a:rPr>
+              <a:t>round</a:t>
+            </a:r>
+            <a:r>
+              <a:rPr>
+                <a:solidFill>
+                  <a:srgbClr val="003B4F"/>
+                </a:solidFill>
+                <a:latin typeface="Courier"/>
+              </a:rPr>
+              <a:t>(observed_diff, </a:t>
+            </a:r>
+            <a:r>
+              <a:rPr>
+                <a:solidFill>
+                  <a:srgbClr val="AD0000"/>
+                </a:solidFill>
+                <a:latin typeface="Courier"/>
+              </a:rPr>
+              <a:t>2</a:t>
+            </a:r>
+            <a:r>
+              <a:rPr>
+                <a:solidFill>
+                  <a:srgbClr val="003B4F"/>
+                </a:solidFill>
+                <a:latin typeface="Courier"/>
+              </a:rPr>
+              <a:t>), </a:t>
+            </a:r>
+            <a:r>
+              <a:rPr>
+                <a:solidFill>
+                  <a:srgbClr val="20794D"/>
+                </a:solidFill>
+                <a:latin typeface="Courier"/>
+              </a:rPr>
+              <a:t>"mm difference: Cohen's d ="</a:t>
+            </a:r>
+            <a:r>
+              <a:rPr>
+                <a:solidFill>
+                  <a:srgbClr val="003B4F"/>
+                </a:solidFill>
+                <a:latin typeface="Courier"/>
+              </a:rPr>
+              <a:t>, </a:t>
+            </a:r>
+            <a:r>
+              <a:rPr>
+                <a:solidFill>
+                  <a:srgbClr val="4758AB"/>
+                </a:solidFill>
+                <a:latin typeface="Courier"/>
+              </a:rPr>
+              <a:t>round</a:t>
+            </a:r>
+            <a:r>
+              <a:rPr>
+                <a:solidFill>
+                  <a:srgbClr val="003B4F"/>
+                </a:solidFill>
+                <a:latin typeface="Courier"/>
+              </a:rPr>
+              <a:t>(pine_effect_size_observed, </a:t>
+            </a:r>
+            <a:r>
+              <a:rPr>
+                <a:solidFill>
+                  <a:srgbClr val="AD0000"/>
+                </a:solidFill>
+                <a:latin typeface="Courier"/>
+              </a:rPr>
+              <a:t>2</a:t>
+            </a:r>
+            <a:r>
+              <a:rPr>
+                <a:solidFill>
+                  <a:srgbClr val="003B4F"/>
+                </a:solidFill>
+                <a:latin typeface="Courier"/>
+              </a:rPr>
+              <a:t>), </a:t>
+            </a:r>
+            <a:r>
+              <a:rPr>
+                <a:solidFill>
+                  <a:srgbClr val="20794D"/>
+                </a:solidFill>
+                <a:latin typeface="Courier"/>
+              </a:rPr>
+              <a:t>"</a:t>
+            </a:r>
+            <a:r>
+              <a:rPr>
+                <a:solidFill>
+                  <a:srgbClr val="5E5E5E"/>
+                </a:solidFill>
+                <a:latin typeface="Courier"/>
+              </a:rPr>
+              <a:t>\n</a:t>
+            </a:r>
+            <a:r>
+              <a:rPr>
+                <a:solidFill>
+                  <a:srgbClr val="20794D"/>
+                </a:solidFill>
+                <a:latin typeface="Courier"/>
+              </a:rPr>
+              <a:t>"</a:t>
+            </a:r>
+            <a:r>
+              <a:rPr>
+                <a:solidFill>
+                  <a:srgbClr val="003B4F"/>
+                </a:solidFill>
+                <a:latin typeface="Courier"/>
+              </a:rPr>
+              <a:t>)</a:t>
+            </a:r>
+          </a:p>
+          <a:p>
+            <a:pPr lvl="0" indent="0">
+              <a:buNone/>
+            </a:pPr>
+            <a:r>
+              <a:rPr>
+                <a:latin typeface="Courier"/>
+              </a:rPr>
+              <a:t>Effect size for observed 1.45 mm difference: Cohen's d = 0.56 </a:t>
+            </a:r>
+          </a:p>
+          <a:p>
+            <a:pPr lvl="0" indent="0">
+              <a:buNone/>
+            </a:pPr>
+            <a:r>
+              <a:rPr>
+                <a:solidFill>
+                  <a:srgbClr val="003B4F"/>
+                </a:solidFill>
+                <a:latin typeface="Courier"/>
+              </a:rPr>
+              <a:t>pine_power_observed &lt;- </a:t>
+            </a:r>
+            <a:r>
+              <a:rPr>
+                <a:solidFill>
+                  <a:srgbClr val="4758AB"/>
+                </a:solidFill>
+                <a:latin typeface="Courier"/>
+              </a:rPr>
+              <a:t>power.t.test</a:t>
+            </a:r>
+            <a:r>
+              <a:rPr>
+                <a:solidFill>
+                  <a:srgbClr val="003B4F"/>
+                </a:solidFill>
+                <a:latin typeface="Courier"/>
+              </a:rPr>
+              <a:t>(</a:t>
+            </a:r>
+            <a:r>
+              <a:rPr>
+                <a:solidFill>
+                  <a:srgbClr val="657422"/>
+                </a:solidFill>
+                <a:latin typeface="Courier"/>
+              </a:rPr>
+              <a:t>n =</a:t>
+            </a:r>
+            <a:r>
+              <a:rPr>
+                <a:solidFill>
+                  <a:srgbClr val="003B4F"/>
+                </a:solidFill>
+                <a:latin typeface="Courier"/>
+              </a:rPr>
+              <a:t> </a:t>
+            </a:r>
+            <a:r>
+              <a:rPr>
+                <a:solidFill>
+                  <a:srgbClr val="4758AB"/>
+                </a:solidFill>
+                <a:latin typeface="Courier"/>
+              </a:rPr>
+              <a:t>min</a:t>
+            </a:r>
+            <a:r>
+              <a:rPr>
+                <a:solidFill>
+                  <a:srgbClr val="003B4F"/>
+                </a:solidFill>
+                <a:latin typeface="Courier"/>
+              </a:rPr>
+              <a:t>(pine_n1, pine_n2),</a:t>
+            </a:r>
+            <a:br/>
+            <a:r>
+              <a:rPr>
+                <a:solidFill>
+                  <a:srgbClr val="003B4F"/>
+                </a:solidFill>
+                <a:latin typeface="Courier"/>
+              </a:rPr>
+              <a:t>                                   </a:t>
+            </a:r>
+            <a:r>
+              <a:rPr>
+                <a:solidFill>
+                  <a:srgbClr val="657422"/>
+                </a:solidFill>
+                <a:latin typeface="Courier"/>
+              </a:rPr>
+              <a:t>delta =</a:t>
+            </a:r>
+            <a:r>
+              <a:rPr>
+                <a:solidFill>
+                  <a:srgbClr val="003B4F"/>
+                </a:solidFill>
+                <a:latin typeface="Courier"/>
+              </a:rPr>
+              <a:t> pine_effect_size_observed,</a:t>
+            </a:r>
+            <a:br/>
+            <a:r>
+              <a:rPr>
+                <a:solidFill>
+                  <a:srgbClr val="003B4F"/>
+                </a:solidFill>
+                <a:latin typeface="Courier"/>
+              </a:rPr>
+              <a:t>                                   </a:t>
+            </a:r>
+            <a:r>
+              <a:rPr>
+                <a:solidFill>
+                  <a:srgbClr val="657422"/>
+                </a:solidFill>
+                <a:latin typeface="Courier"/>
+              </a:rPr>
+              <a:t>sd =</a:t>
+            </a:r>
+            <a:r>
+              <a:rPr>
+                <a:solidFill>
+                  <a:srgbClr val="003B4F"/>
+                </a:solidFill>
+                <a:latin typeface="Courier"/>
+              </a:rPr>
+              <a:t> </a:t>
+            </a:r>
+            <a:r>
+              <a:rPr>
+                <a:solidFill>
+                  <a:srgbClr val="AD0000"/>
+                </a:solidFill>
+                <a:latin typeface="Courier"/>
+              </a:rPr>
+              <a:t>1</a:t>
+            </a:r>
+            <a:r>
+              <a:rPr>
+                <a:solidFill>
+                  <a:srgbClr val="003B4F"/>
+                </a:solidFill>
+                <a:latin typeface="Courier"/>
+              </a:rPr>
+              <a:t>,</a:t>
+            </a:r>
+            <a:br/>
+            <a:r>
+              <a:rPr>
+                <a:solidFill>
+                  <a:srgbClr val="003B4F"/>
+                </a:solidFill>
+                <a:latin typeface="Courier"/>
+              </a:rPr>
+              <a:t>                                   </a:t>
+            </a:r>
+            <a:r>
+              <a:rPr>
+                <a:solidFill>
+                  <a:srgbClr val="657422"/>
+                </a:solidFill>
+                <a:latin typeface="Courier"/>
+              </a:rPr>
+              <a:t>sig.level =</a:t>
+            </a:r>
+            <a:r>
+              <a:rPr>
+                <a:solidFill>
+                  <a:srgbClr val="003B4F"/>
+                </a:solidFill>
+                <a:latin typeface="Courier"/>
+              </a:rPr>
+              <a:t> pine_alpha,</a:t>
+            </a:r>
+            <a:br/>
+            <a:r>
+              <a:rPr>
+                <a:solidFill>
+                  <a:srgbClr val="003B4F"/>
+                </a:solidFill>
+                <a:latin typeface="Courier"/>
+              </a:rPr>
+              <a:t>                                   </a:t>
+            </a:r>
+            <a:r>
+              <a:rPr>
+                <a:solidFill>
+                  <a:srgbClr val="657422"/>
+                </a:solidFill>
+                <a:latin typeface="Courier"/>
+              </a:rPr>
+              <a:t>type =</a:t>
+            </a:r>
+            <a:r>
+              <a:rPr>
+                <a:solidFill>
+                  <a:srgbClr val="003B4F"/>
+                </a:solidFill>
+                <a:latin typeface="Courier"/>
+              </a:rPr>
+              <a:t> </a:t>
+            </a:r>
+            <a:r>
+              <a:rPr>
+                <a:solidFill>
+                  <a:srgbClr val="20794D"/>
+                </a:solidFill>
+                <a:latin typeface="Courier"/>
+              </a:rPr>
+              <a:t>"two.sample"</a:t>
+            </a:r>
+            <a:r>
+              <a:rPr>
+                <a:solidFill>
+                  <a:srgbClr val="003B4F"/>
+                </a:solidFill>
+                <a:latin typeface="Courier"/>
+              </a:rPr>
+              <a:t>,</a:t>
+            </a:r>
+            <a:br/>
+            <a:r>
+              <a:rPr>
+                <a:solidFill>
+                  <a:srgbClr val="003B4F"/>
+                </a:solidFill>
+                <a:latin typeface="Courier"/>
+              </a:rPr>
+              <a:t>                                   </a:t>
+            </a:r>
+            <a:r>
+              <a:rPr>
+                <a:solidFill>
+                  <a:srgbClr val="657422"/>
+                </a:solidFill>
+                <a:latin typeface="Courier"/>
+              </a:rPr>
+              <a:t>alternative =</a:t>
+            </a:r>
+            <a:r>
+              <a:rPr>
+                <a:solidFill>
+                  <a:srgbClr val="003B4F"/>
+                </a:solidFill>
+                <a:latin typeface="Courier"/>
+              </a:rPr>
+              <a:t> </a:t>
+            </a:r>
+            <a:r>
+              <a:rPr>
+                <a:solidFill>
+                  <a:srgbClr val="20794D"/>
+                </a:solidFill>
+                <a:latin typeface="Courier"/>
+              </a:rPr>
+              <a:t>"two.sided"</a:t>
+            </a:r>
+            <a:r>
+              <a:rPr>
+                <a:solidFill>
+                  <a:srgbClr val="003B4F"/>
+                </a:solidFill>
+                <a:latin typeface="Courier"/>
+              </a:rPr>
+              <a:t>)</a:t>
+            </a:r>
+            <a:br/>
+            <a:br/>
+            <a:r>
+              <a:rPr>
+                <a:solidFill>
+                  <a:srgbClr val="4758AB"/>
+                </a:solidFill>
+                <a:latin typeface="Courier"/>
+              </a:rPr>
+              <a:t>cat</a:t>
+            </a:r>
+            <a:r>
+              <a:rPr>
+                <a:solidFill>
+                  <a:srgbClr val="003B4F"/>
+                </a:solidFill>
+                <a:latin typeface="Courier"/>
+              </a:rPr>
+              <a:t>(</a:t>
+            </a:r>
+            <a:r>
+              <a:rPr>
+                <a:solidFill>
+                  <a:srgbClr val="20794D"/>
+                </a:solidFill>
+                <a:latin typeface="Courier"/>
+              </a:rPr>
+              <a:t>"Power for observed"</a:t>
+            </a:r>
+            <a:r>
+              <a:rPr>
+                <a:solidFill>
+                  <a:srgbClr val="003B4F"/>
+                </a:solidFill>
+                <a:latin typeface="Courier"/>
+              </a:rPr>
+              <a:t>, </a:t>
+            </a:r>
+            <a:r>
+              <a:rPr>
+                <a:solidFill>
+                  <a:srgbClr val="4758AB"/>
+                </a:solidFill>
+                <a:latin typeface="Courier"/>
+              </a:rPr>
+              <a:t>round</a:t>
+            </a:r>
+            <a:r>
+              <a:rPr>
+                <a:solidFill>
+                  <a:srgbClr val="003B4F"/>
+                </a:solidFill>
+                <a:latin typeface="Courier"/>
+              </a:rPr>
+              <a:t>(observed_diff, </a:t>
+            </a:r>
+            <a:r>
+              <a:rPr>
+                <a:solidFill>
+                  <a:srgbClr val="AD0000"/>
+                </a:solidFill>
+                <a:latin typeface="Courier"/>
+              </a:rPr>
+              <a:t>2</a:t>
+            </a:r>
+            <a:r>
+              <a:rPr>
+                <a:solidFill>
+                  <a:srgbClr val="003B4F"/>
+                </a:solidFill>
+                <a:latin typeface="Courier"/>
+              </a:rPr>
+              <a:t>), </a:t>
+            </a:r>
+            <a:r>
+              <a:rPr>
+                <a:solidFill>
+                  <a:srgbClr val="20794D"/>
+                </a:solidFill>
+                <a:latin typeface="Courier"/>
+              </a:rPr>
+              <a:t>"mm difference:"</a:t>
+            </a:r>
+            <a:r>
+              <a:rPr>
+                <a:solidFill>
+                  <a:srgbClr val="003B4F"/>
+                </a:solidFill>
+                <a:latin typeface="Courier"/>
+              </a:rPr>
+              <a:t>, </a:t>
+            </a:r>
+            <a:r>
+              <a:rPr>
+                <a:solidFill>
+                  <a:srgbClr val="4758AB"/>
+                </a:solidFill>
+                <a:latin typeface="Courier"/>
+              </a:rPr>
+              <a:t>round</a:t>
+            </a:r>
+            <a:r>
+              <a:rPr>
+                <a:solidFill>
+                  <a:srgbClr val="003B4F"/>
+                </a:solidFill>
+                <a:latin typeface="Courier"/>
+              </a:rPr>
+              <a:t>(pine_power_observed</a:t>
+            </a:r>
+            <a:r>
+              <a:rPr>
+                <a:solidFill>
+                  <a:srgbClr val="5E5E5E"/>
+                </a:solidFill>
+                <a:latin typeface="Courier"/>
+              </a:rPr>
+              <a:t>$</a:t>
+            </a:r>
+            <a:r>
+              <a:rPr>
+                <a:solidFill>
+                  <a:srgbClr val="003B4F"/>
+                </a:solidFill>
+                <a:latin typeface="Courier"/>
+              </a:rPr>
+              <a:t>power, </a:t>
+            </a:r>
+            <a:r>
+              <a:rPr>
+                <a:solidFill>
+                  <a:srgbClr val="AD0000"/>
+                </a:solidFill>
+                <a:latin typeface="Courier"/>
+              </a:rPr>
+              <a:t>3</a:t>
+            </a:r>
+            <a:r>
+              <a:rPr>
+                <a:solidFill>
+                  <a:srgbClr val="003B4F"/>
+                </a:solidFill>
+                <a:latin typeface="Courier"/>
+              </a:rPr>
+              <a:t>), </a:t>
+            </a:r>
+            <a:r>
+              <a:rPr>
+                <a:solidFill>
+                  <a:srgbClr val="20794D"/>
+                </a:solidFill>
+                <a:latin typeface="Courier"/>
+              </a:rPr>
+              <a:t>"</a:t>
+            </a:r>
+            <a:r>
+              <a:rPr>
+                <a:solidFill>
+                  <a:srgbClr val="5E5E5E"/>
+                </a:solidFill>
+                <a:latin typeface="Courier"/>
+              </a:rPr>
+              <a:t>\n</a:t>
+            </a:r>
+            <a:r>
+              <a:rPr>
+                <a:solidFill>
+                  <a:srgbClr val="20794D"/>
+                </a:solidFill>
+                <a:latin typeface="Courier"/>
+              </a:rPr>
+              <a:t>"</a:t>
+            </a:r>
+            <a:r>
+              <a:rPr>
+                <a:solidFill>
+                  <a:srgbClr val="003B4F"/>
+                </a:solidFill>
+                <a:latin typeface="Courier"/>
+              </a:rPr>
+              <a:t>)</a:t>
+            </a:r>
+          </a:p>
+          <a:p>
+            <a:pPr lvl="0" indent="0">
+              <a:buNone/>
+            </a:pPr>
+            <a:r>
+              <a:rPr>
+                <a:latin typeface="Courier"/>
+              </a:rPr>
+              <a:t>Power for observed 1.45 mm difference: 0.182 </a:t>
+            </a:r>
+          </a:p>
+        </p:txBody>
+      </p:sp>
+    </p:spTree>
+  </p:cSld>
+</p:sld>
+</file>
+
+<file path=ppt/slides/slide25.xml><?xml version="1.0" encoding="utf-8"?>
+<p:sld xmlns:a="http://schemas.openxmlformats.org/drawingml/2006/main" xmlns:r="http://schemas.openxmlformats.org/officeDocument/2006/relationships" xmlns:p="http://schemas.openxmlformats.org/presentationml/2006/main">
+  <p:cSld>
+    <p:spTree>
+      <p:nvGrpSpPr>
+        <p:cNvPr id="1" name=""/>
+        <p:cNvGrpSpPr/>
+        <p:nvPr/>
+      </p:nvGrpSpPr>
+      <p:grpSpPr>
+        <a:xfrm>
+          <a:off x="0" y="0"/>
+          <a:ext cx="0" cy="0"/>
+          <a:chOff x="0" y="0"/>
+          <a:chExt cx="0" cy="0"/>
+        </a:xfrm>
+      </p:grpSpPr>
+      <p:sp>
+        <p:nvSpPr>
+          <p:cNvPr id="2" name="Title 1"/>
+          <p:cNvSpPr>
+            <a:spLocks noGrp="1"/>
+          </p:cNvSpPr>
+          <p:nvPr>
+            <p:ph type="title"/>
+          </p:nvPr>
+        </p:nvSpPr>
+        <p:spPr>
+          <a:xfrm>
+            <a:off x="0" y="0"/>
+            <a:ext cx="9144000" cy="602780"/>
+          </a:xfrm>
+          <a:solidFill>
+            <a:srgbClr val="70121D"/>
+          </a:solidFill>
+        </p:spPr>
+        <p:txBody>
+          <a:bodyPr/>
+          <a:lstStyle/>
+          <a:p>
+            <a:pPr lvl="0" indent="0" marL="0">
+              <a:buNone/>
+            </a:pPr>
+            <a:r>
+              <a:rPr/>
+              <a:t>What Is Power?</a:t>
+            </a:r>
+          </a:p>
+        </p:txBody>
+      </p:sp>
+      <p:sp>
+        <p:nvSpPr>
+          <p:cNvPr id="3" name="Content Placeholder 2"/>
+          <p:cNvSpPr>
+            <a:spLocks noGrp="1"/>
+          </p:cNvSpPr>
+          <p:nvPr>
+            <p:ph idx="1" sz="half"/>
+          </p:nvPr>
+        </p:nvSpPr>
+        <p:spPr/>
+        <p:txBody>
+          <a:bodyPr/>
+          <a:lstStyle/>
+          <a:p>
+            <a:pPr lvl="0" indent="0" marL="0">
+              <a:buNone/>
+            </a:pPr>
+            <a:r>
+              <a:rPr/>
+              <a:t>Statistical power represents the probability of detecting a true effect (rejecting the null hypothesis when it is false). With a power of 97%, there’s a 97% chance of detecting a true difference of X units between the means of the two groups, if such a difference actually exists.</a:t>
+            </a:r>
+          </a:p>
+          <a:p>
+            <a:pPr lvl="0" indent="0" marL="0">
+              <a:buNone/>
+            </a:pPr>
+            <a:r>
+              <a:rPr/>
+              <a:t>A power analysis like this is typically done for one of these purposes:</a:t>
             </a:r>
           </a:p>
           <a:p>
@@ -5925,26 +8517,8 @@
               <a:buAutoNum type="arabicPeriod"/>
             </a:pPr>
             <a:r>
-              <a:rPr b="1"/>
-              <a:t>P-values</a:t>
-            </a:r>
-            <a:r>
-              <a:rPr/>
-              <a:t> measure evidence against the null hypothesis</a:t>
-            </a:r>
-          </a:p>
-          <a:p>
-            <a:pPr lvl="1"/>
-            <a:r>
-              <a:rPr/>
-              <a:t>Not the probability that H₀ is true</a:t>
-            </a:r>
-          </a:p>
-          <a:p>
-            <a:pPr lvl="1"/>
-            <a:r>
-              <a:rPr/>
-              <a:t>Should be interpreted in context with effect size</a:t>
+              <a:rPr/>
+              <a:t>Before data collection, to determine required sample size</a:t>
             </a:r>
           </a:p>
           <a:p>
@@ -5952,26 +8526,8 @@
               <a:buAutoNum type="arabicPeriod"/>
             </a:pPr>
             <a:r>
-              <a:rPr b="1"/>
-              <a:t>Hypothesis testing</a:t>
-            </a:r>
-            <a:r>
-              <a:rPr/>
-              <a:t> provides a framework for making decisions</a:t>
-            </a:r>
-          </a:p>
-          <a:p>
-            <a:pPr lvl="1"/>
-            <a:r>
-              <a:rPr/>
-              <a:t>Null and alternative hypotheses must be specified beforehand</a:t>
-            </a:r>
-          </a:p>
-          <a:p>
-            <a:pPr lvl="1"/>
-            <a:r>
-              <a:rPr/>
-              <a:t>α level determines Type I error rate</a:t>
+              <a:rPr/>
+              <a:t>After a study, to evaluate if the sample size was adequate</a:t>
             </a:r>
           </a:p>
           <a:p>
@@ -5979,33 +8535,245 @@
               <a:buAutoNum type="arabicPeriod"/>
             </a:pPr>
             <a:r>
+              <a:rPr/>
+              <a:t>To determine the minimum detectable effect size with the given sample</a:t>
+            </a:r>
+          </a:p>
+        </p:txBody>
+      </p:sp>
+      <p:sp>
+        <p:nvSpPr>
+          <p:cNvPr id="4" name="Content Placeholder 3"/>
+          <p:cNvSpPr>
+            <a:spLocks noGrp="1"/>
+          </p:cNvSpPr>
+          <p:nvPr>
+            <p:ph idx="2" sz="half"/>
+          </p:nvPr>
+        </p:nvSpPr>
+        <p:spPr/>
+        <p:txBody>
+          <a:bodyPr/>
+          <a:lstStyle/>
+          <a:p>
+            <a:pPr lvl="0" indent="0" marL="1270000">
+              <a:buNone/>
+            </a:pPr>
+            <a:r>
+              <a:rPr sz="2000" b="1"/>
+              <a:t>Note</a:t>
+            </a:r>
+          </a:p>
+          <a:p>
+            <a:pPr lvl="0" indent="0" marL="1270000">
+              <a:buNone/>
+            </a:pPr>
+            <a:r>
+              <a:rPr sz="2000" b="1"/>
+              <a:t>✅ Key idea</a:t>
+            </a:r>
+          </a:p>
+          <a:p>
+            <a:pPr lvl="0" indent="0" marL="1270000">
+              <a:buNone/>
+            </a:pPr>
+            <a:r>
+              <a:rPr sz="2000"/>
+              <a:t>With 97% power, this test has excellent ability to detect the specified effect size. Generally, </a:t>
+            </a:r>
+            <a:r>
+              <a:rPr sz="2000" b="1"/>
+              <a:t>80% power is considered acceptable</a:t>
+            </a:r>
+            <a:r>
+              <a:rPr sz="2000"/>
+              <a:t> — so 97% indicates a very well-powered study for detecting a difference of this size between the groups.</a:t>
+            </a:r>
+          </a:p>
+        </p:txBody>
+      </p:sp>
+    </p:spTree>
+  </p:cSld>
+</p:sld>
+</file>
+
+<file path=ppt/slides/slide26.xml><?xml version="1.0" encoding="utf-8"?>
+<p:sld xmlns:a="http://schemas.openxmlformats.org/drawingml/2006/main" xmlns:r="http://schemas.openxmlformats.org/officeDocument/2006/relationships" xmlns:p="http://schemas.openxmlformats.org/presentationml/2006/main">
+  <p:cSld>
+    <p:spTree>
+      <p:nvGrpSpPr>
+        <p:cNvPr id="1" name=""/>
+        <p:cNvGrpSpPr/>
+        <p:nvPr/>
+      </p:nvGrpSpPr>
+      <p:grpSpPr>
+        <a:xfrm>
+          <a:off x="0" y="0"/>
+          <a:ext cx="0" cy="0"/>
+          <a:chOff x="0" y="0"/>
+          <a:chExt cx="0" cy="0"/>
+        </a:xfrm>
+      </p:grpSpPr>
+      <p:sp>
+        <p:nvSpPr>
+          <p:cNvPr id="2" name="Title 1"/>
+          <p:cNvSpPr>
+            <a:spLocks noGrp="1"/>
+          </p:cNvSpPr>
+          <p:nvPr>
+            <p:ph type="title"/>
+          </p:nvPr>
+        </p:nvSpPr>
+        <p:spPr>
+          <a:xfrm>
+            <a:off x="0" y="0"/>
+            <a:ext cx="9144000" cy="582780"/>
+          </a:xfrm>
+        </p:spPr>
+        <p:txBody>
+          <a:bodyPr/>
+          <a:lstStyle/>
+          <a:p>
+            <a:pPr lvl="0" indent="0" marL="0">
+              <a:buNone/>
+            </a:pPr>
+            <a:r>
+              <a:rPr/>
+              <a:t>Part 7 · Error Bars</a:t>
+            </a:r>
+          </a:p>
+        </p:txBody>
+      </p:sp>
+    </p:spTree>
+  </p:cSld>
+</p:sld>
+</file>
+
+<file path=ppt/slides/slide27.xml><?xml version="1.0" encoding="utf-8"?>
+<p:sld xmlns:a="http://schemas.openxmlformats.org/drawingml/2006/main" xmlns:r="http://schemas.openxmlformats.org/officeDocument/2006/relationships" xmlns:p="http://schemas.openxmlformats.org/presentationml/2006/main">
+  <p:cSld>
+    <p:spTree>
+      <p:nvGrpSpPr>
+        <p:cNvPr id="1" name=""/>
+        <p:cNvGrpSpPr/>
+        <p:nvPr/>
+      </p:nvGrpSpPr>
+      <p:grpSpPr>
+        <a:xfrm>
+          <a:off x="0" y="0"/>
+          <a:ext cx="0" cy="0"/>
+          <a:chOff x="0" y="0"/>
+          <a:chExt cx="0" cy="0"/>
+        </a:xfrm>
+      </p:grpSpPr>
+      <p:sp>
+        <p:nvSpPr>
+          <p:cNvPr id="2" name="Title 1"/>
+          <p:cNvSpPr>
+            <a:spLocks noGrp="1"/>
+          </p:cNvSpPr>
+          <p:nvPr>
+            <p:ph type="title"/>
+          </p:nvPr>
+        </p:nvSpPr>
+        <p:spPr>
+          <a:xfrm>
+            <a:off x="0" y="0"/>
+            <a:ext cx="9144000" cy="602780"/>
+          </a:xfrm>
+          <a:solidFill>
+            <a:srgbClr val="70121D"/>
+          </a:solidFill>
+        </p:spPr>
+        <p:txBody>
+          <a:bodyPr/>
+          <a:lstStyle/>
+          <a:p>
+            <a:pPr lvl="0" indent="0" marL="0">
+              <a:buNone/>
+            </a:pPr>
+            <a:r>
+              <a:rPr/>
+              <a:t>Error Bars and Their Interpretation</a:t>
+            </a:r>
+          </a:p>
+        </p:txBody>
+      </p:sp>
+      <p:sp>
+        <p:nvSpPr>
+          <p:cNvPr id="3" name="Content Placeholder 2"/>
+          <p:cNvSpPr>
+            <a:spLocks noGrp="1"/>
+          </p:cNvSpPr>
+          <p:nvPr>
+            <p:ph idx="1" sz="half"/>
+          </p:nvPr>
+        </p:nvSpPr>
+        <p:spPr/>
+        <p:txBody>
+          <a:bodyPr/>
+          <a:lstStyle/>
+          <a:p>
+            <a:pPr lvl="0" indent="0" marL="0">
+              <a:buNone/>
+            </a:pPr>
+            <a:r>
+              <a:rPr/>
+              <a:t>Error bars are graphical representations of the variability of data that show:</a:t>
+            </a:r>
+          </a:p>
+          <a:p>
+            <a:pPr lvl="0"/>
+            <a:r>
+              <a:rPr/>
+              <a:t>The </a:t>
+            </a:r>
+            <a:r>
               <a:rPr b="1"/>
-              <a:t>Type I and Type II errors</a:t>
-            </a:r>
-            <a:r>
-              <a:rPr/>
-              <a:t> represent different kinds of mistakes</a:t>
-            </a:r>
-          </a:p>
-          <a:p>
-            <a:pPr lvl="1"/>
-            <a:r>
-              <a:rPr/>
-              <a:t>Type I (α): False positive - rejecting true H₀</a:t>
-            </a:r>
-          </a:p>
-          <a:p>
-            <a:pPr lvl="1"/>
-            <a:r>
-              <a:rPr/>
-              <a:t>Type II (β): False negative - failing to reject false H₀</a:t>
-            </a:r>
-          </a:p>
-          <a:p>
-            <a:pPr lvl="1"/>
-            <a:r>
-              <a:rPr/>
-              <a:t>Statistical power = 1 - β</a:t>
+              <a:t>precision</a:t>
+            </a:r>
+            <a:r>
+              <a:rPr/>
+              <a:t> of a measurement</a:t>
+            </a:r>
+          </a:p>
+          <a:p>
+            <a:pPr lvl="0"/>
+            <a:r>
+              <a:rPr/>
+              <a:t>The </a:t>
+            </a:r>
+            <a:r>
+              <a:rPr b="1"/>
+              <a:t>uncertainty</a:t>
+            </a:r>
+            <a:r>
+              <a:rPr/>
+              <a:t> around an estimate</a:t>
+            </a:r>
+          </a:p>
+          <a:p>
+            <a:pPr lvl="0"/>
+            <a:r>
+              <a:rPr/>
+              <a:t>A </a:t>
+            </a:r>
+            <a:r>
+              <a:rPr b="1"/>
+              <a:t>confidence interval</a:t>
+            </a:r>
+            <a:r>
+              <a:rPr/>
+              <a:t> for a parameter</a:t>
+            </a:r>
+          </a:p>
+          <a:p>
+            <a:pPr lvl="0" indent="0" marL="0">
+              <a:buNone/>
+            </a:pPr>
+            <a:r>
+              <a:rPr/>
+              <a:t>Common types of error bars:</a:t>
             </a:r>
           </a:p>
           <a:p>
@@ -6014,25 +8782,11 @@
             </a:pPr>
             <a:r>
               <a:rPr b="1"/>
-              <a:t>Error bars</a:t>
-            </a:r>
-            <a:r>
-              <a:rPr/>
-              <a:t> communicate uncertainty in different ways</a:t>
-            </a:r>
-          </a:p>
-          <a:p>
-            <a:pPr lvl="1"/>
-            <a:r>
-              <a:rPr/>
-              <a:t>Always check what type of error bar is shown</a:t>
-            </a:r>
-          </a:p>
-          <a:p>
-            <a:pPr lvl="1"/>
-            <a:r>
-              <a:rPr/>
-              <a:t>CI bars help assess statistical significance</a:t>
+              <a:t>Standard Error (SE)</a:t>
+            </a:r>
+            <a:r>
+              <a:rPr/>
+              <a:t> — shows precision of the mean</a:t>
             </a:r>
           </a:p>
           <a:p>
@@ -6041,29 +8795,335 @@
             </a:pPr>
             <a:r>
               <a:rPr b="1"/>
+              <a:t>Standard Deviation (SD)</a:t>
+            </a:r>
+            <a:r>
+              <a:rPr/>
+              <a:t> — shows variability in the data</a:t>
+            </a:r>
+          </a:p>
+          <a:p>
+            <a:pPr lvl="0" indent="-342900" marL="342900">
+              <a:buAutoNum type="arabicPeriod"/>
+            </a:pPr>
+            <a:r>
+              <a:rPr b="1"/>
+              <a:t>Confidence Interval (CI)</a:t>
+            </a:r>
+            <a:r>
+              <a:rPr/>
+              <a:t> — shows the plausible range for a parameter</a:t>
+            </a:r>
+          </a:p>
+          <a:p>
+            <a:pPr lvl="0" indent="0" marL="0">
+              <a:buNone/>
+            </a:pPr>
+            <a:r>
+              <a:rPr/>
+              <a:t>When interpreting graphs:</a:t>
+            </a:r>
+          </a:p>
+          <a:p>
+            <a:pPr lvl="0"/>
+            <a:r>
+              <a:rPr/>
+              <a:t>Always check what the error bars represent</a:t>
+            </a:r>
+          </a:p>
+          <a:p>
+            <a:pPr lvl="0"/>
+            <a:r>
+              <a:rPr/>
+              <a:t>Non-overlapping 95% CI bars suggest statistically significant differences</a:t>
+            </a:r>
+          </a:p>
+          <a:p>
+            <a:pPr lvl="0"/>
+            <a:r>
+              <a:rPr/>
+              <a:t>Error bars help assess both statistical and practical significance</a:t>
+            </a:r>
+          </a:p>
+        </p:txBody>
+      </p:sp>
+      <p:pic>
+        <p:nvPicPr>
+          <p:cNvPr descr="power_and_error_lecture_files/figure-pptx/unnamed-chunk-6-1.png" id="0" name="Picture 1"/>
+          <p:cNvPicPr>
+            <a:picLocks noGrp="1" noChangeAspect="1"/>
+          </p:cNvPicPr>
+          <p:nvPr/>
+        </p:nvPicPr>
+        <p:blipFill>
+          <a:blip r:embed="rId2"/>
+          <a:stretch>
+            <a:fillRect/>
+          </a:stretch>
+        </p:blipFill>
+        <p:spPr bwMode="auto">
+          <a:xfrm>
+            <a:off x="6121400" y="1587500"/>
+            <a:ext cx="2781300" cy="2616200"/>
+          </a:xfrm>
+          <a:prstGeom prst="rect">
+            <a:avLst/>
+          </a:prstGeom>
+          <a:noFill/>
+          <a:ln w="9525">
+            <a:noFill/>
+            <a:headEnd/>
+            <a:tailEnd/>
+          </a:ln>
+        </p:spPr>
+      </p:pic>
+    </p:spTree>
+  </p:cSld>
+</p:sld>
+</file>
+
+<file path=ppt/slides/slide28.xml><?xml version="1.0" encoding="utf-8"?>
+<p:sld xmlns:a="http://schemas.openxmlformats.org/drawingml/2006/main" xmlns:r="http://schemas.openxmlformats.org/officeDocument/2006/relationships" xmlns:p="http://schemas.openxmlformats.org/presentationml/2006/main">
+  <p:cSld>
+    <p:spTree>
+      <p:nvGrpSpPr>
+        <p:cNvPr id="1" name=""/>
+        <p:cNvGrpSpPr/>
+        <p:nvPr/>
+      </p:nvGrpSpPr>
+      <p:grpSpPr>
+        <a:xfrm>
+          <a:off x="0" y="0"/>
+          <a:ext cx="0" cy="0"/>
+          <a:chOff x="0" y="0"/>
+          <a:chExt cx="0" cy="0"/>
+        </a:xfrm>
+      </p:grpSpPr>
+      <p:sp>
+        <p:nvSpPr>
+          <p:cNvPr id="2" name="Title 1"/>
+          <p:cNvSpPr>
+            <a:spLocks noGrp="1"/>
+          </p:cNvSpPr>
+          <p:nvPr>
+            <p:ph type="title"/>
+          </p:nvPr>
+        </p:nvSpPr>
+        <p:spPr>
+          <a:xfrm>
+            <a:off x="0" y="0"/>
+            <a:ext cx="9144000" cy="582780"/>
+          </a:xfrm>
+        </p:spPr>
+        <p:txBody>
+          <a:bodyPr/>
+          <a:lstStyle/>
+          <a:p>
+            <a:pPr lvl="0" indent="0" marL="0">
+              <a:buNone/>
+            </a:pPr>
+            <a:r>
+              <a:rPr/>
+              <a:t>Part 8 · Pseudoreplication</a:t>
+            </a:r>
+          </a:p>
+        </p:txBody>
+      </p:sp>
+    </p:spTree>
+  </p:cSld>
+</p:sld>
+</file>
+
+<file path=ppt/slides/slide29.xml><?xml version="1.0" encoding="utf-8"?>
+<p:sld xmlns:a="http://schemas.openxmlformats.org/drawingml/2006/main" xmlns:r="http://schemas.openxmlformats.org/officeDocument/2006/relationships" xmlns:p="http://schemas.openxmlformats.org/presentationml/2006/main">
+  <p:cSld>
+    <p:spTree>
+      <p:nvGrpSpPr>
+        <p:cNvPr id="1" name=""/>
+        <p:cNvGrpSpPr/>
+        <p:nvPr/>
+      </p:nvGrpSpPr>
+      <p:grpSpPr>
+        <a:xfrm>
+          <a:off x="0" y="0"/>
+          <a:ext cx="0" cy="0"/>
+          <a:chOff x="0" y="0"/>
+          <a:chExt cx="0" cy="0"/>
+        </a:xfrm>
+      </p:grpSpPr>
+      <p:sp>
+        <p:nvSpPr>
+          <p:cNvPr id="2" name="Title 1"/>
+          <p:cNvSpPr>
+            <a:spLocks noGrp="1"/>
+          </p:cNvSpPr>
+          <p:nvPr>
+            <p:ph type="title"/>
+          </p:nvPr>
+        </p:nvSpPr>
+        <p:spPr>
+          <a:xfrm>
+            <a:off x="0" y="0"/>
+            <a:ext cx="9144000" cy="602780"/>
+          </a:xfrm>
+          <a:solidFill>
+            <a:srgbClr val="70121D"/>
+          </a:solidFill>
+        </p:spPr>
+        <p:txBody>
+          <a:bodyPr/>
+          <a:lstStyle/>
+          <a:p>
+            <a:pPr lvl="0" indent="0" marL="0">
+              <a:buNone/>
+            </a:pPr>
+            <a:r>
+              <a:rPr/>
+              <a:t>Sampling and Pseudoreplication</a:t>
+            </a:r>
+          </a:p>
+        </p:txBody>
+      </p:sp>
+      <p:sp>
+        <p:nvSpPr>
+          <p:cNvPr id="3" name="Content Placeholder 2"/>
+          <p:cNvSpPr>
+            <a:spLocks noGrp="1"/>
+          </p:cNvSpPr>
+          <p:nvPr>
+            <p:ph idx="1" sz="half"/>
+          </p:nvPr>
+        </p:nvSpPr>
+        <p:spPr/>
+        <p:txBody>
+          <a:bodyPr/>
+          <a:lstStyle/>
+          <a:p>
+            <a:pPr lvl="0" indent="0" marL="0">
+              <a:buNone/>
+            </a:pPr>
+            <a:r>
+              <a:rPr b="1"/>
               <a:t>Pseudoreplication</a:t>
             </a:r>
             <a:r>
               <a:rPr/>
-              <a:t> inflates significance</a:t>
-            </a:r>
-          </a:p>
-          <a:p>
-            <a:pPr lvl="1"/>
-            <a:r>
-              <a:rPr/>
-              <a:t>Identify true experimental units</a:t>
-            </a:r>
-          </a:p>
-          <a:p>
-            <a:pPr lvl="1"/>
-            <a:r>
-              <a:rPr/>
-              <a:t>Account for non-independence in analysis</a:t>
-            </a:r>
-          </a:p>
-        </p:txBody>
-      </p:sp>
+              <a:t> occurs when measurements that are not independent are analyzed as if they were independent.</a:t>
+            </a:r>
+          </a:p>
+          <a:p>
+            <a:pPr lvl="0"/>
+            <a:r>
+              <a:rPr/>
+              <a:t>A critical consideration in experimental design</a:t>
+            </a:r>
+          </a:p>
+          <a:p>
+            <a:pPr lvl="0"/>
+            <a:r>
+              <a:rPr/>
+              <a:t>Results in underestimated standard errors and confidence intervals</a:t>
+            </a:r>
+          </a:p>
+          <a:p>
+            <a:pPr lvl="0"/>
+            <a:r>
+              <a:rPr/>
+              <a:t>Leads to inflated Type I error rates (false positives)</a:t>
+            </a:r>
+          </a:p>
+          <a:p>
+            <a:pPr lvl="0" indent="0" marL="0">
+              <a:buNone/>
+            </a:pPr>
+            <a:r>
+              <a:rPr b="1"/>
+              <a:t>Examples of pseudoreplication:</a:t>
+            </a:r>
+          </a:p>
+          <a:p>
+            <a:pPr lvl="0"/>
+            <a:r>
+              <a:rPr/>
+              <a:t>Measuring the same individual multiple times</a:t>
+            </a:r>
+          </a:p>
+          <a:p>
+            <a:pPr lvl="0"/>
+            <a:r>
+              <a:rPr/>
+              <a:t>Treating multiple fish from the same tank as independent</a:t>
+            </a:r>
+          </a:p>
+          <a:p>
+            <a:pPr lvl="0"/>
+            <a:r>
+              <a:rPr/>
+              <a:t>Using multiple data points from a single site</a:t>
+            </a:r>
+          </a:p>
+          <a:p>
+            <a:pPr lvl="0" indent="0" marL="0">
+              <a:buNone/>
+            </a:pPr>
+            <a:r>
+              <a:rPr b="1"/>
+              <a:t>How to avoid pseudoreplication:</a:t>
+            </a:r>
+          </a:p>
+          <a:p>
+            <a:pPr lvl="0"/>
+            <a:r>
+              <a:rPr/>
+              <a:t>Identify the true experimental unit</a:t>
+            </a:r>
+          </a:p>
+          <a:p>
+            <a:pPr lvl="0"/>
+            <a:r>
+              <a:rPr/>
+              <a:t>Use appropriate statistical techniques (e.g., mixed models)</a:t>
+            </a:r>
+          </a:p>
+          <a:p>
+            <a:pPr lvl="0"/>
+            <a:r>
+              <a:rPr/>
+              <a:t>Be clear about the level of replication</a:t>
+            </a:r>
+          </a:p>
+        </p:txBody>
+      </p:sp>
+      <p:pic>
+        <p:nvPicPr>
+          <p:cNvPr descr="power_and_error_lecture_files/figure-pptx/unnamed-chunk-7-1.png" id="0" name="Picture 1"/>
+          <p:cNvPicPr>
+            <a:picLocks noGrp="1" noChangeAspect="1"/>
+          </p:cNvPicPr>
+          <p:nvPr/>
+        </p:nvPicPr>
+        <p:blipFill>
+          <a:blip r:embed="rId2"/>
+          <a:stretch>
+            <a:fillRect/>
+          </a:stretch>
+        </p:blipFill>
+        <p:spPr bwMode="auto">
+          <a:xfrm>
+            <a:off x="6121400" y="1993900"/>
+            <a:ext cx="2781300" cy="1816100"/>
+          </a:xfrm>
+          <a:prstGeom prst="rect">
+            <a:avLst/>
+          </a:prstGeom>
+          <a:noFill/>
+          <a:ln w="9525">
+            <a:noFill/>
+            <a:headEnd/>
+            <a:tailEnd/>
+          </a:ln>
+        </p:spPr>
+      </p:pic>
     </p:spTree>
   </p:cSld>
 </p:sld>
@@ -6099,6 +9159,58 @@
         <p:spPr>
           <a:xfrm>
             <a:off x="0" y="0"/>
+            <a:ext cx="9144000" cy="582780"/>
+          </a:xfrm>
+        </p:spPr>
+        <p:txBody>
+          <a:bodyPr/>
+          <a:lstStyle/>
+          <a:p>
+            <a:pPr lvl="0" indent="0" marL="0">
+              <a:buNone/>
+            </a:pPr>
+            <a:r>
+              <a:rPr/>
+              <a:t>Part 1 · Statistical Hypothesis Testing</a:t>
+            </a:r>
+          </a:p>
+        </p:txBody>
+      </p:sp>
+    </p:spTree>
+  </p:cSld>
+</p:sld>
+</file>
+
+<file path=ppt/slides/slide30.xml><?xml version="1.0" encoding="utf-8"?>
+<p:sld xmlns:a="http://schemas.openxmlformats.org/drawingml/2006/main" xmlns:r="http://schemas.openxmlformats.org/officeDocument/2006/relationships" xmlns:p="http://schemas.openxmlformats.org/presentationml/2006/main">
+  <p:cSld>
+    <p:spTree>
+      <p:nvGrpSpPr>
+        <p:cNvPr id="1" name=""/>
+        <p:cNvGrpSpPr/>
+        <p:nvPr/>
+      </p:nvGrpSpPr>
+      <p:grpSpPr>
+        <a:xfrm>
+          <a:off x="0" y="0"/>
+          <a:ext cx="0" cy="0"/>
+          <a:chOff x="0" y="0"/>
+          <a:chExt cx="0" cy="0"/>
+        </a:xfrm>
+      </p:grpSpPr>
+      <p:sp>
+        <p:nvSpPr>
+          <p:cNvPr id="2" name="Title 1"/>
+          <p:cNvSpPr>
+            <a:spLocks noGrp="1"/>
+          </p:cNvSpPr>
+          <p:nvPr>
+            <p:ph type="title"/>
+          </p:nvPr>
+        </p:nvSpPr>
+        <p:spPr>
+          <a:xfrm>
+            <a:off x="0" y="0"/>
             <a:ext cx="9144000" cy="602780"/>
           </a:xfrm>
           <a:solidFill>
@@ -6113,12 +9225,8 @@
               <a:buNone/>
             </a:pPr>
             <a:r>
-              <a:rPr b="1"/>
-              <a:t>Lecture 6:</a:t>
-            </a:r>
-            <a:r>
-              <a:rPr/>
-              <a:t> Overview</a:t>
+              <a:rPr/>
+              <a:t>Summary and Key Takeaways</a:t>
             </a:r>
           </a:p>
         </p:txBody>
@@ -6139,83 +9247,173 @@
           <a:lstStyle/>
           <a:p>
             <a:pPr lvl="0" indent="0" marL="0">
-              <a:spcBef>
-                <a:spcPts val="3000"/>
-              </a:spcBef>
               <a:buNone/>
             </a:pPr>
             <a:r>
               <a:rPr b="1"/>
-              <a:t>The objectives:</a:t>
-            </a:r>
-          </a:p>
-          <a:p>
-            <a:pPr lvl="0"/>
-            <a:r>
-              <a:rPr/>
-              <a:t>Brief review</a:t>
-            </a:r>
-          </a:p>
-          <a:p>
-            <a:pPr lvl="0"/>
-            <a:r>
-              <a:rPr/>
-              <a:t>Hypothesis tests for two populations</a:t>
-            </a:r>
-          </a:p>
-          <a:p>
-            <a:pPr lvl="0"/>
-            <a:r>
-              <a:rPr/>
-              <a:t>Assumptions of parametric tests</a:t>
-            </a:r>
-          </a:p>
-          <a:p>
-            <a:pPr lvl="0"/>
-            <a:r>
-              <a:rPr/>
-              <a:t>Power of Parametric Tests</a:t>
-            </a:r>
-          </a:p>
-          <a:p>
-            <a:pPr lvl="0"/>
-            <a:r>
-              <a:rPr/>
-              <a:t>Introduction to Non-Parametric Tests</a:t>
-            </a:r>
-          </a:p>
-        </p:txBody>
-      </p:sp>
-      <p:pic>
-        <p:nvPicPr>
-          <p:cNvPr descr="images/pine_needles.jpg" id="0" name="Picture 1"/>
-          <p:cNvPicPr>
-            <a:picLocks noGrp="1" noChangeAspect="1"/>
-          </p:cNvPicPr>
-          <p:nvPr/>
-        </p:nvPicPr>
-        <p:blipFill>
-          <a:blip r:embed="rId2"/>
-          <a:stretch>
-            <a:fillRect/>
-          </a:stretch>
-        </p:blipFill>
-        <p:spPr bwMode="auto">
-          <a:xfrm>
-            <a:off x="6121400" y="1041400"/>
-            <a:ext cx="2781300" cy="3708400"/>
-          </a:xfrm>
-          <a:prstGeom prst="rect">
-            <a:avLst/>
-          </a:prstGeom>
-          <a:noFill/>
-          <a:ln w="9525">
-            <a:noFill/>
-            <a:headEnd/>
-            <a:tailEnd/>
-          </a:ln>
-        </p:spPr>
-      </p:pic>
+              <a:t>Key concepts covered:</a:t>
+            </a:r>
+          </a:p>
+          <a:p>
+            <a:pPr lvl="0" indent="-342900" marL="342900">
+              <a:buAutoNum type="arabicPeriod"/>
+            </a:pPr>
+            <a:r>
+              <a:rPr b="1"/>
+              <a:t>P-values</a:t>
+            </a:r>
+            <a:r>
+              <a:rPr/>
+              <a:t> measure evidence against the null hypothesis</a:t>
+            </a:r>
+          </a:p>
+          <a:p>
+            <a:pPr lvl="1"/>
+            <a:r>
+              <a:rPr/>
+              <a:t>Not the probability that H₀ is true</a:t>
+            </a:r>
+          </a:p>
+          <a:p>
+            <a:pPr lvl="1"/>
+            <a:r>
+              <a:rPr/>
+              <a:t>Should be interpreted in context with effect size</a:t>
+            </a:r>
+          </a:p>
+          <a:p>
+            <a:pPr lvl="0" indent="-342900" marL="342900">
+              <a:buAutoNum type="arabicPeriod"/>
+            </a:pPr>
+            <a:r>
+              <a:rPr b="1"/>
+              <a:t>Hypothesis testing</a:t>
+            </a:r>
+            <a:r>
+              <a:rPr/>
+              <a:t> provides a framework for making decisions</a:t>
+            </a:r>
+          </a:p>
+          <a:p>
+            <a:pPr lvl="1"/>
+            <a:r>
+              <a:rPr/>
+              <a:t>Null and alternative hypotheses must be specified beforehand</a:t>
+            </a:r>
+          </a:p>
+          <a:p>
+            <a:pPr lvl="1"/>
+            <a:r>
+              <a:rPr/>
+              <a:t>α level determines the Type I error rate</a:t>
+            </a:r>
+          </a:p>
+        </p:txBody>
+      </p:sp>
+      <p:sp>
+        <p:nvSpPr>
+          <p:cNvPr id="4" name="Content Placeholder 3"/>
+          <p:cNvSpPr>
+            <a:spLocks noGrp="1"/>
+          </p:cNvSpPr>
+          <p:nvPr>
+            <p:ph idx="2" sz="half"/>
+          </p:nvPr>
+        </p:nvSpPr>
+        <p:spPr/>
+        <p:txBody>
+          <a:bodyPr/>
+          <a:lstStyle/>
+          <a:p>
+            <a:pPr lvl="0" indent="-342900" marL="342900">
+              <a:buAutoNum startAt="3" type="arabicPeriod"/>
+            </a:pPr>
+            <a:r>
+              <a:rPr b="1"/>
+              <a:t>Type I and Type II errors</a:t>
+            </a:r>
+            <a:r>
+              <a:rPr/>
+              <a:t> represent different kinds of mistakes</a:t>
+            </a:r>
+          </a:p>
+          <a:p>
+            <a:pPr lvl="1"/>
+            <a:r>
+              <a:rPr/>
+              <a:t>Type I (α): false positive — rejecting a true H₀</a:t>
+            </a:r>
+          </a:p>
+          <a:p>
+            <a:pPr lvl="1"/>
+            <a:r>
+              <a:rPr/>
+              <a:t>Type II (β): false negative — failing to reject a false H₀</a:t>
+            </a:r>
+          </a:p>
+          <a:p>
+            <a:pPr lvl="1"/>
+            <a:r>
+              <a:rPr/>
+              <a:t>Statistical power = 1 − β</a:t>
+            </a:r>
+          </a:p>
+          <a:p>
+            <a:pPr lvl="0" indent="-342900" marL="342900">
+              <a:buAutoNum startAt="3" type="arabicPeriod"/>
+            </a:pPr>
+            <a:r>
+              <a:rPr b="1"/>
+              <a:t>Error bars</a:t>
+            </a:r>
+            <a:r>
+              <a:rPr/>
+              <a:t> communicate uncertainty in different ways</a:t>
+            </a:r>
+          </a:p>
+          <a:p>
+            <a:pPr lvl="1"/>
+            <a:r>
+              <a:rPr/>
+              <a:t>Always check what type of error bar is shown</a:t>
+            </a:r>
+          </a:p>
+          <a:p>
+            <a:pPr lvl="1"/>
+            <a:r>
+              <a:rPr/>
+              <a:t>CI bars help assess statistical significance</a:t>
+            </a:r>
+          </a:p>
+          <a:p>
+            <a:pPr lvl="0" indent="-342900" marL="342900">
+              <a:buAutoNum startAt="3" type="arabicPeriod"/>
+            </a:pPr>
+            <a:r>
+              <a:rPr b="1"/>
+              <a:t>Pseudoreplication</a:t>
+            </a:r>
+            <a:r>
+              <a:rPr/>
+              <a:t> inflates significance</a:t>
+            </a:r>
+          </a:p>
+          <a:p>
+            <a:pPr lvl="1"/>
+            <a:r>
+              <a:rPr/>
+              <a:t>Identify true experimental units</a:t>
+            </a:r>
+          </a:p>
+          <a:p>
+            <a:pPr lvl="1"/>
+            <a:r>
+              <a:rPr/>
+              <a:t>Account for non-independence in analysis</a:t>
+            </a:r>
+          </a:p>
+        </p:txBody>
+      </p:sp>
     </p:spTree>
   </p:cSld>
 </p:sld>
@@ -6265,12 +9463,8 @@
               <a:buNone/>
             </a:pPr>
             <a:r>
-              <a:rPr b="1"/>
-              <a:t>Lecture 6:</a:t>
-            </a:r>
-            <a:r>
-              <a:rPr/>
-              <a:t> Statistical hypothesis testing</a:t>
+              <a:rPr/>
+              <a:t>Statistical Hypothesis Testing</a:t>
             </a:r>
           </a:p>
         </p:txBody>
@@ -6293,56 +9487,70 @@
             <a:pPr lvl="0"/>
             <a:r>
               <a:rPr/>
-              <a:t>Major goal of statistics:</a:t>
+              <a:t>Major goal of statistics: inferences about populations from samples</a:t>
             </a:r>
           </a:p>
           <a:p>
             <a:pPr lvl="1"/>
             <a:r>
               <a:rPr/>
-              <a:t>inferences about populations from samples…</a:t>
-            </a:r>
-          </a:p>
-          <a:p>
-            <a:pPr lvl="2"/>
-            <a:r>
-              <a:rPr/>
-              <a:t>assign degree of confidence to inferences</a:t>
-            </a:r>
-          </a:p>
-          <a:p>
-            <a:pPr lvl="1"/>
-            <a:r>
-              <a:rPr/>
-              <a:t>Statistical hypothesis testing:</a:t>
-            </a:r>
-          </a:p>
-          <a:p>
-            <a:pPr lvl="2"/>
-            <a:r>
-              <a:rPr/>
-              <a:t>formalized approach to inference</a:t>
-            </a:r>
-          </a:p>
-          <a:p>
-            <a:pPr lvl="1"/>
+              <a:t>assign a degree of confidence to inferences</a:t>
+            </a:r>
+          </a:p>
+          <a:p>
+            <a:pPr lvl="0"/>
+            <a:r>
+              <a:rPr/>
+              <a:t>Statistical hypothesis testing: a formalized approach to inference</a:t>
+            </a:r>
+          </a:p>
+          <a:p>
+            <a:pPr lvl="0"/>
             <a:r>
               <a:rPr/>
               <a:t>Hypotheses ask whether samples come from populations with certain properties</a:t>
             </a:r>
           </a:p>
           <a:p>
-            <a:pPr lvl="1"/>
-            <a:r>
-              <a:rPr/>
-              <a:t>Often interested in questions about population means</a:t>
-            </a:r>
-          </a:p>
-          <a:p>
-            <a:pPr lvl="2"/>
-            <a:r>
-              <a:rPr/>
-              <a:t>but other questions are of interest</a:t>
+            <a:pPr lvl="0"/>
+            <a:r>
+              <a:rPr/>
+              <a:t>Often interested in questions about population means — but other questions are of interest too</a:t>
+            </a:r>
+          </a:p>
+          <a:p>
+            <a:pPr lvl="0" indent="0" marL="1270000">
+              <a:buNone/>
+            </a:pPr>
+            <a:r>
+              <a:rPr sz="2000" b="1"/>
+              <a:t>Note</a:t>
+            </a:r>
+          </a:p>
+          <a:p>
+            <a:pPr lvl="0" indent="0" marL="1270000">
+              <a:buNone/>
+            </a:pPr>
+            <a:r>
+              <a:rPr sz="2000" b="1"/>
+              <a:t>📖 Reference</a:t>
+            </a:r>
+          </a:p>
+          <a:p>
+            <a:pPr lvl="0" indent="0" marL="1270000">
+              <a:buNone/>
+            </a:pPr>
+            <a:r>
+              <a:rPr sz="2000"/>
+              <a:t>Gotelli &amp; Ellison, </a:t>
+            </a:r>
+            <a:r>
+              <a:rPr sz="2000" i="1"/>
+              <a:t>A Primer of Ecological Statistics</a:t>
+            </a:r>
+            <a:r>
+              <a:rPr sz="2000"/>
+              <a:t>, Ch. 4 — Framing and Testing Hypotheses.</a:t>
             </a:r>
           </a:p>
         </p:txBody>
@@ -6412,11 +9620,8 @@
         <p:spPr>
           <a:xfrm>
             <a:off x="0" y="0"/>
-            <a:ext cx="9144000" cy="602780"/>
+            <a:ext cx="9144000" cy="582780"/>
           </a:xfrm>
-          <a:solidFill>
-            <a:srgbClr val="70121D"/>
-          </a:solidFill>
         </p:spPr>
         <p:txBody>
           <a:bodyPr/>
@@ -6426,127 +9631,12 @@
               <a:buNone/>
             </a:pPr>
             <a:r>
-              <a:rPr b="1"/>
-              <a:t>Lecture 6:</a:t>
-            </a:r>
-            <a:r>
-              <a:rPr/>
-              <a:t> Hypothesis Components</a:t>
-            </a:r>
-          </a:p>
-        </p:txBody>
-      </p:sp>
-      <p:sp>
-        <p:nvSpPr>
-          <p:cNvPr id="3" name="Content Placeholder 2"/>
-          <p:cNvSpPr>
-            <a:spLocks noGrp="1"/>
-          </p:cNvSpPr>
-          <p:nvPr>
-            <p:ph idx="1" sz="half"/>
-          </p:nvPr>
-        </p:nvSpPr>
-        <p:spPr/>
-        <p:txBody>
-          <a:bodyPr/>
-          <a:lstStyle/>
-          <a:p>
-            <a:pPr lvl="0" indent="0" marL="0">
-              <a:buNone/>
-            </a:pPr>
-            <a:r>
-              <a:rPr/>
-              <a:t>Useful hypotheses:</a:t>
-            </a:r>
-          </a:p>
-          <a:p>
-            <a:pPr lvl="0"/>
-            <a:r>
-              <a:rPr/>
-              <a:t>Rely on specifying</a:t>
-            </a:r>
-          </a:p>
-          <a:p>
-            <a:pPr lvl="1"/>
-            <a:r>
-              <a:rPr/>
-              <a:t>Ho is the hypothesis of “no effect”</a:t>
-            </a:r>
-          </a:p>
-          <a:p>
-            <a:pPr lvl="2"/>
-            <a:r>
-              <a:rPr/>
-              <a:t>two samples from population with same mean</a:t>
-            </a:r>
-          </a:p>
-          <a:p>
-            <a:pPr lvl="2"/>
-            <a:r>
-              <a:rPr/>
-              <a:t>sample is from population of mean = X</a:t>
-            </a:r>
-          </a:p>
-          <a:p>
-            <a:pPr lvl="1"/>
-            <a:r>
-              <a:rPr/>
-              <a:t>Ha (research or alternate hypothesis)</a:t>
-            </a:r>
-          </a:p>
-          <a:p>
-            <a:pPr lvl="2"/>
-            <a:r>
-              <a:rPr/>
-              <a:t>is the opposite of the Ho</a:t>
-            </a:r>
-          </a:p>
-          <a:p>
-            <a:pPr lvl="2"/>
-            <a:r>
-              <a:rPr/>
-              <a:t>or predicts that there is an effect of x on y</a:t>
-            </a:r>
-          </a:p>
-          <a:p>
-            <a:pPr lvl="2"/>
-            <a:r>
-              <a:rPr i="1"/>
-              <a:t>but does NOT suggest a direction which is a prediction</a:t>
-            </a:r>
-          </a:p>
-        </p:txBody>
-      </p:sp>
-      <p:pic>
-        <p:nvPicPr>
-          <p:cNvPr descr="images/two_branches.jpg" id="0" name="Picture 1"/>
-          <p:cNvPicPr>
-            <a:picLocks noGrp="1" noChangeAspect="1"/>
-          </p:cNvPicPr>
-          <p:nvPr/>
-        </p:nvPicPr>
-        <p:blipFill>
-          <a:blip r:embed="rId2"/>
-          <a:stretch>
-            <a:fillRect/>
-          </a:stretch>
-        </p:blipFill>
-        <p:spPr bwMode="auto">
-          <a:xfrm>
-            <a:off x="6121400" y="1498600"/>
-            <a:ext cx="2781300" cy="2781300"/>
-          </a:xfrm>
-          <a:prstGeom prst="rect">
-            <a:avLst/>
-          </a:prstGeom>
-          <a:noFill/>
-          <a:ln w="9525">
-            <a:noFill/>
-            <a:headEnd/>
-            <a:tailEnd/>
-          </a:ln>
-        </p:spPr>
-      </p:pic>
+              <a:rPr/>
+              <a:t>Part 2 · Hypothesis Components</a:t>
+            </a:r>
+          </a:p>
+        </p:txBody>
+      </p:sp>
     </p:spTree>
   </p:cSld>
 </p:sld>
@@ -6596,12 +9686,8 @@
               <a:buNone/>
             </a:pPr>
             <a:r>
-              <a:rPr b="1"/>
-              <a:t>Lecture 6:</a:t>
-            </a:r>
-            <a:r>
-              <a:rPr/>
-              <a:t> Hypothesis Examples</a:t>
+              <a:rPr/>
+              <a:t>Hypothesis Components</a:t>
             </a:r>
           </a:p>
         </p:txBody>
@@ -6626,70 +9712,68 @@
             </a:pPr>
             <a:r>
               <a:rPr/>
-              <a:t>Together Ho and Ha encompass all possible outcomes:</a:t>
+              <a:t>Useful hypotheses rely on specifying:</a:t>
             </a:r>
           </a:p>
           <a:p>
             <a:pPr lvl="0"/>
             <a:r>
-              <a:rPr/>
-              <a:t>Ho: µ=0, Ha: µ ≠ 0</a:t>
+              <a:rPr b="1"/>
+              <a:t>H₀</a:t>
+            </a:r>
+            <a:r>
+              <a:rPr/>
+              <a:t> — the hypothesis of “no effect”</a:t>
             </a:r>
           </a:p>
           <a:p>
             <a:pPr lvl="1"/>
             <a:r>
               <a:rPr/>
-              <a:t>mean equals 0 or mean does not equal 0</a:t>
+              <a:t>two samples from populations with the same mean</a:t>
+            </a:r>
+          </a:p>
+          <a:p>
+            <a:pPr lvl="1"/>
+            <a:r>
+              <a:rPr/>
+              <a:t>or a sample is from a population of mean = X</a:t>
             </a:r>
           </a:p>
           <a:p>
             <a:pPr lvl="0"/>
             <a:r>
-              <a:rPr/>
-              <a:t>Ho: µ = 35, Ha: µ ≠ 35</a:t>
+              <a:rPr b="1"/>
+              <a:t>Hₐ</a:t>
+            </a:r>
+            <a:r>
+              <a:rPr/>
+              <a:t> (research or alternate hypothesis)</a:t>
             </a:r>
           </a:p>
           <a:p>
             <a:pPr lvl="1"/>
             <a:r>
               <a:rPr/>
-              <a:t>mean equals 35 or mean does not equal 35</a:t>
-            </a:r>
-          </a:p>
-          <a:p>
-            <a:pPr lvl="0"/>
-            <a:r>
-              <a:rPr/>
-              <a:t>Ho: µ1 = µ2, Ha: µ1 ≠ µ2</a:t>
+              <a:t>the opposite of H₀</a:t>
             </a:r>
           </a:p>
           <a:p>
             <a:pPr lvl="1"/>
             <a:r>
               <a:rPr/>
-              <a:t>mean of population 1 equals mean of population 2 or it does not</a:t>
-            </a:r>
-          </a:p>
-          <a:p>
-            <a:pPr lvl="0"/>
-            <a:r>
-              <a:rPr/>
-              <a:t>Ho: µ &gt; 0, Ha: µ ≤ 0</a:t>
+              <a:t>predicts an effect of x on y</a:t>
             </a:r>
           </a:p>
           <a:p>
             <a:pPr lvl="1"/>
             <a:r>
-              <a:rPr/>
-              <a:t>can be directional mean is greater than 0 or mean is not equal or less than 0</a:t>
-            </a:r>
-          </a:p>
-          <a:p>
-            <a:pPr lvl="1"/>
-            <a:r>
-              <a:rPr/>
-              <a:t>this becomes a one sided test as it predicts only one direction</a:t>
+              <a:rPr i="1"/>
+              <a:t>but does NOT suggest a direction</a:t>
+            </a:r>
+            <a:r>
+              <a:rPr/>
+              <a:t> — that’s a prediction</a:t>
             </a:r>
           </a:p>
         </p:txBody>
@@ -6773,12 +9857,8 @@
               <a:buNone/>
             </a:pPr>
             <a:r>
-              <a:rPr b="1"/>
-              <a:t>Lecture 6:</a:t>
-            </a:r>
-            <a:r>
-              <a:rPr/>
-              <a:t> Statistical Testing Framework</a:t>
+              <a:rPr/>
+              <a:t>Hypothesis Examples</a:t>
             </a:r>
           </a:p>
         </p:txBody>
@@ -6803,35 +9883,50 @@
             </a:pPr>
             <a:r>
               <a:rPr/>
-              <a:t>Statistical tests assess likelihood of the null hypothesis being true</a:t>
+              <a:t>Together, H₀ and Hₐ encompass all possible outcomes:</a:t>
             </a:r>
           </a:p>
           <a:p>
             <a:pPr lvl="0"/>
             <a:r>
               <a:rPr/>
-              <a:t>If the Ho is likely false, then Ha assumed to be correct</a:t>
+              <a:t>H₀: µ = 0, Hₐ: µ ≠ 0 — mean equals 0 or it does not</a:t>
             </a:r>
           </a:p>
           <a:p>
             <a:pPr lvl="0"/>
             <a:r>
               <a:rPr/>
-              <a:t>More precisely:</a:t>
+              <a:t>H₀: µ = 35, Hₐ: µ ≠ 35 — mean equals 35 or it does not</a:t>
+            </a:r>
+          </a:p>
+          <a:p>
+            <a:pPr lvl="0"/>
+            <a:r>
+              <a:rPr/>
+              <a:t>H₀: µ₁ = µ₂, Hₐ: µ₁ ≠ µ₂ — mean of population 1 equals mean of population 2, or it does not</a:t>
+            </a:r>
+          </a:p>
+          <a:p>
+            <a:pPr lvl="0"/>
+            <a:r>
+              <a:rPr/>
+              <a:t>H₀: µ &gt; 0, Hₐ: µ ≤ 0 — can be </a:t>
+            </a:r>
+            <a:r>
+              <a:rPr b="1"/>
+              <a:t>directional</a:t>
+            </a:r>
+            <a:r>
+              <a:rPr/>
+              <a:t>: mean is greater than 0, or mean is not greater than 0</a:t>
             </a:r>
           </a:p>
           <a:p>
             <a:pPr lvl="1"/>
             <a:r>
               <a:rPr/>
-              <a:t>the long run probability of obtaining sample value (or more extreme one) if the null hypothesis is true</a:t>
-            </a:r>
-          </a:p>
-          <a:p>
-            <a:pPr lvl="2"/>
-            <a:r>
-              <a:rPr/>
-              <a:t>p(data|Ho) - the probability of observing the data given that the null hypothesis Ho is true</a:t>
+              <a:t>this becomes a one-sided test, since it predicts only one direction</a:t>
             </a:r>
           </a:p>
         </p:txBody>
@@ -6901,6 +9996,58 @@
         <p:spPr>
           <a:xfrm>
             <a:off x="0" y="0"/>
+            <a:ext cx="9144000" cy="582780"/>
+          </a:xfrm>
+        </p:spPr>
+        <p:txBody>
+          <a:bodyPr/>
+          <a:lstStyle/>
+          <a:p>
+            <a:pPr lvl="0" indent="0" marL="0">
+              <a:buNone/>
+            </a:pPr>
+            <a:r>
+              <a:rPr/>
+              <a:t>Part 3 · P-Values</a:t>
+            </a:r>
+          </a:p>
+        </p:txBody>
+      </p:sp>
+    </p:spTree>
+  </p:cSld>
+</p:sld>
+</file>
+
+<file path=ppt/slides/slide9.xml><?xml version="1.0" encoding="utf-8"?>
+<p:sld xmlns:a="http://schemas.openxmlformats.org/drawingml/2006/main" xmlns:r="http://schemas.openxmlformats.org/officeDocument/2006/relationships" xmlns:p="http://schemas.openxmlformats.org/presentationml/2006/main">
+  <p:cSld>
+    <p:spTree>
+      <p:nvGrpSpPr>
+        <p:cNvPr id="1" name=""/>
+        <p:cNvGrpSpPr/>
+        <p:nvPr/>
+      </p:nvGrpSpPr>
+      <p:grpSpPr>
+        <a:xfrm>
+          <a:off x="0" y="0"/>
+          <a:ext cx="0" cy="0"/>
+          <a:chOff x="0" y="0"/>
+          <a:chExt cx="0" cy="0"/>
+        </a:xfrm>
+      </p:grpSpPr>
+      <p:sp>
+        <p:nvSpPr>
+          <p:cNvPr id="2" name="Title 1"/>
+          <p:cNvSpPr>
+            <a:spLocks noGrp="1"/>
+          </p:cNvSpPr>
+          <p:nvPr>
+            <p:ph type="title"/>
+          </p:nvPr>
+        </p:nvSpPr>
+        <p:spPr>
+          <a:xfrm>
+            <a:off x="0" y="0"/>
             <a:ext cx="9144000" cy="602780"/>
           </a:xfrm>
           <a:solidFill>
@@ -6915,12 +10062,8 @@
               <a:buNone/>
             </a:pPr>
             <a:r>
-              <a:rPr b="1"/>
-              <a:t>Lecture 6:</a:t>
-            </a:r>
-            <a:r>
-              <a:rPr/>
-              <a:t> Understanding P-values</a:t>
+              <a:rPr/>
+              <a:t>Statistical Testing Framework</a:t>
             </a:r>
           </a:p>
         </p:txBody>
@@ -6945,77 +10088,32 @@
             </a:pPr>
             <a:r>
               <a:rPr/>
-              <a:t>Hypothesis tests</a:t>
+              <a:t>Statistical tests assess the likelihood of the null hypothesis being true.</a:t>
             </a:r>
           </a:p>
           <a:p>
             <a:pPr lvl="0"/>
             <a:r>
               <a:rPr/>
-              <a:t>Expressed as p-value (0-never to 1-always )</a:t>
+              <a:t>If H₀ is likely false, Hₐ is assumed correct</a:t>
             </a:r>
           </a:p>
           <a:p>
             <a:pPr lvl="0"/>
             <a:r>
               <a:rPr/>
-              <a:t>Interpret p-value as:</a:t>
+              <a:t>More precisely: the long-run probability of obtaining our sample value (or a more extreme one) </a:t>
+            </a:r>
+            <a:r>
+              <a:rPr b="1"/>
+              <a:t>if the null hypothesis is true</a:t>
             </a:r>
           </a:p>
           <a:p>
             <a:pPr lvl="1"/>
             <a:r>
               <a:rPr/>
-              <a:t>probability of obtaining sample value of statistic (or more extreme one) if Ho is true</a:t>
-            </a:r>
-          </a:p>
-          <a:p>
-            <a:pPr lvl="0"/>
-            <a:r>
-              <a:rPr/>
-              <a:t>High p-value:</a:t>
-            </a:r>
-          </a:p>
-          <a:p>
-            <a:pPr lvl="1"/>
-            <a:r>
-              <a:rPr/>
-              <a:t>high probability of obtaining sample statistic under Ho</a:t>
-            </a:r>
-          </a:p>
-          <a:p>
-            <a:pPr lvl="2"/>
-            <a:r>
-              <a:rPr/>
-              <a:t>if the null hypothesis (Ho) were true, you would frequently observe data similar to your sample statistic</a:t>
-            </a:r>
-          </a:p>
-          <a:p>
-            <a:pPr lvl="2"/>
-            <a:r>
-              <a:rPr/>
-              <a:t>your observed results are quite compatible with what the null hypothesis predicts</a:t>
-            </a:r>
-          </a:p>
-          <a:p>
-            <a:pPr lvl="0"/>
-            <a:r>
-              <a:rPr/>
-              <a:t>Low p-value: low probability of obtaining sample statistic under Ho</a:t>
-            </a:r>
-          </a:p>
-          <a:p>
-            <a:pPr lvl="1"/>
-            <a:r>
-              <a:rPr/>
-              <a:t>if the null hypothesis (Ho) were true, you would rarely observe data similar to or more extreme than your sample statistic</a:t>
-            </a:r>
-          </a:p>
-          <a:p>
-            <a:pPr lvl="1"/>
-            <a:r>
-              <a:rPr/>
-              <a:t>Your results are unusual under the null hypothesis, suggesting that either you’ve witnessed a rare event or the null hypothesis may be incorrect</a:t>
+              <a:t>p(data | H₀) — the probability of observing the data given that H₀ is true</a:t>
             </a:r>
           </a:p>
         </p:txBody>
@@ -7050,152 +10148,6 @@
           </a:ln>
         </p:spPr>
       </p:pic>
-    </p:spTree>
-  </p:cSld>
-</p:sld>
-</file>
-
-<file path=ppt/slides/slide9.xml><?xml version="1.0" encoding="utf-8"?>
-<p:sld xmlns:a="http://schemas.openxmlformats.org/drawingml/2006/main" xmlns:r="http://schemas.openxmlformats.org/officeDocument/2006/relationships" xmlns:p="http://schemas.openxmlformats.org/presentationml/2006/main">
-  <p:cSld>
-    <p:spTree>
-      <p:nvGrpSpPr>
-        <p:cNvPr id="1" name=""/>
-        <p:cNvGrpSpPr/>
-        <p:nvPr/>
-      </p:nvGrpSpPr>
-      <p:grpSpPr>
-        <a:xfrm>
-          <a:off x="0" y="0"/>
-          <a:ext cx="0" cy="0"/>
-          <a:chOff x="0" y="0"/>
-          <a:chExt cx="0" cy="0"/>
-        </a:xfrm>
-      </p:grpSpPr>
-      <p:sp>
-        <p:nvSpPr>
-          <p:cNvPr id="2" name="Title 1"/>
-          <p:cNvSpPr>
-            <a:spLocks noGrp="1"/>
-          </p:cNvSpPr>
-          <p:nvPr>
-            <p:ph type="title"/>
-          </p:nvPr>
-        </p:nvSpPr>
-        <p:spPr>
-          <a:xfrm>
-            <a:off x="0" y="0"/>
-            <a:ext cx="9144000" cy="582780"/>
-          </a:xfrm>
-        </p:spPr>
-        <p:txBody>
-          <a:bodyPr/>
-          <a:lstStyle/>
-          <a:p>
-            <a:pPr lvl="0" indent="0" marL="0">
-              <a:buNone/>
-            </a:pPr>
-            <a:r>
-              <a:rPr b="1"/>
-              <a:t>Lecture 6:</a:t>
-            </a:r>
-            <a:r>
-              <a:rPr/>
-              <a:t> P-value Interpretation</a:t>
-            </a:r>
-          </a:p>
-        </p:txBody>
-      </p:sp>
-      <p:sp>
-        <p:nvSpPr>
-          <p:cNvPr id="3" name="Content Placeholder 2"/>
-          <p:cNvSpPr>
-            <a:spLocks noGrp="1"/>
-          </p:cNvSpPr>
-          <p:nvPr>
-            <p:ph idx="1"/>
-          </p:nvPr>
-        </p:nvSpPr>
-        <p:spPr/>
-        <p:txBody>
-          <a:bodyPr/>
-          <a:lstStyle/>
-          <a:p>
-            <a:pPr lvl="0" indent="0" marL="0">
-              <a:buNone/>
-            </a:pPr>
-            <a:r>
-              <a:rPr/>
-              <a:t>Statistical test results:</a:t>
-            </a:r>
-          </a:p>
-          <a:p>
-            <a:pPr lvl="0"/>
-            <a:r>
-              <a:rPr/>
-              <a:t>p = 0.3 means that if I repeated the study 100 times, I would get this (or more extreme) result due to chance </a:t>
-            </a:r>
-            <a:r>
-              <a:rPr b="1"/>
-              <a:t>30 times</a:t>
-            </a:r>
-          </a:p>
-          <a:p>
-            <a:pPr lvl="0"/>
-            <a:r>
-              <a:rPr/>
-              <a:t>p = 0.03 means that if I repeated the study 100 times, I would get this (or more extreme) result due to chance </a:t>
-            </a:r>
-            <a:r>
-              <a:rPr b="1"/>
-              <a:t>3 times</a:t>
-            </a:r>
-          </a:p>
-          <a:p>
-            <a:pPr lvl="0" indent="0" marL="0">
-              <a:buNone/>
-            </a:pPr>
-            <a:r>
-              <a:rPr i="1"/>
-              <a:t>Which p-value suggests Ho likely false?</a:t>
-            </a:r>
-          </a:p>
-          <a:p>
-            <a:pPr lvl="0" indent="0" marL="0">
-              <a:buNone/>
-            </a:pPr>
-            <a:r>
-              <a:rPr/>
-              <a:t>At what point reject Ho?</a:t>
-            </a:r>
-          </a:p>
-          <a:p>
-            <a:pPr lvl="0" indent="0" marL="0">
-              <a:buNone/>
-            </a:pPr>
-            <a:r>
-              <a:rPr/>
-              <a:t>p &lt; 0.05 conventional “significance threshold” (α = alpha or p value)</a:t>
-            </a:r>
-          </a:p>
-          <a:p>
-            <a:pPr lvl="0" indent="0" marL="0">
-              <a:buNone/>
-            </a:pPr>
-            <a:r>
-              <a:rPr/>
-              <a:t>p &lt; 0.05 means: if Ho is true and we repeated the study 100 times</a:t>
-            </a:r>
-          </a:p>
-          <a:p>
-            <a:pPr lvl="0"/>
-            <a:r>
-              <a:rPr/>
-              <a:t>we would get this (or more extreme) result less than 5 times due to chance</a:t>
-            </a:r>
-          </a:p>
-        </p:txBody>
-      </p:sp>
     </p:spTree>
   </p:cSld>
 </p:sld>

--- a/docs/content/power_and_error/power_and_error_lecture.pptx
+++ b/docs/content/power_and_error/power_and_error_lecture.pptx
@@ -3322,7 +3322,7 @@
             </a:pPr>
             <a:r>
               <a:rPr/>
-              <a:t>Power and Type I &amp; II Error</a:t>
+              <a:t>Lecture: Power and Type I &amp; II Error</a:t>
             </a:r>
           </a:p>
         </p:txBody>
@@ -9110,8 +9110,8 @@
         </p:blipFill>
         <p:spPr bwMode="auto">
           <a:xfrm>
-            <a:off x="6121400" y="1993900"/>
-            <a:ext cx="2781300" cy="1816100"/>
+            <a:off x="6121400" y="1854200"/>
+            <a:ext cx="2781300" cy="2082800"/>
           </a:xfrm>
           <a:prstGeom prst="rect">
             <a:avLst/>

--- a/docs/content/power_and_error/power_and_error_lecture.pptx
+++ b/docs/content/power_and_error/power_and_error_lecture.pptx
@@ -3518,7 +3518,7 @@
         </p:blipFill>
         <p:spPr bwMode="auto">
           <a:xfrm>
-            <a:off x="6121400" y="1498600"/>
+            <a:off x="6121400" y="1244600"/>
             <a:ext cx="2781300" cy="2781300"/>
           </a:xfrm>
           <a:prstGeom prst="rect">
@@ -3532,6 +3532,38 @@
           </a:ln>
         </p:spPr>
       </p:pic>
+      <p:sp>
+        <p:nvSpPr>
+          <p:cNvPr id="1" name="TextBox 3"/>
+          <p:cNvSpPr txBox="1"/>
+          <p:nvPr>
+            <p:ph idx="1"/>
+          </p:nvPr>
+        </p:nvSpPr>
+        <p:spPr>
+          <a:xfrm>
+            <a:off x="6121400" y="4622800"/>
+            <a:ext cx="2781300" cy="508000"/>
+          </a:xfrm>
+          <a:prstGeom prst="rect">
+            <a:avLst/>
+          </a:prstGeom>
+          <a:noFill/>
+        </p:spPr>
+        <p:txBody>
+          <a:bodyPr/>
+          <a:lstStyle/>
+          <a:p>
+            <a:pPr lvl="0" indent="0" marL="0" algn="ctr">
+              <a:buNone/>
+            </a:pPr>
+            <a:r>
+              <a:rPr/>
+              <a:t>Photo of two separate green pine branches side by side, symbolizing the two groups or hypotheses (H0 vs. Ha) being compared.</a:t>
+            </a:r>
+          </a:p>
+        </p:txBody>
+      </p:sp>
     </p:spTree>
   </p:cSld>
 </p:sld>
@@ -4367,8 +4399,8 @@
         </p:blipFill>
         <p:spPr bwMode="auto">
           <a:xfrm>
-            <a:off x="2628900" y="609600"/>
-            <a:ext cx="3822700" cy="3911600"/>
+            <a:off x="2870200" y="609600"/>
+            <a:ext cx="3327400" cy="3403600"/>
           </a:xfrm>
           <a:prstGeom prst="rect">
             <a:avLst/>
@@ -4381,6 +4413,38 @@
           </a:ln>
         </p:spPr>
       </p:pic>
+      <p:sp>
+        <p:nvSpPr>
+          <p:cNvPr id="1" name="TextBox 3"/>
+          <p:cNvSpPr txBox="1"/>
+          <p:nvPr>
+            <p:ph idx="1"/>
+          </p:nvPr>
+        </p:nvSpPr>
+        <p:spPr>
+          <a:xfrm>
+            <a:off x="0" y="4013200"/>
+            <a:ext cx="9080500" cy="508000"/>
+          </a:xfrm>
+          <a:prstGeom prst="rect">
+            <a:avLst/>
+          </a:prstGeom>
+          <a:noFill/>
+        </p:spPr>
+        <p:txBody>
+          <a:bodyPr/>
+          <a:lstStyle/>
+          <a:p>
+            <a:pPr lvl="0" indent="0" marL="0" algn="ctr">
+              <a:buNone/>
+            </a:pPr>
+            <a:r>
+              <a:rPr/>
+              <a:t>Screenshot of a Nature comment article titled ‘Scientists rise up against statistical significance,’ by Valentin Amrhein, Sander Greenland, Blake McShane and 800+ signatories, illustrated with a cartoon of two scientists shelving a book labeled ‘Statistical Significance’ in a dusty cabinet of retired scientific relics like phlogiston and spontaneous generation, symbolizing calls to retire strict significance thresholds.</a:t>
+            </a:r>
+          </a:p>
+        </p:txBody>
+      </p:sp>
     </p:spTree>
   </p:cSld>
 </p:sld>
@@ -4486,7 +4550,7 @@
         </p:blipFill>
         <p:spPr bwMode="auto">
           <a:xfrm>
-            <a:off x="6121400" y="1625600"/>
+            <a:off x="6121400" y="1371600"/>
             <a:ext cx="2781300" cy="2540000"/>
           </a:xfrm>
           <a:prstGeom prst="rect">
@@ -4500,6 +4564,38 @@
           </a:ln>
         </p:spPr>
       </p:pic>
+      <p:sp>
+        <p:nvSpPr>
+          <p:cNvPr id="1" name="TextBox 3"/>
+          <p:cNvSpPr txBox="1"/>
+          <p:nvPr>
+            <p:ph idx="1"/>
+          </p:nvPr>
+        </p:nvSpPr>
+        <p:spPr>
+          <a:xfrm>
+            <a:off x="6121400" y="4622800"/>
+            <a:ext cx="2781300" cy="508000"/>
+          </a:xfrm>
+          <a:prstGeom prst="rect">
+            <a:avLst/>
+          </a:prstGeom>
+          <a:noFill/>
+        </p:spPr>
+        <p:txBody>
+          <a:bodyPr/>
+          <a:lstStyle/>
+          <a:p>
+            <a:pPr lvl="0" indent="0" marL="0" algn="ctr">
+              <a:buNone/>
+            </a:pPr>
+            <a:r>
+              <a:rPr/>
+              <a:t>Vintage black-and-white photo of an older bearded man in glasses smoking a pipe outdoors, believed to depict R.A. Fisher, whose quote on interpreting p-values appears alongside it.</a:t>
+            </a:r>
+          </a:p>
+        </p:txBody>
+      </p:sp>
     </p:spTree>
   </p:cSld>
 </p:sld>
@@ -4694,7 +4790,7 @@
         </p:blipFill>
         <p:spPr bwMode="auto">
           <a:xfrm>
-            <a:off x="6121400" y="2070100"/>
+            <a:off x="6121400" y="1816100"/>
             <a:ext cx="2781300" cy="1651000"/>
           </a:xfrm>
           <a:prstGeom prst="rect">
@@ -4708,6 +4804,38 @@
           </a:ln>
         </p:spPr>
       </p:pic>
+      <p:sp>
+        <p:nvSpPr>
+          <p:cNvPr id="1" name="TextBox 3"/>
+          <p:cNvSpPr txBox="1"/>
+          <p:nvPr>
+            <p:ph idx="1"/>
+          </p:nvPr>
+        </p:nvSpPr>
+        <p:spPr>
+          <a:xfrm>
+            <a:off x="6121400" y="4622800"/>
+            <a:ext cx="2781300" cy="508000"/>
+          </a:xfrm>
+          <a:prstGeom prst="rect">
+            <a:avLst/>
+          </a:prstGeom>
+          <a:noFill/>
+        </p:spPr>
+        <p:txBody>
+          <a:bodyPr/>
+          <a:lstStyle/>
+          <a:p>
+            <a:pPr lvl="0" indent="0" marL="0" algn="ctr">
+              <a:buNone/>
+            </a:pPr>
+            <a:r>
+              <a:rPr/>
+              <a:t>2x2 decision-error table crossing population situation (Effect exists vs. No Effect) with statistical conclusion (Reject H0 vs. Fail to Reject H0): correct decisions on the diagonal, a red-outlined ‘False Negative / Type II Error’ cell (fail to reject when an effect exists), and a red-outlined ‘False Positive / Type I Error’ cell (reject when no effect exists).</a:t>
+            </a:r>
+          </a:p>
+        </p:txBody>
+      </p:sp>
     </p:spTree>
   </p:cSld>
 </p:sld>
@@ -4856,7 +4984,7 @@
         </p:blipFill>
         <p:spPr bwMode="auto">
           <a:xfrm>
-            <a:off x="6121400" y="1905000"/>
+            <a:off x="6121400" y="1651000"/>
             <a:ext cx="2781300" cy="1968500"/>
           </a:xfrm>
           <a:prstGeom prst="rect">
@@ -4870,6 +4998,63 @@
           </a:ln>
         </p:spPr>
       </p:pic>
+      <p:sp>
+        <p:nvSpPr>
+          <p:cNvPr id="1" name="TextBox 3"/>
+          <p:cNvSpPr txBox="1"/>
+          <p:nvPr>
+            <p:ph idx="1"/>
+          </p:nvPr>
+        </p:nvSpPr>
+        <p:spPr>
+          <a:xfrm>
+            <a:off x="6121400" y="4622800"/>
+            <a:ext cx="2781300" cy="508000"/>
+          </a:xfrm>
+          <a:prstGeom prst="rect">
+            <a:avLst/>
+          </a:prstGeom>
+          <a:noFill/>
+        </p:spPr>
+        <p:txBody>
+          <a:bodyPr/>
+          <a:lstStyle/>
+          <a:p>
+            <a:pPr lvl="0" indent="0" marL="0" algn="ctr">
+              <a:buNone/>
+            </a:pPr>
+            <a:r>
+              <a:rPr/>
+              <a:t>Two overlapping bell curves labeled H0 (Null Hypothesis) and H1 (Your Hypothesis), with a dashed vertical decision line where the small area of the H0 curve past the line is shaded teal and labeled alpha/Type I error, and the area of the H1 curve before the line is shaded orange and labeled beta/Type II error.</a:t>
+            </a:r>
+          </a:p>
+        </p:txBody>
+      </p:sp>
+      <p:sp>
+        <p:nvSpPr>
+          <p:cNvPr id="4" name="Content Placeholder 3"/>
+          <p:cNvSpPr>
+            <a:spLocks noGrp="1"/>
+          </p:cNvSpPr>
+          <p:nvPr>
+            <p:ph idx="2" sz="half"/>
+          </p:nvPr>
+        </p:nvSpPr>
+        <p:spPr/>
+        <p:txBody>
+          <a:bodyPr/>
+          <a:lstStyle/>
+          <a:p>
+            <a:pPr lvl="0" indent="0" marL="0">
+              <a:buNone/>
+            </a:pPr>
+            <a:r>
+              <a:rPr/>
+              <a:t>the dotted line is α = 0.05</a:t>
+            </a:r>
+          </a:p>
+        </p:txBody>
+      </p:sp>
     </p:spTree>
   </p:cSld>
 </p:sld>
@@ -5021,8 +5206,8 @@
         </p:blipFill>
         <p:spPr bwMode="auto">
           <a:xfrm>
-            <a:off x="6121400" y="889000"/>
-            <a:ext cx="2781300" cy="4013200"/>
+            <a:off x="6134100" y="660400"/>
+            <a:ext cx="2743200" cy="3962400"/>
           </a:xfrm>
           <a:prstGeom prst="rect">
             <a:avLst/>
@@ -5035,6 +5220,117 @@
           </a:ln>
         </p:spPr>
       </p:pic>
+      <p:sp>
+        <p:nvSpPr>
+          <p:cNvPr id="1" name="TextBox 3"/>
+          <p:cNvSpPr txBox="1"/>
+          <p:nvPr>
+            <p:ph idx="1"/>
+          </p:nvPr>
+        </p:nvSpPr>
+        <p:spPr>
+          <a:xfrm>
+            <a:off x="6121400" y="4622800"/>
+            <a:ext cx="2781300" cy="508000"/>
+          </a:xfrm>
+          <a:prstGeom prst="rect">
+            <a:avLst/>
+          </a:prstGeom>
+          <a:noFill/>
+        </p:spPr>
+        <p:txBody>
+          <a:bodyPr/>
+          <a:lstStyle/>
+          <a:p>
+            <a:pPr lvl="0" indent="0" marL="0" algn="ctr">
+              <a:buNone/>
+            </a:pPr>
+            <a:r>
+              <a:rPr/>
+              <a:t>Diagram of a large circle labeled ‘population’ full of dots with Greek-letter parameters (mu, sigma, sigma-squared), with orange arrows drawing a subset of dots down into a small circle labeled ‘sample’ with its statistics (y-bar, s, s-squared), illustrating that a sample is used to estimate unknown population parameters.</a:t>
+            </a:r>
+          </a:p>
+        </p:txBody>
+      </p:sp>
+      <p:sp>
+        <p:nvSpPr>
+          <p:cNvPr id="4" name="Content Placeholder 3"/>
+          <p:cNvSpPr>
+            <a:spLocks noGrp="1"/>
+          </p:cNvSpPr>
+          <p:nvPr>
+            <p:ph idx="2" sz="half"/>
+          </p:nvPr>
+        </p:nvSpPr>
+        <p:spPr/>
+        <p:txBody>
+          <a:bodyPr/>
+          <a:lstStyle/>
+          <a:p>
+            <a:pPr lvl="0" indent="0" marL="1270000">
+              <a:buNone/>
+            </a:pPr>
+            <a:r>
+              <a:rPr sz="2000" b="1"/>
+              <a:t>Note</a:t>
+            </a:r>
+          </a:p>
+          <a:p>
+            <a:pPr lvl="0" indent="0" marL="1270000">
+              <a:buNone/>
+            </a:pPr>
+            <a:r>
+              <a:rPr sz="2000" b="1"/>
+              <a:t>Today’s objectives</a:t>
+            </a:r>
+          </a:p>
+          <a:p>
+            <a:pPr lvl="0" indent="-342900" marL="342900">
+              <a:buAutoNum type="arabicPeriod"/>
+            </a:pPr>
+            <a:r>
+              <a:rPr sz="2000"/>
+              <a:t>Brief review</a:t>
+            </a:r>
+          </a:p>
+          <a:p>
+            <a:pPr lvl="0" indent="-342900" marL="342900">
+              <a:buAutoNum type="arabicPeriod"/>
+            </a:pPr>
+            <a:r>
+              <a:rPr sz="2000"/>
+              <a:t>Hypothesis tests for two populations</a:t>
+            </a:r>
+          </a:p>
+          <a:p>
+            <a:pPr lvl="0" indent="-342900" marL="342900">
+              <a:buAutoNum type="arabicPeriod"/>
+            </a:pPr>
+            <a:r>
+              <a:rPr sz="2000"/>
+              <a:t>Assumptions of parametric tests</a:t>
+            </a:r>
+          </a:p>
+          <a:p>
+            <a:pPr lvl="0" indent="-342900" marL="342900">
+              <a:buAutoNum type="arabicPeriod"/>
+            </a:pPr>
+            <a:r>
+              <a:rPr sz="2000"/>
+              <a:t>Power of parametric tests</a:t>
+            </a:r>
+          </a:p>
+          <a:p>
+            <a:pPr lvl="0" indent="-342900" marL="342900">
+              <a:buAutoNum type="arabicPeriod"/>
+            </a:pPr>
+            <a:r>
+              <a:rPr sz="2000"/>
+              <a:t>Introduction to non-parametric tests</a:t>
+            </a:r>
+          </a:p>
+        </p:txBody>
+      </p:sp>
     </p:spTree>
   </p:cSld>
 </p:sld>
@@ -5216,7 +5512,7 @@
         </p:blipFill>
         <p:spPr bwMode="auto">
           <a:xfrm>
-            <a:off x="6121400" y="1854200"/>
+            <a:off x="6121400" y="1600200"/>
             <a:ext cx="2781300" cy="2082800"/>
           </a:xfrm>
           <a:prstGeom prst="rect">
@@ -5230,6 +5526,38 @@
           </a:ln>
         </p:spPr>
       </p:pic>
+      <p:sp>
+        <p:nvSpPr>
+          <p:cNvPr id="1" name="TextBox 3"/>
+          <p:cNvSpPr txBox="1"/>
+          <p:nvPr>
+            <p:ph idx="1"/>
+          </p:nvPr>
+        </p:nvSpPr>
+        <p:spPr>
+          <a:xfrm>
+            <a:off x="6121400" y="4622800"/>
+            <a:ext cx="2781300" cy="508000"/>
+          </a:xfrm>
+          <a:prstGeom prst="rect">
+            <a:avLst/>
+          </a:prstGeom>
+          <a:noFill/>
+        </p:spPr>
+        <p:txBody>
+          <a:bodyPr/>
+          <a:lstStyle/>
+          <a:p>
+            <a:pPr lvl="0" indent="0" marL="0" algn="ctr">
+              <a:buNone/>
+            </a:pPr>
+            <a:r>
+              <a:rPr/>
+              <a:t>Humorous side-by-side photo illustration: ‘Type I error (false positive)’ shows a doctor telling a male patient ‘You’re pregnant,’ and ‘Type II error (false negative)’ shows a doctor telling a visibly pregnant woman ‘You’re not pregnant.’</a:t>
+            </a:r>
+          </a:p>
+        </p:txBody>
+      </p:sp>
     </p:spTree>
   </p:cSld>
 </p:sld>
@@ -9571,7 +9899,7 @@
         </p:blipFill>
         <p:spPr bwMode="auto">
           <a:xfrm>
-            <a:off x="6121400" y="1511300"/>
+            <a:off x="6121400" y="1257300"/>
             <a:ext cx="2781300" cy="2781300"/>
           </a:xfrm>
           <a:prstGeom prst="rect">
@@ -9585,6 +9913,38 @@
           </a:ln>
         </p:spPr>
       </p:pic>
+      <p:sp>
+        <p:nvSpPr>
+          <p:cNvPr id="1" name="TextBox 3"/>
+          <p:cNvSpPr txBox="1"/>
+          <p:nvPr>
+            <p:ph idx="1"/>
+          </p:nvPr>
+        </p:nvSpPr>
+        <p:spPr>
+          <a:xfrm>
+            <a:off x="6121400" y="4622800"/>
+            <a:ext cx="2781300" cy="508000"/>
+          </a:xfrm>
+          <a:prstGeom prst="rect">
+            <a:avLst/>
+          </a:prstGeom>
+          <a:noFill/>
+        </p:spPr>
+        <p:txBody>
+          <a:bodyPr/>
+          <a:lstStyle/>
+          <a:p>
+            <a:pPr lvl="0" indent="0" marL="0" algn="ctr">
+              <a:buNone/>
+            </a:pPr>
+            <a:r>
+              <a:rPr/>
+              <a:t>Photo of a mature pine tree with a gently leaning trunk and broad, layered branches of green needle clusters against a transparent background.</a:t>
+            </a:r>
+          </a:p>
+        </p:txBody>
+      </p:sp>
     </p:spTree>
   </p:cSld>
 </p:sld>
@@ -9794,7 +10154,7 @@
         </p:blipFill>
         <p:spPr bwMode="auto">
           <a:xfrm>
-            <a:off x="6121400" y="1498600"/>
+            <a:off x="6121400" y="1244600"/>
             <a:ext cx="2781300" cy="2781300"/>
           </a:xfrm>
           <a:prstGeom prst="rect">
@@ -9808,6 +10168,38 @@
           </a:ln>
         </p:spPr>
       </p:pic>
+      <p:sp>
+        <p:nvSpPr>
+          <p:cNvPr id="1" name="TextBox 3"/>
+          <p:cNvSpPr txBox="1"/>
+          <p:nvPr>
+            <p:ph idx="1"/>
+          </p:nvPr>
+        </p:nvSpPr>
+        <p:spPr>
+          <a:xfrm>
+            <a:off x="6121400" y="4622800"/>
+            <a:ext cx="2781300" cy="508000"/>
+          </a:xfrm>
+          <a:prstGeom prst="rect">
+            <a:avLst/>
+          </a:prstGeom>
+          <a:noFill/>
+        </p:spPr>
+        <p:txBody>
+          <a:bodyPr/>
+          <a:lstStyle/>
+          <a:p>
+            <a:pPr lvl="0" indent="0" marL="0" algn="ctr">
+              <a:buNone/>
+            </a:pPr>
+            <a:r>
+              <a:rPr/>
+              <a:t>Photo of two separate green pine branches side by side, symbolizing the two groups or hypotheses (H0 vs. Ha) being compared.</a:t>
+            </a:r>
+          </a:p>
+        </p:txBody>
+      </p:sp>
     </p:spTree>
   </p:cSld>
 </p:sld>
@@ -9947,7 +10339,7 @@
         </p:blipFill>
         <p:spPr bwMode="auto">
           <a:xfrm>
-            <a:off x="6121400" y="1498600"/>
+            <a:off x="6121400" y="1244600"/>
             <a:ext cx="2781300" cy="2781300"/>
           </a:xfrm>
           <a:prstGeom prst="rect">
@@ -9961,6 +10353,38 @@
           </a:ln>
         </p:spPr>
       </p:pic>
+      <p:sp>
+        <p:nvSpPr>
+          <p:cNvPr id="1" name="TextBox 3"/>
+          <p:cNvSpPr txBox="1"/>
+          <p:nvPr>
+            <p:ph idx="1"/>
+          </p:nvPr>
+        </p:nvSpPr>
+        <p:spPr>
+          <a:xfrm>
+            <a:off x="6121400" y="4622800"/>
+            <a:ext cx="2781300" cy="508000"/>
+          </a:xfrm>
+          <a:prstGeom prst="rect">
+            <a:avLst/>
+          </a:prstGeom>
+          <a:noFill/>
+        </p:spPr>
+        <p:txBody>
+          <a:bodyPr/>
+          <a:lstStyle/>
+          <a:p>
+            <a:pPr lvl="0" indent="0" marL="0" algn="ctr">
+              <a:buNone/>
+            </a:pPr>
+            <a:r>
+              <a:rPr/>
+              <a:t>Photo of two separate green pine branches side by side, symbolizing the two groups or hypotheses (H0 vs. Ha) being compared.</a:t>
+            </a:r>
+          </a:p>
+        </p:txBody>
+      </p:sp>
     </p:spTree>
   </p:cSld>
 </p:sld>
@@ -10134,7 +10558,7 @@
         </p:blipFill>
         <p:spPr bwMode="auto">
           <a:xfrm>
-            <a:off x="6121400" y="1498600"/>
+            <a:off x="6121400" y="1244600"/>
             <a:ext cx="2781300" cy="2781300"/>
           </a:xfrm>
           <a:prstGeom prst="rect">
@@ -10148,6 +10572,38 @@
           </a:ln>
         </p:spPr>
       </p:pic>
+      <p:sp>
+        <p:nvSpPr>
+          <p:cNvPr id="1" name="TextBox 3"/>
+          <p:cNvSpPr txBox="1"/>
+          <p:nvPr>
+            <p:ph idx="1"/>
+          </p:nvPr>
+        </p:nvSpPr>
+        <p:spPr>
+          <a:xfrm>
+            <a:off x="6121400" y="4622800"/>
+            <a:ext cx="2781300" cy="508000"/>
+          </a:xfrm>
+          <a:prstGeom prst="rect">
+            <a:avLst/>
+          </a:prstGeom>
+          <a:noFill/>
+        </p:spPr>
+        <p:txBody>
+          <a:bodyPr/>
+          <a:lstStyle/>
+          <a:p>
+            <a:pPr lvl="0" indent="0" marL="0" algn="ctr">
+              <a:buNone/>
+            </a:pPr>
+            <a:r>
+              <a:rPr/>
+              <a:t>Photo of two separate green pine branches side by side, symbolizing the two groups or hypotheses (H0 vs. Ha) being compared.</a:t>
+            </a:r>
+          </a:p>
+        </p:txBody>
+      </p:sp>
     </p:spTree>
   </p:cSld>
 </p:sld>
